--- a/cuhk-csc-1004/slides/CSC1004 Tutorial 8.pptx
+++ b/cuhk-csc-1004/slides/CSC1004 Tutorial 8.pptx
@@ -5,36 +5,40 @@
     <p:sldMasterId id="2147483648" r:id="rId1"/>
     <p:sldMasterId id="2147483655" r:id="rId2"/>
     <p:sldMasterId id="2147483662" r:id="rId3"/>
+    <p:sldMasterId id="2147483669" r:id="rId4"/>
+    <p:sldMasterId id="2147483676" r:id="rId5"/>
   </p:sldMasterIdLst>
   <p:notesMasterIdLst>
-    <p:notesMasterId r:id="rId21"/>
+    <p:notesMasterId r:id="rId25"/>
   </p:notesMasterIdLst>
   <p:handoutMasterIdLst>
-    <p:handoutMasterId r:id="rId22"/>
+    <p:handoutMasterId r:id="rId26"/>
   </p:handoutMasterIdLst>
   <p:sldIdLst>
-    <p:sldId id="256" r:id="rId4"/>
-    <p:sldId id="259" r:id="rId5"/>
-    <p:sldId id="261" r:id="rId6"/>
-    <p:sldId id="324" r:id="rId7"/>
-    <p:sldId id="327" r:id="rId8"/>
-    <p:sldId id="328" r:id="rId9"/>
-    <p:sldId id="329" r:id="rId10"/>
-    <p:sldId id="330" r:id="rId11"/>
-    <p:sldId id="331" r:id="rId12"/>
-    <p:sldId id="332" r:id="rId13"/>
-    <p:sldId id="333" r:id="rId14"/>
-    <p:sldId id="334" r:id="rId15"/>
-    <p:sldId id="335" r:id="rId16"/>
-    <p:sldId id="336" r:id="rId17"/>
-    <p:sldId id="337" r:id="rId18"/>
-    <p:sldId id="338" r:id="rId19"/>
-    <p:sldId id="274" r:id="rId20"/>
+    <p:sldId id="256" r:id="rId6"/>
+    <p:sldId id="259" r:id="rId7"/>
+    <p:sldId id="261" r:id="rId8"/>
+    <p:sldId id="324" r:id="rId9"/>
+    <p:sldId id="327" r:id="rId10"/>
+    <p:sldId id="328" r:id="rId11"/>
+    <p:sldId id="329" r:id="rId12"/>
+    <p:sldId id="330" r:id="rId13"/>
+    <p:sldId id="331" r:id="rId14"/>
+    <p:sldId id="332" r:id="rId15"/>
+    <p:sldId id="333" r:id="rId16"/>
+    <p:sldId id="334" r:id="rId17"/>
+    <p:sldId id="335" r:id="rId18"/>
+    <p:sldId id="336" r:id="rId19"/>
+    <p:sldId id="337" r:id="rId20"/>
+    <p:sldId id="338" r:id="rId21"/>
+    <p:sldId id="341" r:id="rId22"/>
+    <p:sldId id="340" r:id="rId23"/>
+    <p:sldId id="274" r:id="rId24"/>
   </p:sldIdLst>
   <p:sldSz cx="9144000" cy="5143500" type="screen16x9"/>
   <p:notesSz cx="5143500" cy="9144000"/>
   <p:custDataLst>
-    <p:tags r:id="rId23"/>
+    <p:tags r:id="rId27"/>
   </p:custDataLst>
   <p:defaultTextStyle>
     <a:lvl1pPr marL="0" algn="l" defTabSz="914400" rtl="0" eaLnBrk="1" latinLnBrk="0" hangingPunct="1">
@@ -218,7 +222,7 @@
           <a:p>
             <a:fld id="{0F9B84EA-7D68-4D60-9CB1-D50884785D1C}" type="datetimeFigureOut">
               <a:rPr lang="zh-CN" altLang="en-US" smtClean="0"/>
-              <a:t>2025/3/31</a:t>
+              <a:t>2026/4/9</a:t>
             </a:fld>
             <a:endParaRPr lang="zh-CN" altLang="en-US"/>
           </a:p>
@@ -383,7 +387,7 @@
           <a:p>
             <a:fld id="{5282F153-3F37-0F45-9E97-73ACFA13230C}" type="datetimeFigureOut">
               <a:rPr lang="en-US"/>
-              <a:t>3/31/25</a:t>
+              <a:t>4/9/26</a:t>
             </a:fld>
             <a:endParaRPr lang="en-US"/>
           </a:p>
@@ -1343,6 +1347,164 @@
             <a:fld id="{F7021451-1387-4CA6-816F-3879F97B5CBC}" type="slidenum">
               <a:rPr lang="en-US"/>
               <a:t>17</a:t>
+            </a:fld>
+            <a:endParaRPr lang="en-US"/>
+          </a:p>
+        </p:txBody>
+      </p:sp>
+    </p:spTree>
+  </p:cSld>
+  <p:clrMapOvr>
+    <a:masterClrMapping/>
+  </p:clrMapOvr>
+</p:notes>
+</file>
+
+<file path=ppt/notesSlides/notesSlide18.xml><?xml version="1.0" encoding="utf-8"?>
+<p:notes xmlns:a="http://schemas.openxmlformats.org/drawingml/2006/main" xmlns:r="http://schemas.openxmlformats.org/officeDocument/2006/relationships" xmlns:p="http://schemas.openxmlformats.org/presentationml/2006/main">
+  <p:cSld>
+    <p:spTree>
+      <p:nvGrpSpPr>
+        <p:cNvPr id="1" name=""/>
+        <p:cNvGrpSpPr/>
+        <p:nvPr/>
+      </p:nvGrpSpPr>
+      <p:grpSpPr>
+        <a:xfrm>
+          <a:off x="0" y="0"/>
+          <a:ext cx="0" cy="0"/>
+          <a:chOff x="0" y="0"/>
+          <a:chExt cx="0" cy="0"/>
+        </a:xfrm>
+      </p:grpSpPr>
+      <p:sp>
+        <p:nvSpPr>
+          <p:cNvPr id="2" name="Slide Image Placeholder 1"/>
+          <p:cNvSpPr>
+            <a:spLocks noGrp="1" noRot="1" noChangeAspect="1"/>
+          </p:cNvSpPr>
+          <p:nvPr>
+            <p:ph type="sldImg"/>
+          </p:nvPr>
+        </p:nvSpPr>
+        <p:spPr/>
+      </p:sp>
+      <p:sp>
+        <p:nvSpPr>
+          <p:cNvPr id="3" name="Notes Placeholder 2"/>
+          <p:cNvSpPr>
+            <a:spLocks noGrp="1"/>
+          </p:cNvSpPr>
+          <p:nvPr>
+            <p:ph type="body" idx="1"/>
+          </p:nvPr>
+        </p:nvSpPr>
+        <p:spPr/>
+        <p:txBody>
+          <a:bodyPr/>
+          <a:lstStyle/>
+          <a:p>
+            <a:endParaRPr lang="en-US" dirty="0"/>
+          </a:p>
+        </p:txBody>
+      </p:sp>
+      <p:sp>
+        <p:nvSpPr>
+          <p:cNvPr id="4" name="Slide Number Placeholder 3"/>
+          <p:cNvSpPr>
+            <a:spLocks noGrp="1"/>
+          </p:cNvSpPr>
+          <p:nvPr>
+            <p:ph type="sldNum" sz="quarter" idx="10"/>
+          </p:nvPr>
+        </p:nvSpPr>
+        <p:spPr/>
+        <p:txBody>
+          <a:bodyPr/>
+          <a:lstStyle/>
+          <a:p>
+            <a:fld id="{F7021451-1387-4CA6-816F-3879F97B5CBC}" type="slidenum">
+              <a:rPr lang="en-US"/>
+              <a:t>18</a:t>
+            </a:fld>
+            <a:endParaRPr lang="en-US"/>
+          </a:p>
+        </p:txBody>
+      </p:sp>
+    </p:spTree>
+  </p:cSld>
+  <p:clrMapOvr>
+    <a:masterClrMapping/>
+  </p:clrMapOvr>
+</p:notes>
+</file>
+
+<file path=ppt/notesSlides/notesSlide19.xml><?xml version="1.0" encoding="utf-8"?>
+<p:notes xmlns:a="http://schemas.openxmlformats.org/drawingml/2006/main" xmlns:r="http://schemas.openxmlformats.org/officeDocument/2006/relationships" xmlns:p="http://schemas.openxmlformats.org/presentationml/2006/main">
+  <p:cSld>
+    <p:spTree>
+      <p:nvGrpSpPr>
+        <p:cNvPr id="1" name=""/>
+        <p:cNvGrpSpPr/>
+        <p:nvPr/>
+      </p:nvGrpSpPr>
+      <p:grpSpPr>
+        <a:xfrm>
+          <a:off x="0" y="0"/>
+          <a:ext cx="0" cy="0"/>
+          <a:chOff x="0" y="0"/>
+          <a:chExt cx="0" cy="0"/>
+        </a:xfrm>
+      </p:grpSpPr>
+      <p:sp>
+        <p:nvSpPr>
+          <p:cNvPr id="2" name="Slide Image Placeholder 1"/>
+          <p:cNvSpPr>
+            <a:spLocks noGrp="1" noRot="1" noChangeAspect="1"/>
+          </p:cNvSpPr>
+          <p:nvPr>
+            <p:ph type="sldImg"/>
+          </p:nvPr>
+        </p:nvSpPr>
+        <p:spPr/>
+      </p:sp>
+      <p:sp>
+        <p:nvSpPr>
+          <p:cNvPr id="3" name="Notes Placeholder 2"/>
+          <p:cNvSpPr>
+            <a:spLocks noGrp="1"/>
+          </p:cNvSpPr>
+          <p:nvPr>
+            <p:ph type="body" idx="1"/>
+          </p:nvPr>
+        </p:nvSpPr>
+        <p:spPr/>
+        <p:txBody>
+          <a:bodyPr/>
+          <a:lstStyle/>
+          <a:p>
+            <a:endParaRPr lang="en-US" dirty="0"/>
+          </a:p>
+        </p:txBody>
+      </p:sp>
+      <p:sp>
+        <p:nvSpPr>
+          <p:cNvPr id="4" name="Slide Number Placeholder 3"/>
+          <p:cNvSpPr>
+            <a:spLocks noGrp="1"/>
+          </p:cNvSpPr>
+          <p:nvPr>
+            <p:ph type="sldNum" sz="quarter" idx="10"/>
+          </p:nvPr>
+        </p:nvSpPr>
+        <p:spPr/>
+        <p:txBody>
+          <a:bodyPr/>
+          <a:lstStyle/>
+          <a:p>
+            <a:fld id="{F7021451-1387-4CA6-816F-3879F97B5CBC}" type="slidenum">
+              <a:rPr lang="en-US"/>
+              <a:t>19</a:t>
             </a:fld>
             <a:endParaRPr lang="en-US"/>
           </a:p>
@@ -2552,6 +2714,36 @@
 </p:sldLayout>
 </file>
 
+<file path=ppt/slideLayouts/slideLayout19.xml><?xml version="1.0" encoding="utf-8"?>
+<p:sldLayout xmlns:a="http://schemas.openxmlformats.org/drawingml/2006/main" xmlns:r="http://schemas.openxmlformats.org/officeDocument/2006/relationships" xmlns:p="http://schemas.openxmlformats.org/presentationml/2006/main" preserve="1">
+  <p:cSld name="DEFAULT">
+    <p:bg>
+      <p:bgRef idx="1001">
+        <a:schemeClr val="bg1"/>
+      </p:bgRef>
+    </p:bg>
+    <p:spTree>
+      <p:nvGrpSpPr>
+        <p:cNvPr id="1" name=""/>
+        <p:cNvGrpSpPr/>
+        <p:nvPr/>
+      </p:nvGrpSpPr>
+      <p:grpSpPr>
+        <a:xfrm>
+          <a:off x="0" y="0"/>
+          <a:ext cx="0" cy="0"/>
+          <a:chOff x="0" y="0"/>
+          <a:chExt cx="0" cy="0"/>
+        </a:xfrm>
+      </p:grpSpPr>
+    </p:spTree>
+  </p:cSld>
+  <p:clrMapOvr>
+    <a:masterClrMapping/>
+  </p:clrMapOvr>
+</p:sldLayout>
+</file>
+
 <file path=ppt/slideLayouts/slideLayout2.xml><?xml version="1.0" encoding="utf-8"?>
 <p:sldLayout xmlns:a="http://schemas.openxmlformats.org/drawingml/2006/main" xmlns:r="http://schemas.openxmlformats.org/officeDocument/2006/relationships" xmlns:p="http://schemas.openxmlformats.org/presentationml/2006/main" preserve="1">
   <p:cSld name="Cover_slides">
@@ -2615,6 +2807,603 @@
 </p:sldLayout>
 </file>
 
+<file path=ppt/slideLayouts/slideLayout20.xml><?xml version="1.0" encoding="utf-8"?>
+<p:sldLayout xmlns:a="http://schemas.openxmlformats.org/drawingml/2006/main" xmlns:r="http://schemas.openxmlformats.org/officeDocument/2006/relationships" xmlns:p="http://schemas.openxmlformats.org/presentationml/2006/main" preserve="1">
+  <p:cSld name="Cover_slides">
+    <p:bg>
+      <p:bgPr>
+        <a:solidFill>
+          <a:srgbClr val="FFFFFF"/>
+        </a:solidFill>
+        <a:effectLst/>
+      </p:bgPr>
+    </p:bg>
+    <p:spTree>
+      <p:nvGrpSpPr>
+        <p:cNvPr id="1" name=""/>
+        <p:cNvGrpSpPr/>
+        <p:nvPr/>
+      </p:nvGrpSpPr>
+      <p:grpSpPr>
+        <a:xfrm>
+          <a:off x="0" y="0"/>
+          <a:ext cx="0" cy="0"/>
+          <a:chOff x="0" y="0"/>
+          <a:chExt cx="0" cy="0"/>
+        </a:xfrm>
+      </p:grpSpPr>
+      <p:pic>
+        <p:nvPicPr>
+          <p:cNvPr id="2" name="Image 0" descr="https://assets.mindshow.fun/themes/purpleyellow_ribbon_20221011/Cover-bg.svg"/>
+          <p:cNvPicPr>
+            <a:picLocks noChangeAspect="1"/>
+          </p:cNvPicPr>
+          <p:nvPr/>
+        </p:nvPicPr>
+        <p:blipFill>
+          <a:blip r:embed="rId2">
+            <a:extLst>
+              <a:ext uri="{96DAC541-7B7A-43D3-8B79-37D633B846F1}">
+                <asvg:svgBlip xmlns:asvg="http://schemas.microsoft.com/office/drawing/2016/SVG/main" r:embed="rId3"/>
+              </a:ext>
+            </a:extLst>
+          </a:blip>
+          <a:stretch>
+            <a:fillRect/>
+          </a:stretch>
+        </p:blipFill>
+        <p:spPr>
+          <a:xfrm>
+            <a:off x="0" y="0"/>
+            <a:ext cx="9144000" cy="5143500"/>
+          </a:xfrm>
+          <a:prstGeom prst="rect">
+            <a:avLst/>
+          </a:prstGeom>
+        </p:spPr>
+      </p:pic>
+    </p:spTree>
+  </p:cSld>
+  <p:clrMapOvr>
+    <a:masterClrMapping/>
+  </p:clrMapOvr>
+</p:sldLayout>
+</file>
+
+<file path=ppt/slideLayouts/slideLayout21.xml><?xml version="1.0" encoding="utf-8"?>
+<p:sldLayout xmlns:a="http://schemas.openxmlformats.org/drawingml/2006/main" xmlns:r="http://schemas.openxmlformats.org/officeDocument/2006/relationships" xmlns:p="http://schemas.openxmlformats.org/presentationml/2006/main" preserve="1">
+  <p:cSld name="Catalog_slides">
+    <p:bg>
+      <p:bgPr>
+        <a:solidFill>
+          <a:srgbClr val="FFFFFF"/>
+        </a:solidFill>
+        <a:effectLst/>
+      </p:bgPr>
+    </p:bg>
+    <p:spTree>
+      <p:nvGrpSpPr>
+        <p:cNvPr id="1" name=""/>
+        <p:cNvGrpSpPr/>
+        <p:nvPr/>
+      </p:nvGrpSpPr>
+      <p:grpSpPr>
+        <a:xfrm>
+          <a:off x="0" y="0"/>
+          <a:ext cx="0" cy="0"/>
+          <a:chOff x="0" y="0"/>
+          <a:chExt cx="0" cy="0"/>
+        </a:xfrm>
+      </p:grpSpPr>
+      <p:pic>
+        <p:nvPicPr>
+          <p:cNvPr id="2" name="Image 0" descr="https://assets.mindshow.fun/themes/purpleyellow_ribbon_20221011/Catalog-bg.svg"/>
+          <p:cNvPicPr>
+            <a:picLocks noChangeAspect="1"/>
+          </p:cNvPicPr>
+          <p:nvPr/>
+        </p:nvPicPr>
+        <p:blipFill>
+          <a:blip r:embed="rId2">
+            <a:extLst>
+              <a:ext uri="{96DAC541-7B7A-43D3-8B79-37D633B846F1}">
+                <asvg:svgBlip xmlns:asvg="http://schemas.microsoft.com/office/drawing/2016/SVG/main" r:embed="rId3"/>
+              </a:ext>
+            </a:extLst>
+          </a:blip>
+          <a:stretch>
+            <a:fillRect/>
+          </a:stretch>
+        </p:blipFill>
+        <p:spPr>
+          <a:xfrm>
+            <a:off x="0" y="0"/>
+            <a:ext cx="9144000" cy="5143500"/>
+          </a:xfrm>
+          <a:prstGeom prst="rect">
+            <a:avLst/>
+          </a:prstGeom>
+        </p:spPr>
+      </p:pic>
+    </p:spTree>
+  </p:cSld>
+  <p:clrMapOvr>
+    <a:masterClrMapping/>
+  </p:clrMapOvr>
+</p:sldLayout>
+</file>
+
+<file path=ppt/slideLayouts/slideLayout22.xml><?xml version="1.0" encoding="utf-8"?>
+<p:sldLayout xmlns:a="http://schemas.openxmlformats.org/drawingml/2006/main" xmlns:r="http://schemas.openxmlformats.org/officeDocument/2006/relationships" xmlns:p="http://schemas.openxmlformats.org/presentationml/2006/main" preserve="1">
+  <p:cSld name="Session_slides">
+    <p:bg>
+      <p:bgPr>
+        <a:solidFill>
+          <a:srgbClr val="FFFFFF"/>
+        </a:solidFill>
+        <a:effectLst/>
+      </p:bgPr>
+    </p:bg>
+    <p:spTree>
+      <p:nvGrpSpPr>
+        <p:cNvPr id="1" name=""/>
+        <p:cNvGrpSpPr/>
+        <p:nvPr/>
+      </p:nvGrpSpPr>
+      <p:grpSpPr>
+        <a:xfrm>
+          <a:off x="0" y="0"/>
+          <a:ext cx="0" cy="0"/>
+          <a:chOff x="0" y="0"/>
+          <a:chExt cx="0" cy="0"/>
+        </a:xfrm>
+      </p:grpSpPr>
+      <p:pic>
+        <p:nvPicPr>
+          <p:cNvPr id="2" name="Image 0" descr="https://assets.mindshow.fun/themes/purpleyellow_ribbon_20221011/Session-bg.svg"/>
+          <p:cNvPicPr>
+            <a:picLocks noChangeAspect="1"/>
+          </p:cNvPicPr>
+          <p:nvPr/>
+        </p:nvPicPr>
+        <p:blipFill>
+          <a:blip r:embed="rId2">
+            <a:extLst>
+              <a:ext uri="{96DAC541-7B7A-43D3-8B79-37D633B846F1}">
+                <asvg:svgBlip xmlns:asvg="http://schemas.microsoft.com/office/drawing/2016/SVG/main" r:embed="rId3"/>
+              </a:ext>
+            </a:extLst>
+          </a:blip>
+          <a:stretch>
+            <a:fillRect/>
+          </a:stretch>
+        </p:blipFill>
+        <p:spPr>
+          <a:xfrm>
+            <a:off x="0" y="0"/>
+            <a:ext cx="9144000" cy="5143500"/>
+          </a:xfrm>
+          <a:prstGeom prst="rect">
+            <a:avLst/>
+          </a:prstGeom>
+        </p:spPr>
+      </p:pic>
+    </p:spTree>
+  </p:cSld>
+  <p:clrMapOvr>
+    <a:masterClrMapping/>
+  </p:clrMapOvr>
+</p:sldLayout>
+</file>
+
+<file path=ppt/slideLayouts/slideLayout23.xml><?xml version="1.0" encoding="utf-8"?>
+<p:sldLayout xmlns:a="http://schemas.openxmlformats.org/drawingml/2006/main" xmlns:r="http://schemas.openxmlformats.org/officeDocument/2006/relationships" xmlns:p="http://schemas.openxmlformats.org/presentationml/2006/main" preserve="1">
+  <p:cSld name="Content_slides">
+    <p:bg>
+      <p:bgPr>
+        <a:solidFill>
+          <a:srgbClr val="FFFFFF"/>
+        </a:solidFill>
+        <a:effectLst/>
+      </p:bgPr>
+    </p:bg>
+    <p:spTree>
+      <p:nvGrpSpPr>
+        <p:cNvPr id="1" name=""/>
+        <p:cNvGrpSpPr/>
+        <p:nvPr/>
+      </p:nvGrpSpPr>
+      <p:grpSpPr>
+        <a:xfrm>
+          <a:off x="0" y="0"/>
+          <a:ext cx="0" cy="0"/>
+          <a:chOff x="0" y="0"/>
+          <a:chExt cx="0" cy="0"/>
+        </a:xfrm>
+      </p:grpSpPr>
+      <p:pic>
+        <p:nvPicPr>
+          <p:cNvPr id="2" name="Image 0" descr="https://assets.mindshow.fun/themes/purpleyellow_ribbon_20221011/Content-bg.svg"/>
+          <p:cNvPicPr>
+            <a:picLocks noChangeAspect="1"/>
+          </p:cNvPicPr>
+          <p:nvPr/>
+        </p:nvPicPr>
+        <p:blipFill>
+          <a:blip r:embed="rId2">
+            <a:extLst>
+              <a:ext uri="{96DAC541-7B7A-43D3-8B79-37D633B846F1}">
+                <asvg:svgBlip xmlns:asvg="http://schemas.microsoft.com/office/drawing/2016/SVG/main" r:embed="rId3"/>
+              </a:ext>
+            </a:extLst>
+          </a:blip>
+          <a:stretch>
+            <a:fillRect/>
+          </a:stretch>
+        </p:blipFill>
+        <p:spPr>
+          <a:xfrm>
+            <a:off x="0" y="0"/>
+            <a:ext cx="9144000" cy="5143500"/>
+          </a:xfrm>
+          <a:prstGeom prst="rect">
+            <a:avLst/>
+          </a:prstGeom>
+        </p:spPr>
+      </p:pic>
+    </p:spTree>
+  </p:cSld>
+  <p:clrMapOvr>
+    <a:masterClrMapping/>
+  </p:clrMapOvr>
+</p:sldLayout>
+</file>
+
+<file path=ppt/slideLayouts/slideLayout24.xml><?xml version="1.0" encoding="utf-8"?>
+<p:sldLayout xmlns:a="http://schemas.openxmlformats.org/drawingml/2006/main" xmlns:r="http://schemas.openxmlformats.org/officeDocument/2006/relationships" xmlns:p="http://schemas.openxmlformats.org/presentationml/2006/main" preserve="1">
+  <p:cSld name="End_slides">
+    <p:bg>
+      <p:bgPr>
+        <a:solidFill>
+          <a:srgbClr val="FFFFFF"/>
+        </a:solidFill>
+        <a:effectLst/>
+      </p:bgPr>
+    </p:bg>
+    <p:spTree>
+      <p:nvGrpSpPr>
+        <p:cNvPr id="1" name=""/>
+        <p:cNvGrpSpPr/>
+        <p:nvPr/>
+      </p:nvGrpSpPr>
+      <p:grpSpPr>
+        <a:xfrm>
+          <a:off x="0" y="0"/>
+          <a:ext cx="0" cy="0"/>
+          <a:chOff x="0" y="0"/>
+          <a:chExt cx="0" cy="0"/>
+        </a:xfrm>
+      </p:grpSpPr>
+      <p:pic>
+        <p:nvPicPr>
+          <p:cNvPr id="2" name="Image 0" descr="https://assets.mindshow.fun/themes/purpleyellow_ribbon_20221011/End-bg.svg"/>
+          <p:cNvPicPr>
+            <a:picLocks noChangeAspect="1"/>
+          </p:cNvPicPr>
+          <p:nvPr/>
+        </p:nvPicPr>
+        <p:blipFill>
+          <a:blip r:embed="rId2">
+            <a:extLst>
+              <a:ext uri="{96DAC541-7B7A-43D3-8B79-37D633B846F1}">
+                <asvg:svgBlip xmlns:asvg="http://schemas.microsoft.com/office/drawing/2016/SVG/main" r:embed="rId3"/>
+              </a:ext>
+            </a:extLst>
+          </a:blip>
+          <a:stretch>
+            <a:fillRect/>
+          </a:stretch>
+        </p:blipFill>
+        <p:spPr>
+          <a:xfrm>
+            <a:off x="0" y="0"/>
+            <a:ext cx="9144000" cy="5143500"/>
+          </a:xfrm>
+          <a:prstGeom prst="rect">
+            <a:avLst/>
+          </a:prstGeom>
+        </p:spPr>
+      </p:pic>
+    </p:spTree>
+  </p:cSld>
+  <p:clrMapOvr>
+    <a:masterClrMapping/>
+  </p:clrMapOvr>
+</p:sldLayout>
+</file>
+
+<file path=ppt/slideLayouts/slideLayout25.xml><?xml version="1.0" encoding="utf-8"?>
+<p:sldLayout xmlns:a="http://schemas.openxmlformats.org/drawingml/2006/main" xmlns:r="http://schemas.openxmlformats.org/officeDocument/2006/relationships" xmlns:p="http://schemas.openxmlformats.org/presentationml/2006/main" preserve="1">
+  <p:cSld name="DEFAULT">
+    <p:bg>
+      <p:bgRef idx="1001">
+        <a:schemeClr val="bg1"/>
+      </p:bgRef>
+    </p:bg>
+    <p:spTree>
+      <p:nvGrpSpPr>
+        <p:cNvPr id="1" name=""/>
+        <p:cNvGrpSpPr/>
+        <p:nvPr/>
+      </p:nvGrpSpPr>
+      <p:grpSpPr>
+        <a:xfrm>
+          <a:off x="0" y="0"/>
+          <a:ext cx="0" cy="0"/>
+          <a:chOff x="0" y="0"/>
+          <a:chExt cx="0" cy="0"/>
+        </a:xfrm>
+      </p:grpSpPr>
+    </p:spTree>
+  </p:cSld>
+  <p:clrMapOvr>
+    <a:masterClrMapping/>
+  </p:clrMapOvr>
+</p:sldLayout>
+</file>
+
+<file path=ppt/slideLayouts/slideLayout26.xml><?xml version="1.0" encoding="utf-8"?>
+<p:sldLayout xmlns:a="http://schemas.openxmlformats.org/drawingml/2006/main" xmlns:r="http://schemas.openxmlformats.org/officeDocument/2006/relationships" xmlns:p="http://schemas.openxmlformats.org/presentationml/2006/main" preserve="1">
+  <p:cSld name="Cover_slides">
+    <p:bg>
+      <p:bgPr>
+        <a:solidFill>
+          <a:srgbClr val="FFFFFF"/>
+        </a:solidFill>
+        <a:effectLst/>
+      </p:bgPr>
+    </p:bg>
+    <p:spTree>
+      <p:nvGrpSpPr>
+        <p:cNvPr id="1" name=""/>
+        <p:cNvGrpSpPr/>
+        <p:nvPr/>
+      </p:nvGrpSpPr>
+      <p:grpSpPr>
+        <a:xfrm>
+          <a:off x="0" y="0"/>
+          <a:ext cx="0" cy="0"/>
+          <a:chOff x="0" y="0"/>
+          <a:chExt cx="0" cy="0"/>
+        </a:xfrm>
+      </p:grpSpPr>
+      <p:pic>
+        <p:nvPicPr>
+          <p:cNvPr id="2" name="Image 0" descr="https://assets.mindshow.fun/themes/purpleyellow_ribbon_20221011/Cover-bg.svg"/>
+          <p:cNvPicPr>
+            <a:picLocks noChangeAspect="1"/>
+          </p:cNvPicPr>
+          <p:nvPr/>
+        </p:nvPicPr>
+        <p:blipFill>
+          <a:blip r:embed="rId2">
+            <a:extLst>
+              <a:ext uri="{96DAC541-7B7A-43D3-8B79-37D633B846F1}">
+                <asvg:svgBlip xmlns:asvg="http://schemas.microsoft.com/office/drawing/2016/SVG/main" r:embed="rId3"/>
+              </a:ext>
+            </a:extLst>
+          </a:blip>
+          <a:stretch>
+            <a:fillRect/>
+          </a:stretch>
+        </p:blipFill>
+        <p:spPr>
+          <a:xfrm>
+            <a:off x="0" y="0"/>
+            <a:ext cx="9144000" cy="5143500"/>
+          </a:xfrm>
+          <a:prstGeom prst="rect">
+            <a:avLst/>
+          </a:prstGeom>
+        </p:spPr>
+      </p:pic>
+    </p:spTree>
+  </p:cSld>
+  <p:clrMapOvr>
+    <a:masterClrMapping/>
+  </p:clrMapOvr>
+</p:sldLayout>
+</file>
+
+<file path=ppt/slideLayouts/slideLayout27.xml><?xml version="1.0" encoding="utf-8"?>
+<p:sldLayout xmlns:a="http://schemas.openxmlformats.org/drawingml/2006/main" xmlns:r="http://schemas.openxmlformats.org/officeDocument/2006/relationships" xmlns:p="http://schemas.openxmlformats.org/presentationml/2006/main" preserve="1">
+  <p:cSld name="Catalog_slides">
+    <p:bg>
+      <p:bgPr>
+        <a:solidFill>
+          <a:srgbClr val="FFFFFF"/>
+        </a:solidFill>
+        <a:effectLst/>
+      </p:bgPr>
+    </p:bg>
+    <p:spTree>
+      <p:nvGrpSpPr>
+        <p:cNvPr id="1" name=""/>
+        <p:cNvGrpSpPr/>
+        <p:nvPr/>
+      </p:nvGrpSpPr>
+      <p:grpSpPr>
+        <a:xfrm>
+          <a:off x="0" y="0"/>
+          <a:ext cx="0" cy="0"/>
+          <a:chOff x="0" y="0"/>
+          <a:chExt cx="0" cy="0"/>
+        </a:xfrm>
+      </p:grpSpPr>
+      <p:pic>
+        <p:nvPicPr>
+          <p:cNvPr id="2" name="Image 0" descr="https://assets.mindshow.fun/themes/purpleyellow_ribbon_20221011/Catalog-bg.svg"/>
+          <p:cNvPicPr>
+            <a:picLocks noChangeAspect="1"/>
+          </p:cNvPicPr>
+          <p:nvPr/>
+        </p:nvPicPr>
+        <p:blipFill>
+          <a:blip r:embed="rId2">
+            <a:extLst>
+              <a:ext uri="{96DAC541-7B7A-43D3-8B79-37D633B846F1}">
+                <asvg:svgBlip xmlns:asvg="http://schemas.microsoft.com/office/drawing/2016/SVG/main" r:embed="rId3"/>
+              </a:ext>
+            </a:extLst>
+          </a:blip>
+          <a:stretch>
+            <a:fillRect/>
+          </a:stretch>
+        </p:blipFill>
+        <p:spPr>
+          <a:xfrm>
+            <a:off x="0" y="0"/>
+            <a:ext cx="9144000" cy="5143500"/>
+          </a:xfrm>
+          <a:prstGeom prst="rect">
+            <a:avLst/>
+          </a:prstGeom>
+        </p:spPr>
+      </p:pic>
+    </p:spTree>
+  </p:cSld>
+  <p:clrMapOvr>
+    <a:masterClrMapping/>
+  </p:clrMapOvr>
+</p:sldLayout>
+</file>
+
+<file path=ppt/slideLayouts/slideLayout28.xml><?xml version="1.0" encoding="utf-8"?>
+<p:sldLayout xmlns:a="http://schemas.openxmlformats.org/drawingml/2006/main" xmlns:r="http://schemas.openxmlformats.org/officeDocument/2006/relationships" xmlns:p="http://schemas.openxmlformats.org/presentationml/2006/main" preserve="1">
+  <p:cSld name="Session_slides">
+    <p:bg>
+      <p:bgPr>
+        <a:solidFill>
+          <a:srgbClr val="FFFFFF"/>
+        </a:solidFill>
+        <a:effectLst/>
+      </p:bgPr>
+    </p:bg>
+    <p:spTree>
+      <p:nvGrpSpPr>
+        <p:cNvPr id="1" name=""/>
+        <p:cNvGrpSpPr/>
+        <p:nvPr/>
+      </p:nvGrpSpPr>
+      <p:grpSpPr>
+        <a:xfrm>
+          <a:off x="0" y="0"/>
+          <a:ext cx="0" cy="0"/>
+          <a:chOff x="0" y="0"/>
+          <a:chExt cx="0" cy="0"/>
+        </a:xfrm>
+      </p:grpSpPr>
+      <p:pic>
+        <p:nvPicPr>
+          <p:cNvPr id="2" name="Image 0" descr="https://assets.mindshow.fun/themes/purpleyellow_ribbon_20221011/Session-bg.svg"/>
+          <p:cNvPicPr>
+            <a:picLocks noChangeAspect="1"/>
+          </p:cNvPicPr>
+          <p:nvPr/>
+        </p:nvPicPr>
+        <p:blipFill>
+          <a:blip r:embed="rId2">
+            <a:extLst>
+              <a:ext uri="{96DAC541-7B7A-43D3-8B79-37D633B846F1}">
+                <asvg:svgBlip xmlns:asvg="http://schemas.microsoft.com/office/drawing/2016/SVG/main" r:embed="rId3"/>
+              </a:ext>
+            </a:extLst>
+          </a:blip>
+          <a:stretch>
+            <a:fillRect/>
+          </a:stretch>
+        </p:blipFill>
+        <p:spPr>
+          <a:xfrm>
+            <a:off x="0" y="0"/>
+            <a:ext cx="9144000" cy="5143500"/>
+          </a:xfrm>
+          <a:prstGeom prst="rect">
+            <a:avLst/>
+          </a:prstGeom>
+        </p:spPr>
+      </p:pic>
+    </p:spTree>
+  </p:cSld>
+  <p:clrMapOvr>
+    <a:masterClrMapping/>
+  </p:clrMapOvr>
+</p:sldLayout>
+</file>
+
+<file path=ppt/slideLayouts/slideLayout29.xml><?xml version="1.0" encoding="utf-8"?>
+<p:sldLayout xmlns:a="http://schemas.openxmlformats.org/drawingml/2006/main" xmlns:r="http://schemas.openxmlformats.org/officeDocument/2006/relationships" xmlns:p="http://schemas.openxmlformats.org/presentationml/2006/main" preserve="1">
+  <p:cSld name="Content_slides">
+    <p:bg>
+      <p:bgPr>
+        <a:solidFill>
+          <a:srgbClr val="FFFFFF"/>
+        </a:solidFill>
+        <a:effectLst/>
+      </p:bgPr>
+    </p:bg>
+    <p:spTree>
+      <p:nvGrpSpPr>
+        <p:cNvPr id="1" name=""/>
+        <p:cNvGrpSpPr/>
+        <p:nvPr/>
+      </p:nvGrpSpPr>
+      <p:grpSpPr>
+        <a:xfrm>
+          <a:off x="0" y="0"/>
+          <a:ext cx="0" cy="0"/>
+          <a:chOff x="0" y="0"/>
+          <a:chExt cx="0" cy="0"/>
+        </a:xfrm>
+      </p:grpSpPr>
+      <p:pic>
+        <p:nvPicPr>
+          <p:cNvPr id="2" name="Image 0" descr="https://assets.mindshow.fun/themes/purpleyellow_ribbon_20221011/Content-bg.svg"/>
+          <p:cNvPicPr>
+            <a:picLocks noChangeAspect="1"/>
+          </p:cNvPicPr>
+          <p:nvPr/>
+        </p:nvPicPr>
+        <p:blipFill>
+          <a:blip r:embed="rId2">
+            <a:extLst>
+              <a:ext uri="{96DAC541-7B7A-43D3-8B79-37D633B846F1}">
+                <asvg:svgBlip xmlns:asvg="http://schemas.microsoft.com/office/drawing/2016/SVG/main" r:embed="rId3"/>
+              </a:ext>
+            </a:extLst>
+          </a:blip>
+          <a:stretch>
+            <a:fillRect/>
+          </a:stretch>
+        </p:blipFill>
+        <p:spPr>
+          <a:xfrm>
+            <a:off x="0" y="0"/>
+            <a:ext cx="9144000" cy="5143500"/>
+          </a:xfrm>
+          <a:prstGeom prst="rect">
+            <a:avLst/>
+          </a:prstGeom>
+        </p:spPr>
+      </p:pic>
+    </p:spTree>
+  </p:cSld>
+  <p:clrMapOvr>
+    <a:masterClrMapping/>
+  </p:clrMapOvr>
+</p:sldLayout>
+</file>
+
 <file path=ppt/slideLayouts/slideLayout3.xml><?xml version="1.0" encoding="utf-8"?>
 <p:sldLayout xmlns:a="http://schemas.openxmlformats.org/drawingml/2006/main" xmlns:r="http://schemas.openxmlformats.org/officeDocument/2006/relationships" xmlns:p="http://schemas.openxmlformats.org/presentationml/2006/main" preserve="1">
   <p:cSld name="Catalog_slides">
@@ -2643,6 +3432,69 @@
       <p:pic>
         <p:nvPicPr>
           <p:cNvPr id="2" name="Image 0" descr="https://assets.mindshow.fun/themes/purpleyellow_ribbon_20221011/Catalog-bg.svg"/>
+          <p:cNvPicPr>
+            <a:picLocks noChangeAspect="1"/>
+          </p:cNvPicPr>
+          <p:nvPr/>
+        </p:nvPicPr>
+        <p:blipFill>
+          <a:blip r:embed="rId2">
+            <a:extLst>
+              <a:ext uri="{96DAC541-7B7A-43D3-8B79-37D633B846F1}">
+                <asvg:svgBlip xmlns:asvg="http://schemas.microsoft.com/office/drawing/2016/SVG/main" r:embed="rId3"/>
+              </a:ext>
+            </a:extLst>
+          </a:blip>
+          <a:stretch>
+            <a:fillRect/>
+          </a:stretch>
+        </p:blipFill>
+        <p:spPr>
+          <a:xfrm>
+            <a:off x="0" y="0"/>
+            <a:ext cx="9144000" cy="5143500"/>
+          </a:xfrm>
+          <a:prstGeom prst="rect">
+            <a:avLst/>
+          </a:prstGeom>
+        </p:spPr>
+      </p:pic>
+    </p:spTree>
+  </p:cSld>
+  <p:clrMapOvr>
+    <a:masterClrMapping/>
+  </p:clrMapOvr>
+</p:sldLayout>
+</file>
+
+<file path=ppt/slideLayouts/slideLayout30.xml><?xml version="1.0" encoding="utf-8"?>
+<p:sldLayout xmlns:a="http://schemas.openxmlformats.org/drawingml/2006/main" xmlns:r="http://schemas.openxmlformats.org/officeDocument/2006/relationships" xmlns:p="http://schemas.openxmlformats.org/presentationml/2006/main" preserve="1">
+  <p:cSld name="End_slides">
+    <p:bg>
+      <p:bgPr>
+        <a:solidFill>
+          <a:srgbClr val="FFFFFF"/>
+        </a:solidFill>
+        <a:effectLst/>
+      </p:bgPr>
+    </p:bg>
+    <p:spTree>
+      <p:nvGrpSpPr>
+        <p:cNvPr id="1" name=""/>
+        <p:cNvGrpSpPr/>
+        <p:nvPr/>
+      </p:nvGrpSpPr>
+      <p:grpSpPr>
+        <a:xfrm>
+          <a:off x="0" y="0"/>
+          <a:ext cx="0" cy="0"/>
+          <a:chOff x="0" y="0"/>
+          <a:chExt cx="0" cy="0"/>
+        </a:xfrm>
+      </p:grpSpPr>
+      <p:pic>
+        <p:nvPicPr>
+          <p:cNvPr id="2" name="Image 0" descr="https://assets.mindshow.fun/themes/purpleyellow_ribbon_20221011/End-bg.svg"/>
           <p:cNvPicPr>
             <a:picLocks noChangeAspect="1"/>
           </p:cNvPicPr>
@@ -3079,7 +3931,7 @@
         <a:spcBef>
           <a:spcPct val="20000"/>
         </a:spcBef>
-        <a:buFont typeface="Arial" panose="020B0604020202020204" pitchFamily="34" charset="0"/>
+        <a:buFont typeface="Arial" panose="020B0604020202090204" pitchFamily="34" charset="0"/>
         <a:buChar char="•"/>
         <a:defRPr sz="3200" kern="1200">
           <a:solidFill>
@@ -3094,7 +3946,7 @@
         <a:spcBef>
           <a:spcPct val="20000"/>
         </a:spcBef>
-        <a:buFont typeface="Arial" panose="020B0604020202020204" pitchFamily="34" charset="0"/>
+        <a:buFont typeface="Arial" panose="020B0604020202090204" pitchFamily="34" charset="0"/>
         <a:buChar char="–"/>
         <a:defRPr sz="2800" kern="1200">
           <a:solidFill>
@@ -3109,7 +3961,7 @@
         <a:spcBef>
           <a:spcPct val="20000"/>
         </a:spcBef>
-        <a:buFont typeface="Arial" panose="020B0604020202020204" pitchFamily="34" charset="0"/>
+        <a:buFont typeface="Arial" panose="020B0604020202090204" pitchFamily="34" charset="0"/>
         <a:buChar char="•"/>
         <a:defRPr sz="2400" kern="1200">
           <a:solidFill>
@@ -3124,7 +3976,7 @@
         <a:spcBef>
           <a:spcPct val="20000"/>
         </a:spcBef>
-        <a:buFont typeface="Arial" panose="020B0604020202020204" pitchFamily="34" charset="0"/>
+        <a:buFont typeface="Arial" panose="020B0604020202090204" pitchFamily="34" charset="0"/>
         <a:buChar char="–"/>
         <a:defRPr sz="2000" kern="1200">
           <a:solidFill>
@@ -3139,7 +3991,7 @@
         <a:spcBef>
           <a:spcPct val="20000"/>
         </a:spcBef>
-        <a:buFont typeface="Arial" panose="020B0604020202020204" pitchFamily="34" charset="0"/>
+        <a:buFont typeface="Arial" panose="020B0604020202090204" pitchFamily="34" charset="0"/>
         <a:buChar char="»"/>
         <a:defRPr sz="2000" kern="1200">
           <a:solidFill>
@@ -3154,7 +4006,7 @@
         <a:spcBef>
           <a:spcPct val="20000"/>
         </a:spcBef>
-        <a:buFont typeface="Arial" panose="020B0604020202020204" pitchFamily="34" charset="0"/>
+        <a:buFont typeface="Arial" panose="020B0604020202090204" pitchFamily="34" charset="0"/>
         <a:buChar char="•"/>
         <a:defRPr sz="2000" kern="1200">
           <a:solidFill>
@@ -3169,7 +4021,7 @@
         <a:spcBef>
           <a:spcPct val="20000"/>
         </a:spcBef>
-        <a:buFont typeface="Arial" panose="020B0604020202020204" pitchFamily="34" charset="0"/>
+        <a:buFont typeface="Arial" panose="020B0604020202090204" pitchFamily="34" charset="0"/>
         <a:buChar char="•"/>
         <a:defRPr sz="2000" kern="1200">
           <a:solidFill>
@@ -3184,7 +4036,7 @@
         <a:spcBef>
           <a:spcPct val="20000"/>
         </a:spcBef>
-        <a:buFont typeface="Arial" panose="020B0604020202020204" pitchFamily="34" charset="0"/>
+        <a:buFont typeface="Arial" panose="020B0604020202090204" pitchFamily="34" charset="0"/>
         <a:buChar char="•"/>
         <a:defRPr sz="2000" kern="1200">
           <a:solidFill>
@@ -3199,7 +4051,7 @@
         <a:spcBef>
           <a:spcPct val="20000"/>
         </a:spcBef>
-        <a:buFont typeface="Arial" panose="020B0604020202020204" pitchFamily="34" charset="0"/>
+        <a:buFont typeface="Arial" panose="020B0604020202090204" pitchFamily="34" charset="0"/>
         <a:buChar char="•"/>
         <a:defRPr sz="2000" kern="1200">
           <a:solidFill>
@@ -3366,7 +4218,7 @@
         <a:spcBef>
           <a:spcPct val="20000"/>
         </a:spcBef>
-        <a:buFont typeface="Arial" panose="020B0604020202020204" pitchFamily="34" charset="0"/>
+        <a:buFont typeface="Arial" panose="020B0604020202090204" pitchFamily="34" charset="0"/>
         <a:buChar char="•"/>
         <a:defRPr sz="3200" kern="1200">
           <a:solidFill>
@@ -3381,7 +4233,7 @@
         <a:spcBef>
           <a:spcPct val="20000"/>
         </a:spcBef>
-        <a:buFont typeface="Arial" panose="020B0604020202020204" pitchFamily="34" charset="0"/>
+        <a:buFont typeface="Arial" panose="020B0604020202090204" pitchFamily="34" charset="0"/>
         <a:buChar char="–"/>
         <a:defRPr sz="2800" kern="1200">
           <a:solidFill>
@@ -3396,7 +4248,7 @@
         <a:spcBef>
           <a:spcPct val="20000"/>
         </a:spcBef>
-        <a:buFont typeface="Arial" panose="020B0604020202020204" pitchFamily="34" charset="0"/>
+        <a:buFont typeface="Arial" panose="020B0604020202090204" pitchFamily="34" charset="0"/>
         <a:buChar char="•"/>
         <a:defRPr sz="2400" kern="1200">
           <a:solidFill>
@@ -3411,7 +4263,7 @@
         <a:spcBef>
           <a:spcPct val="20000"/>
         </a:spcBef>
-        <a:buFont typeface="Arial" panose="020B0604020202020204" pitchFamily="34" charset="0"/>
+        <a:buFont typeface="Arial" panose="020B0604020202090204" pitchFamily="34" charset="0"/>
         <a:buChar char="–"/>
         <a:defRPr sz="2000" kern="1200">
           <a:solidFill>
@@ -3426,7 +4278,7 @@
         <a:spcBef>
           <a:spcPct val="20000"/>
         </a:spcBef>
-        <a:buFont typeface="Arial" panose="020B0604020202020204" pitchFamily="34" charset="0"/>
+        <a:buFont typeface="Arial" panose="020B0604020202090204" pitchFamily="34" charset="0"/>
         <a:buChar char="»"/>
         <a:defRPr sz="2000" kern="1200">
           <a:solidFill>
@@ -3441,7 +4293,7 @@
         <a:spcBef>
           <a:spcPct val="20000"/>
         </a:spcBef>
-        <a:buFont typeface="Arial" panose="020B0604020202020204" pitchFamily="34" charset="0"/>
+        <a:buFont typeface="Arial" panose="020B0604020202090204" pitchFamily="34" charset="0"/>
         <a:buChar char="•"/>
         <a:defRPr sz="2000" kern="1200">
           <a:solidFill>
@@ -3456,7 +4308,7 @@
         <a:spcBef>
           <a:spcPct val="20000"/>
         </a:spcBef>
-        <a:buFont typeface="Arial" panose="020B0604020202020204" pitchFamily="34" charset="0"/>
+        <a:buFont typeface="Arial" panose="020B0604020202090204" pitchFamily="34" charset="0"/>
         <a:buChar char="•"/>
         <a:defRPr sz="2000" kern="1200">
           <a:solidFill>
@@ -3471,7 +4323,7 @@
         <a:spcBef>
           <a:spcPct val="20000"/>
         </a:spcBef>
-        <a:buFont typeface="Arial" panose="020B0604020202020204" pitchFamily="34" charset="0"/>
+        <a:buFont typeface="Arial" panose="020B0604020202090204" pitchFamily="34" charset="0"/>
         <a:buChar char="•"/>
         <a:defRPr sz="2000" kern="1200">
           <a:solidFill>
@@ -3486,7 +4338,7 @@
         <a:spcBef>
           <a:spcPct val="20000"/>
         </a:spcBef>
-        <a:buFont typeface="Arial" panose="020B0604020202020204" pitchFamily="34" charset="0"/>
+        <a:buFont typeface="Arial" panose="020B0604020202090204" pitchFamily="34" charset="0"/>
         <a:buChar char="•"/>
         <a:defRPr sz="2000" kern="1200">
           <a:solidFill>
@@ -3653,7 +4505,7 @@
         <a:spcBef>
           <a:spcPct val="20000"/>
         </a:spcBef>
-        <a:buFont typeface="Arial" panose="020B0604020202020204" pitchFamily="34" charset="0"/>
+        <a:buFont typeface="Arial" panose="020B0604020202090204" pitchFamily="34" charset="0"/>
         <a:buChar char="•"/>
         <a:defRPr sz="3200" kern="1200">
           <a:solidFill>
@@ -3668,7 +4520,7 @@
         <a:spcBef>
           <a:spcPct val="20000"/>
         </a:spcBef>
-        <a:buFont typeface="Arial" panose="020B0604020202020204" pitchFamily="34" charset="0"/>
+        <a:buFont typeface="Arial" panose="020B0604020202090204" pitchFamily="34" charset="0"/>
         <a:buChar char="–"/>
         <a:defRPr sz="2800" kern="1200">
           <a:solidFill>
@@ -3683,7 +4535,7 @@
         <a:spcBef>
           <a:spcPct val="20000"/>
         </a:spcBef>
-        <a:buFont typeface="Arial" panose="020B0604020202020204" pitchFamily="34" charset="0"/>
+        <a:buFont typeface="Arial" panose="020B0604020202090204" pitchFamily="34" charset="0"/>
         <a:buChar char="•"/>
         <a:defRPr sz="2400" kern="1200">
           <a:solidFill>
@@ -3698,7 +4550,7 @@
         <a:spcBef>
           <a:spcPct val="20000"/>
         </a:spcBef>
-        <a:buFont typeface="Arial" panose="020B0604020202020204" pitchFamily="34" charset="0"/>
+        <a:buFont typeface="Arial" panose="020B0604020202090204" pitchFamily="34" charset="0"/>
         <a:buChar char="–"/>
         <a:defRPr sz="2000" kern="1200">
           <a:solidFill>
@@ -3713,7 +4565,7 @@
         <a:spcBef>
           <a:spcPct val="20000"/>
         </a:spcBef>
-        <a:buFont typeface="Arial" panose="020B0604020202020204" pitchFamily="34" charset="0"/>
+        <a:buFont typeface="Arial" panose="020B0604020202090204" pitchFamily="34" charset="0"/>
         <a:buChar char="»"/>
         <a:defRPr sz="2000" kern="1200">
           <a:solidFill>
@@ -3728,7 +4580,7 @@
         <a:spcBef>
           <a:spcPct val="20000"/>
         </a:spcBef>
-        <a:buFont typeface="Arial" panose="020B0604020202020204" pitchFamily="34" charset="0"/>
+        <a:buFont typeface="Arial" panose="020B0604020202090204" pitchFamily="34" charset="0"/>
         <a:buChar char="•"/>
         <a:defRPr sz="2000" kern="1200">
           <a:solidFill>
@@ -3743,7 +4595,7 @@
         <a:spcBef>
           <a:spcPct val="20000"/>
         </a:spcBef>
-        <a:buFont typeface="Arial" panose="020B0604020202020204" pitchFamily="34" charset="0"/>
+        <a:buFont typeface="Arial" panose="020B0604020202090204" pitchFamily="34" charset="0"/>
         <a:buChar char="•"/>
         <a:defRPr sz="2000" kern="1200">
           <a:solidFill>
@@ -3758,7 +4610,7 @@
         <a:spcBef>
           <a:spcPct val="20000"/>
         </a:spcBef>
-        <a:buFont typeface="Arial" panose="020B0604020202020204" pitchFamily="34" charset="0"/>
+        <a:buFont typeface="Arial" panose="020B0604020202090204" pitchFamily="34" charset="0"/>
         <a:buChar char="•"/>
         <a:defRPr sz="2000" kern="1200">
           <a:solidFill>
@@ -3773,7 +4625,581 @@
         <a:spcBef>
           <a:spcPct val="20000"/>
         </a:spcBef>
-        <a:buFont typeface="Arial" panose="020B0604020202020204" pitchFamily="34" charset="0"/>
+        <a:buFont typeface="Arial" panose="020B0604020202090204" pitchFamily="34" charset="0"/>
+        <a:buChar char="•"/>
+        <a:defRPr sz="2000" kern="1200">
+          <a:solidFill>
+            <a:schemeClr val="tx1"/>
+          </a:solidFill>
+          <a:latin typeface="+mn-lt"/>
+          <a:ea typeface="+mn-ea"/>
+          <a:cs typeface="+mn-cs"/>
+        </a:defRPr>
+      </a:lvl9pPr>
+    </p:bodyStyle>
+    <p:otherStyle>
+      <a:defPPr>
+        <a:defRPr lang="en-US"/>
+      </a:defPPr>
+      <a:lvl1pPr marL="0" algn="l" defTabSz="914400" rtl="0" eaLnBrk="1" latinLnBrk="0" hangingPunct="1">
+        <a:defRPr sz="1800" kern="1200">
+          <a:solidFill>
+            <a:schemeClr val="tx1"/>
+          </a:solidFill>
+          <a:latin typeface="+mn-lt"/>
+          <a:ea typeface="+mn-ea"/>
+          <a:cs typeface="+mn-cs"/>
+        </a:defRPr>
+      </a:lvl1pPr>
+      <a:lvl2pPr marL="457200" algn="l" defTabSz="914400" rtl="0" eaLnBrk="1" latinLnBrk="0" hangingPunct="1">
+        <a:defRPr sz="1800" kern="1200">
+          <a:solidFill>
+            <a:schemeClr val="tx1"/>
+          </a:solidFill>
+          <a:latin typeface="+mn-lt"/>
+          <a:ea typeface="+mn-ea"/>
+          <a:cs typeface="+mn-cs"/>
+        </a:defRPr>
+      </a:lvl2pPr>
+      <a:lvl3pPr marL="914400" algn="l" defTabSz="914400" rtl="0" eaLnBrk="1" latinLnBrk="0" hangingPunct="1">
+        <a:defRPr sz="1800" kern="1200">
+          <a:solidFill>
+            <a:schemeClr val="tx1"/>
+          </a:solidFill>
+          <a:latin typeface="+mn-lt"/>
+          <a:ea typeface="+mn-ea"/>
+          <a:cs typeface="+mn-cs"/>
+        </a:defRPr>
+      </a:lvl3pPr>
+      <a:lvl4pPr marL="1371600" algn="l" defTabSz="914400" rtl="0" eaLnBrk="1" latinLnBrk="0" hangingPunct="1">
+        <a:defRPr sz="1800" kern="1200">
+          <a:solidFill>
+            <a:schemeClr val="tx1"/>
+          </a:solidFill>
+          <a:latin typeface="+mn-lt"/>
+          <a:ea typeface="+mn-ea"/>
+          <a:cs typeface="+mn-cs"/>
+        </a:defRPr>
+      </a:lvl4pPr>
+      <a:lvl5pPr marL="1828800" algn="l" defTabSz="914400" rtl="0" eaLnBrk="1" latinLnBrk="0" hangingPunct="1">
+        <a:defRPr sz="1800" kern="1200">
+          <a:solidFill>
+            <a:schemeClr val="tx1"/>
+          </a:solidFill>
+          <a:latin typeface="+mn-lt"/>
+          <a:ea typeface="+mn-ea"/>
+          <a:cs typeface="+mn-cs"/>
+        </a:defRPr>
+      </a:lvl5pPr>
+      <a:lvl6pPr marL="2286000" algn="l" defTabSz="914400" rtl="0" eaLnBrk="1" latinLnBrk="0" hangingPunct="1">
+        <a:defRPr sz="1800" kern="1200">
+          <a:solidFill>
+            <a:schemeClr val="tx1"/>
+          </a:solidFill>
+          <a:latin typeface="+mn-lt"/>
+          <a:ea typeface="+mn-ea"/>
+          <a:cs typeface="+mn-cs"/>
+        </a:defRPr>
+      </a:lvl6pPr>
+      <a:lvl7pPr marL="2743200" algn="l" defTabSz="914400" rtl="0" eaLnBrk="1" latinLnBrk="0" hangingPunct="1">
+        <a:defRPr sz="1800" kern="1200">
+          <a:solidFill>
+            <a:schemeClr val="tx1"/>
+          </a:solidFill>
+          <a:latin typeface="+mn-lt"/>
+          <a:ea typeface="+mn-ea"/>
+          <a:cs typeface="+mn-cs"/>
+        </a:defRPr>
+      </a:lvl7pPr>
+      <a:lvl8pPr marL="3200400" algn="l" defTabSz="914400" rtl="0" eaLnBrk="1" latinLnBrk="0" hangingPunct="1">
+        <a:defRPr sz="1800" kern="1200">
+          <a:solidFill>
+            <a:schemeClr val="tx1"/>
+          </a:solidFill>
+          <a:latin typeface="+mn-lt"/>
+          <a:ea typeface="+mn-ea"/>
+          <a:cs typeface="+mn-cs"/>
+        </a:defRPr>
+      </a:lvl8pPr>
+      <a:lvl9pPr marL="3657600" algn="l" defTabSz="914400" rtl="0" eaLnBrk="1" latinLnBrk="0" hangingPunct="1">
+        <a:defRPr sz="1800" kern="1200">
+          <a:solidFill>
+            <a:schemeClr val="tx1"/>
+          </a:solidFill>
+          <a:latin typeface="+mn-lt"/>
+          <a:ea typeface="+mn-ea"/>
+          <a:cs typeface="+mn-cs"/>
+        </a:defRPr>
+      </a:lvl9pPr>
+    </p:otherStyle>
+  </p:txStyles>
+</p:sldMaster>
+</file>
+
+<file path=ppt/slideMasters/slideMaster4.xml><?xml version="1.0" encoding="utf-8"?>
+<p:sldMaster xmlns:a="http://schemas.openxmlformats.org/drawingml/2006/main" xmlns:r="http://schemas.openxmlformats.org/officeDocument/2006/relationships" xmlns:p="http://schemas.openxmlformats.org/presentationml/2006/main">
+  <p:cSld>
+    <p:bg>
+      <p:bgRef idx="1001">
+        <a:schemeClr val="bg1"/>
+      </p:bgRef>
+    </p:bg>
+    <p:spTree>
+      <p:nvGrpSpPr>
+        <p:cNvPr id="1" name=""/>
+        <p:cNvGrpSpPr/>
+        <p:nvPr/>
+      </p:nvGrpSpPr>
+      <p:grpSpPr>
+        <a:xfrm>
+          <a:off x="0" y="0"/>
+          <a:ext cx="0" cy="0"/>
+          <a:chOff x="0" y="0"/>
+          <a:chExt cx="0" cy="0"/>
+        </a:xfrm>
+      </p:grpSpPr>
+    </p:spTree>
+  </p:cSld>
+  <p:clrMap bg1="lt1" tx1="dk1" bg2="lt2" tx2="dk2" accent1="accent1" accent2="accent2" accent3="accent3" accent4="accent4" accent5="accent5" accent6="accent6" hlink="hlink" folHlink="folHlink"/>
+  <p:sldLayoutIdLst>
+    <p:sldLayoutId id="2147483670" r:id="rId1"/>
+    <p:sldLayoutId id="2147483671" r:id="rId2"/>
+    <p:sldLayoutId id="2147483672" r:id="rId3"/>
+    <p:sldLayoutId id="2147483673" r:id="rId4"/>
+    <p:sldLayoutId id="2147483674" r:id="rId5"/>
+    <p:sldLayoutId id="2147483675" r:id="rId6"/>
+  </p:sldLayoutIdLst>
+  <p:hf sldNum="0" hdr="0" ftr="0" dt="0"/>
+  <p:txStyles>
+    <p:titleStyle>
+      <a:lvl1pPr algn="ctr" defTabSz="914400" rtl="0" eaLnBrk="1" latinLnBrk="0" hangingPunct="1">
+        <a:spcBef>
+          <a:spcPct val="0"/>
+        </a:spcBef>
+        <a:buNone/>
+        <a:defRPr sz="4400" kern="1200">
+          <a:solidFill>
+            <a:schemeClr val="tx1"/>
+          </a:solidFill>
+          <a:latin typeface="+mj-lt"/>
+          <a:ea typeface="+mj-ea"/>
+          <a:cs typeface="+mj-cs"/>
+        </a:defRPr>
+      </a:lvl1pPr>
+    </p:titleStyle>
+    <p:bodyStyle>
+      <a:lvl1pPr marL="342900" indent="-342900" algn="l" defTabSz="914400" rtl="0" eaLnBrk="1" latinLnBrk="0" hangingPunct="1">
+        <a:spcBef>
+          <a:spcPct val="20000"/>
+        </a:spcBef>
+        <a:buFont typeface="Arial" panose="020B0604020202090204" pitchFamily="34" charset="0"/>
+        <a:buChar char="•"/>
+        <a:defRPr sz="3200" kern="1200">
+          <a:solidFill>
+            <a:schemeClr val="tx1"/>
+          </a:solidFill>
+          <a:latin typeface="+mn-lt"/>
+          <a:ea typeface="+mn-ea"/>
+          <a:cs typeface="+mn-cs"/>
+        </a:defRPr>
+      </a:lvl1pPr>
+      <a:lvl2pPr marL="742950" indent="-285750" algn="l" defTabSz="914400" rtl="0" eaLnBrk="1" latinLnBrk="0" hangingPunct="1">
+        <a:spcBef>
+          <a:spcPct val="20000"/>
+        </a:spcBef>
+        <a:buFont typeface="Arial" panose="020B0604020202090204" pitchFamily="34" charset="0"/>
+        <a:buChar char="–"/>
+        <a:defRPr sz="2800" kern="1200">
+          <a:solidFill>
+            <a:schemeClr val="tx1"/>
+          </a:solidFill>
+          <a:latin typeface="+mn-lt"/>
+          <a:ea typeface="+mn-ea"/>
+          <a:cs typeface="+mn-cs"/>
+        </a:defRPr>
+      </a:lvl2pPr>
+      <a:lvl3pPr marL="1143000" indent="-228600" algn="l" defTabSz="914400" rtl="0" eaLnBrk="1" latinLnBrk="0" hangingPunct="1">
+        <a:spcBef>
+          <a:spcPct val="20000"/>
+        </a:spcBef>
+        <a:buFont typeface="Arial" panose="020B0604020202090204" pitchFamily="34" charset="0"/>
+        <a:buChar char="•"/>
+        <a:defRPr sz="2400" kern="1200">
+          <a:solidFill>
+            <a:schemeClr val="tx1"/>
+          </a:solidFill>
+          <a:latin typeface="+mn-lt"/>
+          <a:ea typeface="+mn-ea"/>
+          <a:cs typeface="+mn-cs"/>
+        </a:defRPr>
+      </a:lvl3pPr>
+      <a:lvl4pPr marL="1600200" indent="-228600" algn="l" defTabSz="914400" rtl="0" eaLnBrk="1" latinLnBrk="0" hangingPunct="1">
+        <a:spcBef>
+          <a:spcPct val="20000"/>
+        </a:spcBef>
+        <a:buFont typeface="Arial" panose="020B0604020202090204" pitchFamily="34" charset="0"/>
+        <a:buChar char="–"/>
+        <a:defRPr sz="2000" kern="1200">
+          <a:solidFill>
+            <a:schemeClr val="tx1"/>
+          </a:solidFill>
+          <a:latin typeface="+mn-lt"/>
+          <a:ea typeface="+mn-ea"/>
+          <a:cs typeface="+mn-cs"/>
+        </a:defRPr>
+      </a:lvl4pPr>
+      <a:lvl5pPr marL="2057400" indent="-228600" algn="l" defTabSz="914400" rtl="0" eaLnBrk="1" latinLnBrk="0" hangingPunct="1">
+        <a:spcBef>
+          <a:spcPct val="20000"/>
+        </a:spcBef>
+        <a:buFont typeface="Arial" panose="020B0604020202090204" pitchFamily="34" charset="0"/>
+        <a:buChar char="»"/>
+        <a:defRPr sz="2000" kern="1200">
+          <a:solidFill>
+            <a:schemeClr val="tx1"/>
+          </a:solidFill>
+          <a:latin typeface="+mn-lt"/>
+          <a:ea typeface="+mn-ea"/>
+          <a:cs typeface="+mn-cs"/>
+        </a:defRPr>
+      </a:lvl5pPr>
+      <a:lvl6pPr marL="2514600" indent="-228600" algn="l" defTabSz="914400" rtl="0" eaLnBrk="1" latinLnBrk="0" hangingPunct="1">
+        <a:spcBef>
+          <a:spcPct val="20000"/>
+        </a:spcBef>
+        <a:buFont typeface="Arial" panose="020B0604020202090204" pitchFamily="34" charset="0"/>
+        <a:buChar char="•"/>
+        <a:defRPr sz="2000" kern="1200">
+          <a:solidFill>
+            <a:schemeClr val="tx1"/>
+          </a:solidFill>
+          <a:latin typeface="+mn-lt"/>
+          <a:ea typeface="+mn-ea"/>
+          <a:cs typeface="+mn-cs"/>
+        </a:defRPr>
+      </a:lvl6pPr>
+      <a:lvl7pPr marL="2971800" indent="-228600" algn="l" defTabSz="914400" rtl="0" eaLnBrk="1" latinLnBrk="0" hangingPunct="1">
+        <a:spcBef>
+          <a:spcPct val="20000"/>
+        </a:spcBef>
+        <a:buFont typeface="Arial" panose="020B0604020202090204" pitchFamily="34" charset="0"/>
+        <a:buChar char="•"/>
+        <a:defRPr sz="2000" kern="1200">
+          <a:solidFill>
+            <a:schemeClr val="tx1"/>
+          </a:solidFill>
+          <a:latin typeface="+mn-lt"/>
+          <a:ea typeface="+mn-ea"/>
+          <a:cs typeface="+mn-cs"/>
+        </a:defRPr>
+      </a:lvl7pPr>
+      <a:lvl8pPr marL="3429000" indent="-228600" algn="l" defTabSz="914400" rtl="0" eaLnBrk="1" latinLnBrk="0" hangingPunct="1">
+        <a:spcBef>
+          <a:spcPct val="20000"/>
+        </a:spcBef>
+        <a:buFont typeface="Arial" panose="020B0604020202090204" pitchFamily="34" charset="0"/>
+        <a:buChar char="•"/>
+        <a:defRPr sz="2000" kern="1200">
+          <a:solidFill>
+            <a:schemeClr val="tx1"/>
+          </a:solidFill>
+          <a:latin typeface="+mn-lt"/>
+          <a:ea typeface="+mn-ea"/>
+          <a:cs typeface="+mn-cs"/>
+        </a:defRPr>
+      </a:lvl8pPr>
+      <a:lvl9pPr marL="3886200" indent="-228600" algn="l" defTabSz="914400" rtl="0" eaLnBrk="1" latinLnBrk="0" hangingPunct="1">
+        <a:spcBef>
+          <a:spcPct val="20000"/>
+        </a:spcBef>
+        <a:buFont typeface="Arial" panose="020B0604020202090204" pitchFamily="34" charset="0"/>
+        <a:buChar char="•"/>
+        <a:defRPr sz="2000" kern="1200">
+          <a:solidFill>
+            <a:schemeClr val="tx1"/>
+          </a:solidFill>
+          <a:latin typeface="+mn-lt"/>
+          <a:ea typeface="+mn-ea"/>
+          <a:cs typeface="+mn-cs"/>
+        </a:defRPr>
+      </a:lvl9pPr>
+    </p:bodyStyle>
+    <p:otherStyle>
+      <a:defPPr>
+        <a:defRPr lang="en-US"/>
+      </a:defPPr>
+      <a:lvl1pPr marL="0" algn="l" defTabSz="914400" rtl="0" eaLnBrk="1" latinLnBrk="0" hangingPunct="1">
+        <a:defRPr sz="1800" kern="1200">
+          <a:solidFill>
+            <a:schemeClr val="tx1"/>
+          </a:solidFill>
+          <a:latin typeface="+mn-lt"/>
+          <a:ea typeface="+mn-ea"/>
+          <a:cs typeface="+mn-cs"/>
+        </a:defRPr>
+      </a:lvl1pPr>
+      <a:lvl2pPr marL="457200" algn="l" defTabSz="914400" rtl="0" eaLnBrk="1" latinLnBrk="0" hangingPunct="1">
+        <a:defRPr sz="1800" kern="1200">
+          <a:solidFill>
+            <a:schemeClr val="tx1"/>
+          </a:solidFill>
+          <a:latin typeface="+mn-lt"/>
+          <a:ea typeface="+mn-ea"/>
+          <a:cs typeface="+mn-cs"/>
+        </a:defRPr>
+      </a:lvl2pPr>
+      <a:lvl3pPr marL="914400" algn="l" defTabSz="914400" rtl="0" eaLnBrk="1" latinLnBrk="0" hangingPunct="1">
+        <a:defRPr sz="1800" kern="1200">
+          <a:solidFill>
+            <a:schemeClr val="tx1"/>
+          </a:solidFill>
+          <a:latin typeface="+mn-lt"/>
+          <a:ea typeface="+mn-ea"/>
+          <a:cs typeface="+mn-cs"/>
+        </a:defRPr>
+      </a:lvl3pPr>
+      <a:lvl4pPr marL="1371600" algn="l" defTabSz="914400" rtl="0" eaLnBrk="1" latinLnBrk="0" hangingPunct="1">
+        <a:defRPr sz="1800" kern="1200">
+          <a:solidFill>
+            <a:schemeClr val="tx1"/>
+          </a:solidFill>
+          <a:latin typeface="+mn-lt"/>
+          <a:ea typeface="+mn-ea"/>
+          <a:cs typeface="+mn-cs"/>
+        </a:defRPr>
+      </a:lvl4pPr>
+      <a:lvl5pPr marL="1828800" algn="l" defTabSz="914400" rtl="0" eaLnBrk="1" latinLnBrk="0" hangingPunct="1">
+        <a:defRPr sz="1800" kern="1200">
+          <a:solidFill>
+            <a:schemeClr val="tx1"/>
+          </a:solidFill>
+          <a:latin typeface="+mn-lt"/>
+          <a:ea typeface="+mn-ea"/>
+          <a:cs typeface="+mn-cs"/>
+        </a:defRPr>
+      </a:lvl5pPr>
+      <a:lvl6pPr marL="2286000" algn="l" defTabSz="914400" rtl="0" eaLnBrk="1" latinLnBrk="0" hangingPunct="1">
+        <a:defRPr sz="1800" kern="1200">
+          <a:solidFill>
+            <a:schemeClr val="tx1"/>
+          </a:solidFill>
+          <a:latin typeface="+mn-lt"/>
+          <a:ea typeface="+mn-ea"/>
+          <a:cs typeface="+mn-cs"/>
+        </a:defRPr>
+      </a:lvl6pPr>
+      <a:lvl7pPr marL="2743200" algn="l" defTabSz="914400" rtl="0" eaLnBrk="1" latinLnBrk="0" hangingPunct="1">
+        <a:defRPr sz="1800" kern="1200">
+          <a:solidFill>
+            <a:schemeClr val="tx1"/>
+          </a:solidFill>
+          <a:latin typeface="+mn-lt"/>
+          <a:ea typeface="+mn-ea"/>
+          <a:cs typeface="+mn-cs"/>
+        </a:defRPr>
+      </a:lvl7pPr>
+      <a:lvl8pPr marL="3200400" algn="l" defTabSz="914400" rtl="0" eaLnBrk="1" latinLnBrk="0" hangingPunct="1">
+        <a:defRPr sz="1800" kern="1200">
+          <a:solidFill>
+            <a:schemeClr val="tx1"/>
+          </a:solidFill>
+          <a:latin typeface="+mn-lt"/>
+          <a:ea typeface="+mn-ea"/>
+          <a:cs typeface="+mn-cs"/>
+        </a:defRPr>
+      </a:lvl8pPr>
+      <a:lvl9pPr marL="3657600" algn="l" defTabSz="914400" rtl="0" eaLnBrk="1" latinLnBrk="0" hangingPunct="1">
+        <a:defRPr sz="1800" kern="1200">
+          <a:solidFill>
+            <a:schemeClr val="tx1"/>
+          </a:solidFill>
+          <a:latin typeface="+mn-lt"/>
+          <a:ea typeface="+mn-ea"/>
+          <a:cs typeface="+mn-cs"/>
+        </a:defRPr>
+      </a:lvl9pPr>
+    </p:otherStyle>
+  </p:txStyles>
+</p:sldMaster>
+</file>
+
+<file path=ppt/slideMasters/slideMaster5.xml><?xml version="1.0" encoding="utf-8"?>
+<p:sldMaster xmlns:a="http://schemas.openxmlformats.org/drawingml/2006/main" xmlns:r="http://schemas.openxmlformats.org/officeDocument/2006/relationships" xmlns:p="http://schemas.openxmlformats.org/presentationml/2006/main">
+  <p:cSld>
+    <p:bg>
+      <p:bgRef idx="1001">
+        <a:schemeClr val="bg1"/>
+      </p:bgRef>
+    </p:bg>
+    <p:spTree>
+      <p:nvGrpSpPr>
+        <p:cNvPr id="1" name=""/>
+        <p:cNvGrpSpPr/>
+        <p:nvPr/>
+      </p:nvGrpSpPr>
+      <p:grpSpPr>
+        <a:xfrm>
+          <a:off x="0" y="0"/>
+          <a:ext cx="0" cy="0"/>
+          <a:chOff x="0" y="0"/>
+          <a:chExt cx="0" cy="0"/>
+        </a:xfrm>
+      </p:grpSpPr>
+    </p:spTree>
+  </p:cSld>
+  <p:clrMap bg1="lt1" tx1="dk1" bg2="lt2" tx2="dk2" accent1="accent1" accent2="accent2" accent3="accent3" accent4="accent4" accent5="accent5" accent6="accent6" hlink="hlink" folHlink="folHlink"/>
+  <p:sldLayoutIdLst>
+    <p:sldLayoutId id="2147483677" r:id="rId1"/>
+    <p:sldLayoutId id="2147483678" r:id="rId2"/>
+    <p:sldLayoutId id="2147483679" r:id="rId3"/>
+    <p:sldLayoutId id="2147483680" r:id="rId4"/>
+    <p:sldLayoutId id="2147483681" r:id="rId5"/>
+    <p:sldLayoutId id="2147483682" r:id="rId6"/>
+  </p:sldLayoutIdLst>
+  <p:hf sldNum="0" hdr="0" ftr="0" dt="0"/>
+  <p:txStyles>
+    <p:titleStyle>
+      <a:lvl1pPr algn="ctr" defTabSz="914400" rtl="0" eaLnBrk="1" latinLnBrk="0" hangingPunct="1">
+        <a:spcBef>
+          <a:spcPct val="0"/>
+        </a:spcBef>
+        <a:buNone/>
+        <a:defRPr sz="4400" kern="1200">
+          <a:solidFill>
+            <a:schemeClr val="tx1"/>
+          </a:solidFill>
+          <a:latin typeface="+mj-lt"/>
+          <a:ea typeface="+mj-ea"/>
+          <a:cs typeface="+mj-cs"/>
+        </a:defRPr>
+      </a:lvl1pPr>
+    </p:titleStyle>
+    <p:bodyStyle>
+      <a:lvl1pPr marL="342900" indent="-342900" algn="l" defTabSz="914400" rtl="0" eaLnBrk="1" latinLnBrk="0" hangingPunct="1">
+        <a:spcBef>
+          <a:spcPct val="20000"/>
+        </a:spcBef>
+        <a:buFont typeface="Arial" panose="020B0604020202090204" pitchFamily="34" charset="0"/>
+        <a:buChar char="•"/>
+        <a:defRPr sz="3200" kern="1200">
+          <a:solidFill>
+            <a:schemeClr val="tx1"/>
+          </a:solidFill>
+          <a:latin typeface="+mn-lt"/>
+          <a:ea typeface="+mn-ea"/>
+          <a:cs typeface="+mn-cs"/>
+        </a:defRPr>
+      </a:lvl1pPr>
+      <a:lvl2pPr marL="742950" indent="-285750" algn="l" defTabSz="914400" rtl="0" eaLnBrk="1" latinLnBrk="0" hangingPunct="1">
+        <a:spcBef>
+          <a:spcPct val="20000"/>
+        </a:spcBef>
+        <a:buFont typeface="Arial" panose="020B0604020202090204" pitchFamily="34" charset="0"/>
+        <a:buChar char="–"/>
+        <a:defRPr sz="2800" kern="1200">
+          <a:solidFill>
+            <a:schemeClr val="tx1"/>
+          </a:solidFill>
+          <a:latin typeface="+mn-lt"/>
+          <a:ea typeface="+mn-ea"/>
+          <a:cs typeface="+mn-cs"/>
+        </a:defRPr>
+      </a:lvl2pPr>
+      <a:lvl3pPr marL="1143000" indent="-228600" algn="l" defTabSz="914400" rtl="0" eaLnBrk="1" latinLnBrk="0" hangingPunct="1">
+        <a:spcBef>
+          <a:spcPct val="20000"/>
+        </a:spcBef>
+        <a:buFont typeface="Arial" panose="020B0604020202090204" pitchFamily="34" charset="0"/>
+        <a:buChar char="•"/>
+        <a:defRPr sz="2400" kern="1200">
+          <a:solidFill>
+            <a:schemeClr val="tx1"/>
+          </a:solidFill>
+          <a:latin typeface="+mn-lt"/>
+          <a:ea typeface="+mn-ea"/>
+          <a:cs typeface="+mn-cs"/>
+        </a:defRPr>
+      </a:lvl3pPr>
+      <a:lvl4pPr marL="1600200" indent="-228600" algn="l" defTabSz="914400" rtl="0" eaLnBrk="1" latinLnBrk="0" hangingPunct="1">
+        <a:spcBef>
+          <a:spcPct val="20000"/>
+        </a:spcBef>
+        <a:buFont typeface="Arial" panose="020B0604020202090204" pitchFamily="34" charset="0"/>
+        <a:buChar char="–"/>
+        <a:defRPr sz="2000" kern="1200">
+          <a:solidFill>
+            <a:schemeClr val="tx1"/>
+          </a:solidFill>
+          <a:latin typeface="+mn-lt"/>
+          <a:ea typeface="+mn-ea"/>
+          <a:cs typeface="+mn-cs"/>
+        </a:defRPr>
+      </a:lvl4pPr>
+      <a:lvl5pPr marL="2057400" indent="-228600" algn="l" defTabSz="914400" rtl="0" eaLnBrk="1" latinLnBrk="0" hangingPunct="1">
+        <a:spcBef>
+          <a:spcPct val="20000"/>
+        </a:spcBef>
+        <a:buFont typeface="Arial" panose="020B0604020202090204" pitchFamily="34" charset="0"/>
+        <a:buChar char="»"/>
+        <a:defRPr sz="2000" kern="1200">
+          <a:solidFill>
+            <a:schemeClr val="tx1"/>
+          </a:solidFill>
+          <a:latin typeface="+mn-lt"/>
+          <a:ea typeface="+mn-ea"/>
+          <a:cs typeface="+mn-cs"/>
+        </a:defRPr>
+      </a:lvl5pPr>
+      <a:lvl6pPr marL="2514600" indent="-228600" algn="l" defTabSz="914400" rtl="0" eaLnBrk="1" latinLnBrk="0" hangingPunct="1">
+        <a:spcBef>
+          <a:spcPct val="20000"/>
+        </a:spcBef>
+        <a:buFont typeface="Arial" panose="020B0604020202090204" pitchFamily="34" charset="0"/>
+        <a:buChar char="•"/>
+        <a:defRPr sz="2000" kern="1200">
+          <a:solidFill>
+            <a:schemeClr val="tx1"/>
+          </a:solidFill>
+          <a:latin typeface="+mn-lt"/>
+          <a:ea typeface="+mn-ea"/>
+          <a:cs typeface="+mn-cs"/>
+        </a:defRPr>
+      </a:lvl6pPr>
+      <a:lvl7pPr marL="2971800" indent="-228600" algn="l" defTabSz="914400" rtl="0" eaLnBrk="1" latinLnBrk="0" hangingPunct="1">
+        <a:spcBef>
+          <a:spcPct val="20000"/>
+        </a:spcBef>
+        <a:buFont typeface="Arial" panose="020B0604020202090204" pitchFamily="34" charset="0"/>
+        <a:buChar char="•"/>
+        <a:defRPr sz="2000" kern="1200">
+          <a:solidFill>
+            <a:schemeClr val="tx1"/>
+          </a:solidFill>
+          <a:latin typeface="+mn-lt"/>
+          <a:ea typeface="+mn-ea"/>
+          <a:cs typeface="+mn-cs"/>
+        </a:defRPr>
+      </a:lvl7pPr>
+      <a:lvl8pPr marL="3429000" indent="-228600" algn="l" defTabSz="914400" rtl="0" eaLnBrk="1" latinLnBrk="0" hangingPunct="1">
+        <a:spcBef>
+          <a:spcPct val="20000"/>
+        </a:spcBef>
+        <a:buFont typeface="Arial" panose="020B0604020202090204" pitchFamily="34" charset="0"/>
+        <a:buChar char="•"/>
+        <a:defRPr sz="2000" kern="1200">
+          <a:solidFill>
+            <a:schemeClr val="tx1"/>
+          </a:solidFill>
+          <a:latin typeface="+mn-lt"/>
+          <a:ea typeface="+mn-ea"/>
+          <a:cs typeface="+mn-cs"/>
+        </a:defRPr>
+      </a:lvl8pPr>
+      <a:lvl9pPr marL="3886200" indent="-228600" algn="l" defTabSz="914400" rtl="0" eaLnBrk="1" latinLnBrk="0" hangingPunct="1">
+        <a:spcBef>
+          <a:spcPct val="20000"/>
+        </a:spcBef>
+        <a:buFont typeface="Arial" panose="020B0604020202090204" pitchFamily="34" charset="0"/>
         <a:buChar char="•"/>
         <a:defRPr sz="2000" kern="1200">
           <a:solidFill>
@@ -3929,9 +5355,9 @@
                 <a:solidFill>
                   <a:srgbClr val="2E0158"/>
                 </a:solidFill>
-                <a:latin typeface="Times New Roman" panose="02020603050405020304" charset="0"/>
-                <a:ea typeface="Times New Roman" panose="02020603050405020304" charset="0"/>
-                <a:cs typeface="Times New Roman" panose="02020603050405020304" charset="0"/>
+                <a:latin typeface="Times New Roman" panose="02020503050405090304" charset="0"/>
+                <a:ea typeface="Times New Roman" panose="02020503050405090304" charset="0"/>
+                <a:cs typeface="Times New Roman" panose="02020503050405090304" charset="0"/>
               </a:rPr>
               <a:t>CSC 1004: Tutorial 8 </a:t>
             </a:r>
@@ -3945,9 +5371,9 @@
                 <a:solidFill>
                   <a:srgbClr val="2E0158"/>
                 </a:solidFill>
-                <a:latin typeface="Times New Roman" panose="02020603050405020304" charset="0"/>
-                <a:ea typeface="Times New Roman" panose="02020603050405020304" charset="0"/>
-                <a:cs typeface="Times New Roman" panose="02020603050405020304" charset="0"/>
+                <a:latin typeface="Times New Roman" panose="02020503050405090304" charset="0"/>
+                <a:ea typeface="Times New Roman" panose="02020503050405090304" charset="0"/>
+                <a:cs typeface="Times New Roman" panose="02020503050405090304" charset="0"/>
                 <a:sym typeface="+mn-ea"/>
               </a:rPr>
               <a:t>Introduction of </a:t>
@@ -3957,9 +5383,9 @@
                 <a:solidFill>
                   <a:srgbClr val="2E0158"/>
                 </a:solidFill>
-                <a:latin typeface="Times New Roman" panose="02020603050405020304" charset="0"/>
-                <a:ea typeface="Times New Roman" panose="02020603050405020304" charset="0"/>
-                <a:cs typeface="Times New Roman" panose="02020603050405020304" charset="0"/>
+                <a:latin typeface="Times New Roman" panose="02020503050405090304" charset="0"/>
+                <a:ea typeface="Times New Roman" panose="02020503050405090304" charset="0"/>
+                <a:cs typeface="Times New Roman" panose="02020503050405090304" charset="0"/>
               </a:rPr>
               <a:t>Snake Game and</a:t>
             </a:r>
@@ -3973,9 +5399,9 @@
                 <a:solidFill>
                   <a:srgbClr val="2E0158"/>
                 </a:solidFill>
-                <a:latin typeface="Times New Roman" panose="02020603050405020304" charset="0"/>
-                <a:ea typeface="Times New Roman" panose="02020603050405020304" charset="0"/>
-                <a:cs typeface="Times New Roman" panose="02020603050405020304" charset="0"/>
+                <a:latin typeface="Times New Roman" panose="02020503050405090304" charset="0"/>
+                <a:ea typeface="Times New Roman" panose="02020503050405090304" charset="0"/>
+                <a:cs typeface="Times New Roman" panose="02020503050405090304" charset="0"/>
               </a:rPr>
               <a:t>Python Tkinter</a:t>
             </a:r>
@@ -4010,19 +5436,19 @@
                 <a:solidFill>
                   <a:srgbClr val="646464"/>
                 </a:solidFill>
-                <a:latin typeface="Times New Roman" panose="02020603050405020304" charset="0"/>
-                <a:ea typeface="Times New Roman" panose="02020603050405020304" charset="0"/>
-                <a:cs typeface="Times New Roman" panose="02020603050405020304" charset="0"/>
+                <a:latin typeface="Times New Roman" panose="02020503050405090304" charset="0"/>
+                <a:ea typeface="Times New Roman" panose="02020503050405090304" charset="0"/>
+                <a:cs typeface="Times New Roman" panose="02020503050405090304" charset="0"/>
               </a:rPr>
-              <a:t> Guanren Qiao</a:t>
+              <a:t> Bo Yue</a:t>
             </a:r>
             <a:endParaRPr lang="en-US" sz="2000" dirty="0">
               <a:solidFill>
                 <a:srgbClr val="646464"/>
               </a:solidFill>
-              <a:latin typeface="Times New Roman" panose="02020603050405020304" charset="0"/>
-              <a:ea typeface="Times New Roman" panose="02020603050405020304" charset="0"/>
-              <a:cs typeface="Times New Roman" panose="02020603050405020304" charset="0"/>
+              <a:latin typeface="Times New Roman" panose="02020503050405090304" charset="0"/>
+              <a:ea typeface="Times New Roman" panose="02020503050405090304" charset="0"/>
+              <a:cs typeface="Times New Roman" panose="02020503050405090304" charset="0"/>
             </a:endParaRPr>
           </a:p>
           <a:p>
@@ -4034,9 +5460,9 @@
                 <a:solidFill>
                   <a:srgbClr val="646464"/>
                 </a:solidFill>
-                <a:latin typeface="Times New Roman" panose="02020603050405020304" charset="0"/>
-                <a:ea typeface="Times New Roman" panose="02020603050405020304" charset="0"/>
-                <a:cs typeface="Times New Roman" panose="02020603050405020304" charset="0"/>
+                <a:latin typeface="Times New Roman" panose="02020503050405090304" charset="0"/>
+                <a:ea typeface="Times New Roman" panose="02020503050405090304" charset="0"/>
+                <a:cs typeface="Times New Roman" panose="02020503050405090304" charset="0"/>
               </a:rPr>
               <a:t>SDS, CUHK-SZ</a:t>
             </a:r>
@@ -4120,9 +5546,9 @@
                 <a:solidFill>
                   <a:srgbClr val="2E0158"/>
                 </a:solidFill>
-                <a:latin typeface="Times New Roman" panose="02020603050405020304" charset="0"/>
-                <a:ea typeface="Times New Roman" panose="02020603050405020304" charset="0"/>
-                <a:cs typeface="Times New Roman" panose="02020603050405020304" charset="0"/>
+                <a:latin typeface="Times New Roman" panose="02020503050405090304" charset="0"/>
+                <a:ea typeface="Times New Roman" panose="02020503050405090304" charset="0"/>
+                <a:cs typeface="Times New Roman" panose="02020503050405090304" charset="0"/>
                 <a:sym typeface="+mn-ea"/>
               </a:rPr>
               <a:t>Tkinter Entry &amp; Text</a:t>
@@ -4162,9 +5588,9 @@
                 <a:solidFill>
                   <a:schemeClr val="tx1"/>
                 </a:solidFill>
-                <a:latin typeface="Times New Roman" panose="02020603050405020304" charset="0"/>
-                <a:ea typeface="Times New Roman" panose="02020603050405020304" charset="0"/>
-                <a:cs typeface="Times New Roman" panose="02020603050405020304" charset="0"/>
+                <a:latin typeface="Times New Roman" panose="02020503050405090304" charset="0"/>
+                <a:ea typeface="Times New Roman" panose="02020503050405090304" charset="0"/>
+                <a:cs typeface="Times New Roman" panose="02020503050405090304" charset="0"/>
                 <a:sym typeface="+mn-ea"/>
               </a:rPr>
               <a:t>import tkinter as tk</a:t>
@@ -4183,9 +5609,9 @@
                 <a:solidFill>
                   <a:schemeClr val="tx1"/>
                 </a:solidFill>
-                <a:latin typeface="Times New Roman" panose="02020603050405020304" charset="0"/>
-                <a:ea typeface="Times New Roman" panose="02020603050405020304" charset="0"/>
-                <a:cs typeface="Times New Roman" panose="02020603050405020304" charset="0"/>
+                <a:latin typeface="Times New Roman" panose="02020503050405090304" charset="0"/>
+                <a:ea typeface="Times New Roman" panose="02020503050405090304" charset="0"/>
+                <a:cs typeface="Times New Roman" panose="02020503050405090304" charset="0"/>
                 <a:sym typeface="+mn-ea"/>
               </a:rPr>
               <a:t>window = tk.Tk()</a:t>
@@ -4204,9 +5630,9 @@
                 <a:solidFill>
                   <a:schemeClr val="tx1"/>
                 </a:solidFill>
-                <a:latin typeface="Times New Roman" panose="02020603050405020304" charset="0"/>
-                <a:ea typeface="Times New Roman" panose="02020603050405020304" charset="0"/>
-                <a:cs typeface="Times New Roman" panose="02020603050405020304" charset="0"/>
+                <a:latin typeface="Times New Roman" panose="02020503050405090304" charset="0"/>
+                <a:ea typeface="Times New Roman" panose="02020503050405090304" charset="0"/>
+                <a:cs typeface="Times New Roman" panose="02020503050405090304" charset="0"/>
                 <a:sym typeface="+mn-ea"/>
               </a:rPr>
               <a:t>window.title('my window')</a:t>
@@ -4225,9 +5651,9 @@
                 <a:solidFill>
                   <a:schemeClr val="tx1"/>
                 </a:solidFill>
-                <a:latin typeface="Times New Roman" panose="02020603050405020304" charset="0"/>
-                <a:ea typeface="Times New Roman" panose="02020603050405020304" charset="0"/>
-                <a:cs typeface="Times New Roman" panose="02020603050405020304" charset="0"/>
+                <a:latin typeface="Times New Roman" panose="02020503050405090304" charset="0"/>
+                <a:ea typeface="Times New Roman" panose="02020503050405090304" charset="0"/>
+                <a:cs typeface="Times New Roman" panose="02020503050405090304" charset="0"/>
                 <a:sym typeface="+mn-ea"/>
               </a:rPr>
               <a:t>window.geometry('200x200')</a:t>
@@ -4246,9 +5672,9 @@
                 <a:solidFill>
                   <a:schemeClr val="tx1"/>
                 </a:solidFill>
-                <a:latin typeface="Times New Roman" panose="02020603050405020304" charset="0"/>
-                <a:ea typeface="Times New Roman" panose="02020603050405020304" charset="0"/>
-                <a:cs typeface="Times New Roman" panose="02020603050405020304" charset="0"/>
+                <a:latin typeface="Times New Roman" panose="02020503050405090304" charset="0"/>
+                <a:ea typeface="Times New Roman" panose="02020503050405090304" charset="0"/>
+                <a:cs typeface="Times New Roman" panose="02020503050405090304" charset="0"/>
                 <a:sym typeface="+mn-ea"/>
               </a:rPr>
               <a:t>e=tk.Entry(window,show=None)</a:t>
@@ -4267,9 +5693,9 @@
                 <a:solidFill>
                   <a:schemeClr val="tx1"/>
                 </a:solidFill>
-                <a:latin typeface="Times New Roman" panose="02020603050405020304" charset="0"/>
-                <a:ea typeface="Times New Roman" panose="02020603050405020304" charset="0"/>
-                <a:cs typeface="Times New Roman" panose="02020603050405020304" charset="0"/>
+                <a:latin typeface="Times New Roman" panose="02020503050405090304" charset="0"/>
+                <a:ea typeface="Times New Roman" panose="02020503050405090304" charset="0"/>
+                <a:cs typeface="Times New Roman" panose="02020503050405090304" charset="0"/>
                 <a:sym typeface="+mn-ea"/>
               </a:rPr>
               <a:t>e.pack()</a:t>
@@ -4288,9 +5714,9 @@
                 <a:solidFill>
                   <a:schemeClr val="tx1"/>
                 </a:solidFill>
-                <a:latin typeface="Times New Roman" panose="02020603050405020304" charset="0"/>
-                <a:ea typeface="Times New Roman" panose="02020603050405020304" charset="0"/>
-                <a:cs typeface="Times New Roman" panose="02020603050405020304" charset="0"/>
+                <a:latin typeface="Times New Roman" panose="02020503050405090304" charset="0"/>
+                <a:ea typeface="Times New Roman" panose="02020503050405090304" charset="0"/>
+                <a:cs typeface="Times New Roman" panose="02020503050405090304" charset="0"/>
                 <a:sym typeface="+mn-ea"/>
               </a:rPr>
               <a:t>def insert_point():</a:t>
@@ -4309,9 +5735,9 @@
                 <a:solidFill>
                   <a:schemeClr val="tx1"/>
                 </a:solidFill>
-                <a:latin typeface="Times New Roman" panose="02020603050405020304" charset="0"/>
-                <a:ea typeface="Times New Roman" panose="02020603050405020304" charset="0"/>
-                <a:cs typeface="Times New Roman" panose="02020603050405020304" charset="0"/>
+                <a:latin typeface="Times New Roman" panose="02020503050405090304" charset="0"/>
+                <a:ea typeface="Times New Roman" panose="02020503050405090304" charset="0"/>
+                <a:cs typeface="Times New Roman" panose="02020503050405090304" charset="0"/>
                 <a:sym typeface="+mn-ea"/>
               </a:rPr>
               <a:t>    var=e.get()</a:t>
@@ -4330,9 +5756,9 @@
                 <a:solidFill>
                   <a:schemeClr val="tx1"/>
                 </a:solidFill>
-                <a:latin typeface="Times New Roman" panose="02020603050405020304" charset="0"/>
-                <a:ea typeface="Times New Roman" panose="02020603050405020304" charset="0"/>
-                <a:cs typeface="Times New Roman" panose="02020603050405020304" charset="0"/>
+                <a:latin typeface="Times New Roman" panose="02020503050405090304" charset="0"/>
+                <a:ea typeface="Times New Roman" panose="02020503050405090304" charset="0"/>
+                <a:cs typeface="Times New Roman" panose="02020503050405090304" charset="0"/>
                 <a:sym typeface="+mn-ea"/>
               </a:rPr>
               <a:t>    t.insert('insert',var)</a:t>
@@ -4351,9 +5777,9 @@
                 <a:solidFill>
                   <a:schemeClr val="tx1"/>
                 </a:solidFill>
-                <a:latin typeface="Times New Roman" panose="02020603050405020304" charset="0"/>
-                <a:ea typeface="Times New Roman" panose="02020603050405020304" charset="0"/>
-                <a:cs typeface="Times New Roman" panose="02020603050405020304" charset="0"/>
+                <a:latin typeface="Times New Roman" panose="02020503050405090304" charset="0"/>
+                <a:ea typeface="Times New Roman" panose="02020503050405090304" charset="0"/>
+                <a:cs typeface="Times New Roman" panose="02020503050405090304" charset="0"/>
                 <a:sym typeface="+mn-ea"/>
               </a:rPr>
               <a:t>b = tk.Button(window,text="insert point",width=15,</a:t>
@@ -4372,9 +5798,9 @@
                 <a:solidFill>
                   <a:schemeClr val="tx1"/>
                 </a:solidFill>
-                <a:latin typeface="Times New Roman" panose="02020603050405020304" charset="0"/>
-                <a:ea typeface="Times New Roman" panose="02020603050405020304" charset="0"/>
-                <a:cs typeface="Times New Roman" panose="02020603050405020304" charset="0"/>
+                <a:latin typeface="Times New Roman" panose="02020503050405090304" charset="0"/>
+                <a:ea typeface="Times New Roman" panose="02020503050405090304" charset="0"/>
+                <a:cs typeface="Times New Roman" panose="02020503050405090304" charset="0"/>
                 <a:sym typeface="+mn-ea"/>
               </a:rPr>
               <a:t>height=2,command=insert_point)</a:t>
@@ -4393,9 +5819,9 @@
                 <a:solidFill>
                   <a:schemeClr val="tx1"/>
                 </a:solidFill>
-                <a:latin typeface="Times New Roman" panose="02020603050405020304" charset="0"/>
-                <a:ea typeface="Times New Roman" panose="02020603050405020304" charset="0"/>
-                <a:cs typeface="Times New Roman" panose="02020603050405020304" charset="0"/>
+                <a:latin typeface="Times New Roman" panose="02020503050405090304" charset="0"/>
+                <a:ea typeface="Times New Roman" panose="02020503050405090304" charset="0"/>
+                <a:cs typeface="Times New Roman" panose="02020503050405090304" charset="0"/>
                 <a:sym typeface="+mn-ea"/>
               </a:rPr>
               <a:t>b.pack()</a:t>
@@ -4414,9 +5840,9 @@
                 <a:solidFill>
                   <a:schemeClr val="tx1"/>
                 </a:solidFill>
-                <a:latin typeface="Times New Roman" panose="02020603050405020304" charset="0"/>
-                <a:ea typeface="Times New Roman" panose="02020603050405020304" charset="0"/>
-                <a:cs typeface="Times New Roman" panose="02020603050405020304" charset="0"/>
+                <a:latin typeface="Times New Roman" panose="02020503050405090304" charset="0"/>
+                <a:ea typeface="Times New Roman" panose="02020503050405090304" charset="0"/>
+                <a:cs typeface="Times New Roman" panose="02020503050405090304" charset="0"/>
                 <a:sym typeface="+mn-ea"/>
               </a:rPr>
               <a:t>t=tk.Text(window,height=2)</a:t>
@@ -4435,9 +5861,9 @@
                 <a:solidFill>
                   <a:schemeClr val="tx1"/>
                 </a:solidFill>
-                <a:latin typeface="Times New Roman" panose="02020603050405020304" charset="0"/>
-                <a:ea typeface="Times New Roman" panose="02020603050405020304" charset="0"/>
-                <a:cs typeface="Times New Roman" panose="02020603050405020304" charset="0"/>
+                <a:latin typeface="Times New Roman" panose="02020503050405090304" charset="0"/>
+                <a:ea typeface="Times New Roman" panose="02020503050405090304" charset="0"/>
+                <a:cs typeface="Times New Roman" panose="02020503050405090304" charset="0"/>
                 <a:sym typeface="+mn-ea"/>
               </a:rPr>
               <a:t>t.pack()</a:t>
@@ -4456,9 +5882,9 @@
                 <a:solidFill>
                   <a:schemeClr val="tx1"/>
                 </a:solidFill>
-                <a:latin typeface="Times New Roman" panose="02020603050405020304" charset="0"/>
-                <a:ea typeface="Times New Roman" panose="02020603050405020304" charset="0"/>
-                <a:cs typeface="Times New Roman" panose="02020603050405020304" charset="0"/>
+                <a:latin typeface="Times New Roman" panose="02020503050405090304" charset="0"/>
+                <a:ea typeface="Times New Roman" panose="02020503050405090304" charset="0"/>
+                <a:cs typeface="Times New Roman" panose="02020503050405090304" charset="0"/>
                 <a:sym typeface="+mn-ea"/>
               </a:rPr>
               <a:t>window.mainloop()</a:t>
@@ -4571,9 +5997,9 @@
                 <a:solidFill>
                   <a:srgbClr val="2E0158"/>
                 </a:solidFill>
-                <a:latin typeface="Times New Roman" panose="02020603050405020304" charset="0"/>
-                <a:ea typeface="Times New Roman" panose="02020603050405020304" charset="0"/>
-                <a:cs typeface="Times New Roman" panose="02020603050405020304" charset="0"/>
+                <a:latin typeface="Times New Roman" panose="02020503050405090304" charset="0"/>
+                <a:ea typeface="Times New Roman" panose="02020503050405090304" charset="0"/>
+                <a:cs typeface="Times New Roman" panose="02020503050405090304" charset="0"/>
                 <a:sym typeface="+mn-ea"/>
               </a:rPr>
               <a:t>Tkinter Canvas</a:t>
@@ -4613,9 +6039,9 @@
                 <a:solidFill>
                   <a:schemeClr val="tx1"/>
                 </a:solidFill>
-                <a:latin typeface="Times New Roman" panose="02020603050405020304" charset="0"/>
-                <a:ea typeface="Times New Roman" panose="02020603050405020304" charset="0"/>
-                <a:cs typeface="Times New Roman" panose="02020603050405020304" charset="0"/>
+                <a:latin typeface="Times New Roman" panose="02020503050405090304" charset="0"/>
+                <a:ea typeface="Times New Roman" panose="02020503050405090304" charset="0"/>
+                <a:cs typeface="Times New Roman" panose="02020503050405090304" charset="0"/>
                 <a:sym typeface="+mn-ea"/>
               </a:rPr>
               <a:t>import tkinter as tk</a:t>
@@ -4634,9 +6060,9 @@
                 <a:solidFill>
                   <a:schemeClr val="tx1"/>
                 </a:solidFill>
-                <a:latin typeface="Times New Roman" panose="02020603050405020304" charset="0"/>
-                <a:ea typeface="Times New Roman" panose="02020603050405020304" charset="0"/>
-                <a:cs typeface="Times New Roman" panose="02020603050405020304" charset="0"/>
+                <a:latin typeface="Times New Roman" panose="02020503050405090304" charset="0"/>
+                <a:ea typeface="Times New Roman" panose="02020503050405090304" charset="0"/>
+                <a:cs typeface="Times New Roman" panose="02020503050405090304" charset="0"/>
                 <a:sym typeface="+mn-ea"/>
               </a:rPr>
               <a:t>root = tk.Tk()</a:t>
@@ -4655,9 +6081,9 @@
                 <a:solidFill>
                   <a:schemeClr val="tx1"/>
                 </a:solidFill>
-                <a:latin typeface="Times New Roman" panose="02020603050405020304" charset="0"/>
-                <a:ea typeface="Times New Roman" panose="02020603050405020304" charset="0"/>
-                <a:cs typeface="Times New Roman" panose="02020603050405020304" charset="0"/>
+                <a:latin typeface="Times New Roman" panose="02020503050405090304" charset="0"/>
+                <a:ea typeface="Times New Roman" panose="02020503050405090304" charset="0"/>
+                <a:cs typeface="Times New Roman" panose="02020503050405090304" charset="0"/>
                 <a:sym typeface="+mn-ea"/>
               </a:rPr>
               <a:t>w = tk.Canvas(root, width =200, height = 100)</a:t>
@@ -4676,9 +6102,9 @@
                 <a:solidFill>
                   <a:schemeClr val="tx1"/>
                 </a:solidFill>
-                <a:latin typeface="Times New Roman" panose="02020603050405020304" charset="0"/>
-                <a:ea typeface="Times New Roman" panose="02020603050405020304" charset="0"/>
-                <a:cs typeface="Times New Roman" panose="02020603050405020304" charset="0"/>
+                <a:latin typeface="Times New Roman" panose="02020503050405090304" charset="0"/>
+                <a:ea typeface="Times New Roman" panose="02020503050405090304" charset="0"/>
+                <a:cs typeface="Times New Roman" panose="02020503050405090304" charset="0"/>
                 <a:sym typeface="+mn-ea"/>
               </a:rPr>
               <a:t>w.pack()</a:t>
@@ -4697,9 +6123,9 @@
                 <a:solidFill>
                   <a:schemeClr val="tx1"/>
                 </a:solidFill>
-                <a:latin typeface="Times New Roman" panose="02020603050405020304" charset="0"/>
-                <a:ea typeface="Times New Roman" panose="02020603050405020304" charset="0"/>
-                <a:cs typeface="Times New Roman" panose="02020603050405020304" charset="0"/>
+                <a:latin typeface="Times New Roman" panose="02020503050405090304" charset="0"/>
+                <a:ea typeface="Times New Roman" panose="02020503050405090304" charset="0"/>
+                <a:cs typeface="Times New Roman" panose="02020503050405090304" charset="0"/>
                 <a:sym typeface="+mn-ea"/>
               </a:rPr>
               <a:t>line1 = w.create_line(0, 50, 200, 50, fill = "yellow")</a:t>
@@ -4718,9 +6144,9 @@
                 <a:solidFill>
                   <a:schemeClr val="tx1"/>
                 </a:solidFill>
-                <a:latin typeface="Times New Roman" panose="02020603050405020304" charset="0"/>
-                <a:ea typeface="Times New Roman" panose="02020603050405020304" charset="0"/>
-                <a:cs typeface="Times New Roman" panose="02020603050405020304" charset="0"/>
+                <a:latin typeface="Times New Roman" panose="02020503050405090304" charset="0"/>
+                <a:ea typeface="Times New Roman" panose="02020503050405090304" charset="0"/>
+                <a:cs typeface="Times New Roman" panose="02020503050405090304" charset="0"/>
                 <a:sym typeface="+mn-ea"/>
               </a:rPr>
               <a:t>line2 = w.create_line(100, 0, 100, 100, fill = "red", dash = (4, 4))</a:t>
@@ -4739,9 +6165,9 @@
                 <a:solidFill>
                   <a:schemeClr val="tx1"/>
                 </a:solidFill>
-                <a:latin typeface="Times New Roman" panose="02020603050405020304" charset="0"/>
-                <a:ea typeface="Times New Roman" panose="02020603050405020304" charset="0"/>
-                <a:cs typeface="Times New Roman" panose="02020603050405020304" charset="0"/>
+                <a:latin typeface="Times New Roman" panose="02020503050405090304" charset="0"/>
+                <a:ea typeface="Times New Roman" panose="02020503050405090304" charset="0"/>
+                <a:cs typeface="Times New Roman" panose="02020503050405090304" charset="0"/>
                 <a:sym typeface="+mn-ea"/>
               </a:rPr>
               <a:t>rect1 = w.create_rectangle(50, 25, 150, 75, fill = "blue")</a:t>
@@ -4760,9 +6186,9 @@
                 <a:solidFill>
                   <a:schemeClr val="tx1"/>
                 </a:solidFill>
-                <a:latin typeface="Times New Roman" panose="02020603050405020304" charset="0"/>
-                <a:ea typeface="Times New Roman" panose="02020603050405020304" charset="0"/>
-                <a:cs typeface="Times New Roman" panose="02020603050405020304" charset="0"/>
+                <a:latin typeface="Times New Roman" panose="02020503050405090304" charset="0"/>
+                <a:ea typeface="Times New Roman" panose="02020503050405090304" charset="0"/>
+                <a:cs typeface="Times New Roman" panose="02020503050405090304" charset="0"/>
                 <a:sym typeface="+mn-ea"/>
               </a:rPr>
               <a:t>w.coords(line1, 0, 25, 200, 25)</a:t>
@@ -4781,9 +6207,9 @@
                 <a:solidFill>
                   <a:schemeClr val="tx1"/>
                 </a:solidFill>
-                <a:latin typeface="Times New Roman" panose="02020603050405020304" charset="0"/>
-                <a:ea typeface="Times New Roman" panose="02020603050405020304" charset="0"/>
-                <a:cs typeface="Times New Roman" panose="02020603050405020304" charset="0"/>
+                <a:latin typeface="Times New Roman" panose="02020503050405090304" charset="0"/>
+                <a:ea typeface="Times New Roman" panose="02020503050405090304" charset="0"/>
+                <a:cs typeface="Times New Roman" panose="02020503050405090304" charset="0"/>
                 <a:sym typeface="+mn-ea"/>
               </a:rPr>
               <a:t>w.itemconfig(rect1, fill = "red")</a:t>
@@ -4802,9 +6228,9 @@
                 <a:solidFill>
                   <a:schemeClr val="tx1"/>
                 </a:solidFill>
-                <a:latin typeface="Times New Roman" panose="02020603050405020304" charset="0"/>
-                <a:ea typeface="Times New Roman" panose="02020603050405020304" charset="0"/>
-                <a:cs typeface="Times New Roman" panose="02020603050405020304" charset="0"/>
+                <a:latin typeface="Times New Roman" panose="02020503050405090304" charset="0"/>
+                <a:ea typeface="Times New Roman" panose="02020503050405090304" charset="0"/>
+                <a:cs typeface="Times New Roman" panose="02020503050405090304" charset="0"/>
                 <a:sym typeface="+mn-ea"/>
               </a:rPr>
               <a:t>w.delete(line2)</a:t>
@@ -4823,9 +6249,9 @@
                 <a:solidFill>
                   <a:schemeClr val="tx1"/>
                 </a:solidFill>
-                <a:latin typeface="Times New Roman" panose="02020603050405020304" charset="0"/>
-                <a:ea typeface="Times New Roman" panose="02020603050405020304" charset="0"/>
-                <a:cs typeface="Times New Roman" panose="02020603050405020304" charset="0"/>
+                <a:latin typeface="Times New Roman" panose="02020503050405090304" charset="0"/>
+                <a:ea typeface="Times New Roman" panose="02020503050405090304" charset="0"/>
+                <a:cs typeface="Times New Roman" panose="02020503050405090304" charset="0"/>
                 <a:sym typeface="+mn-ea"/>
               </a:rPr>
               <a:t>w.create_text(100, 50, text = "Python")</a:t>
@@ -4844,9 +6270,9 @@
                 <a:solidFill>
                   <a:schemeClr val="tx1"/>
                 </a:solidFill>
-                <a:latin typeface="Times New Roman" panose="02020603050405020304" charset="0"/>
-                <a:ea typeface="Times New Roman" panose="02020603050405020304" charset="0"/>
-                <a:cs typeface="Times New Roman" panose="02020603050405020304" charset="0"/>
+                <a:latin typeface="Times New Roman" panose="02020503050405090304" charset="0"/>
+                <a:ea typeface="Times New Roman" panose="02020503050405090304" charset="0"/>
+                <a:cs typeface="Times New Roman" panose="02020503050405090304" charset="0"/>
                 <a:sym typeface="+mn-ea"/>
               </a:rPr>
               <a:t>tk.Button(root, text = "delete all", command = (lambda x = "all" : w.delete(x))).pack()</a:t>
@@ -4865,9 +6291,9 @@
                 <a:solidFill>
                   <a:schemeClr val="tx1"/>
                 </a:solidFill>
-                <a:latin typeface="Times New Roman" panose="02020603050405020304" charset="0"/>
-                <a:ea typeface="Times New Roman" panose="02020603050405020304" charset="0"/>
-                <a:cs typeface="Times New Roman" panose="02020603050405020304" charset="0"/>
+                <a:latin typeface="Times New Roman" panose="02020503050405090304" charset="0"/>
+                <a:ea typeface="Times New Roman" panose="02020503050405090304" charset="0"/>
+                <a:cs typeface="Times New Roman" panose="02020503050405090304" charset="0"/>
                 <a:sym typeface="+mn-ea"/>
               </a:rPr>
               <a:t>root.mainloop()</a:t>
@@ -4980,9 +6406,9 @@
                 <a:solidFill>
                   <a:srgbClr val="2E0158"/>
                 </a:solidFill>
-                <a:latin typeface="Times New Roman" panose="02020603050405020304" charset="0"/>
-                <a:ea typeface="Times New Roman" panose="02020603050405020304" charset="0"/>
-                <a:cs typeface="Times New Roman" panose="02020603050405020304" charset="0"/>
+                <a:latin typeface="Times New Roman" panose="02020503050405090304" charset="0"/>
+                <a:ea typeface="Times New Roman" panose="02020503050405090304" charset="0"/>
+                <a:cs typeface="Times New Roman" panose="02020503050405090304" charset="0"/>
                 <a:sym typeface="+mn-ea"/>
               </a:rPr>
               <a:t>Tkinter Canvas</a:t>
@@ -5022,9 +6448,9 @@
                 <a:solidFill>
                   <a:schemeClr val="tx1"/>
                 </a:solidFill>
-                <a:latin typeface="Times New Roman" panose="02020603050405020304" charset="0"/>
-                <a:ea typeface="Times New Roman" panose="02020603050405020304" charset="0"/>
-                <a:cs typeface="Times New Roman" panose="02020603050405020304" charset="0"/>
+                <a:latin typeface="Times New Roman" panose="02020503050405090304" charset="0"/>
+                <a:ea typeface="Times New Roman" panose="02020503050405090304" charset="0"/>
+                <a:cs typeface="Times New Roman" panose="02020503050405090304" charset="0"/>
                 <a:sym typeface="+mn-ea"/>
               </a:rPr>
               <a:t>import tkinter as tk</a:t>
@@ -5043,9 +6469,9 @@
                 <a:solidFill>
                   <a:schemeClr val="tx1"/>
                 </a:solidFill>
-                <a:latin typeface="Times New Roman" panose="02020603050405020304" charset="0"/>
-                <a:ea typeface="Times New Roman" panose="02020603050405020304" charset="0"/>
-                <a:cs typeface="Times New Roman" panose="02020603050405020304" charset="0"/>
+                <a:latin typeface="Times New Roman" panose="02020503050405090304" charset="0"/>
+                <a:ea typeface="Times New Roman" panose="02020503050405090304" charset="0"/>
+                <a:cs typeface="Times New Roman" panose="02020503050405090304" charset="0"/>
                 <a:sym typeface="+mn-ea"/>
               </a:rPr>
               <a:t>root = tk.Tk()</a:t>
@@ -5064,9 +6490,9 @@
                 <a:solidFill>
                   <a:schemeClr val="tx1"/>
                 </a:solidFill>
-                <a:latin typeface="Times New Roman" panose="02020603050405020304" charset="0"/>
-                <a:ea typeface="Times New Roman" panose="02020603050405020304" charset="0"/>
-                <a:cs typeface="Times New Roman" panose="02020603050405020304" charset="0"/>
+                <a:latin typeface="Times New Roman" panose="02020503050405090304" charset="0"/>
+                <a:ea typeface="Times New Roman" panose="02020503050405090304" charset="0"/>
+                <a:cs typeface="Times New Roman" panose="02020503050405090304" charset="0"/>
                 <a:sym typeface="+mn-ea"/>
               </a:rPr>
               <a:t>w = tk.Canvas(root, width = 400, height = 200)</a:t>
@@ -5085,9 +6511,9 @@
                 <a:solidFill>
                   <a:schemeClr val="tx1"/>
                 </a:solidFill>
-                <a:latin typeface="Times New Roman" panose="02020603050405020304" charset="0"/>
-                <a:ea typeface="Times New Roman" panose="02020603050405020304" charset="0"/>
-                <a:cs typeface="Times New Roman" panose="02020603050405020304" charset="0"/>
+                <a:latin typeface="Times New Roman" panose="02020503050405090304" charset="0"/>
+                <a:ea typeface="Times New Roman" panose="02020503050405090304" charset="0"/>
+                <a:cs typeface="Times New Roman" panose="02020503050405090304" charset="0"/>
                 <a:sym typeface="+mn-ea"/>
               </a:rPr>
               <a:t>w.pack()</a:t>
@@ -5106,9 +6532,9 @@
                 <a:solidFill>
                   <a:schemeClr val="tx1"/>
                 </a:solidFill>
-                <a:latin typeface="Times New Roman" panose="02020603050405020304" charset="0"/>
-                <a:ea typeface="Times New Roman" panose="02020603050405020304" charset="0"/>
-                <a:cs typeface="Times New Roman" panose="02020603050405020304" charset="0"/>
+                <a:latin typeface="Times New Roman" panose="02020503050405090304" charset="0"/>
+                <a:ea typeface="Times New Roman" panose="02020503050405090304" charset="0"/>
+                <a:cs typeface="Times New Roman" panose="02020503050405090304" charset="0"/>
                 <a:sym typeface="+mn-ea"/>
               </a:rPr>
               <a:t>def paint(event):</a:t>
@@ -5127,9 +6553,9 @@
                 <a:solidFill>
                   <a:schemeClr val="tx1"/>
                 </a:solidFill>
-                <a:latin typeface="Times New Roman" panose="02020603050405020304" charset="0"/>
-                <a:ea typeface="Times New Roman" panose="02020603050405020304" charset="0"/>
-                <a:cs typeface="Times New Roman" panose="02020603050405020304" charset="0"/>
+                <a:latin typeface="Times New Roman" panose="02020503050405090304" charset="0"/>
+                <a:ea typeface="Times New Roman" panose="02020503050405090304" charset="0"/>
+                <a:cs typeface="Times New Roman" panose="02020503050405090304" charset="0"/>
                 <a:sym typeface="+mn-ea"/>
               </a:rPr>
               <a:t>        x1, y1 = (event.x - 1), (event.y - 1)</a:t>
@@ -5148,9 +6574,9 @@
                 <a:solidFill>
                   <a:schemeClr val="tx1"/>
                 </a:solidFill>
-                <a:latin typeface="Times New Roman" panose="02020603050405020304" charset="0"/>
-                <a:ea typeface="Times New Roman" panose="02020603050405020304" charset="0"/>
-                <a:cs typeface="Times New Roman" panose="02020603050405020304" charset="0"/>
+                <a:latin typeface="Times New Roman" panose="02020503050405090304" charset="0"/>
+                <a:ea typeface="Times New Roman" panose="02020503050405090304" charset="0"/>
+                <a:cs typeface="Times New Roman" panose="02020503050405090304" charset="0"/>
                 <a:sym typeface="+mn-ea"/>
               </a:rPr>
               <a:t>        x2, y2 = (event.x + 1), (event.y + 1)</a:t>
@@ -5169,9 +6595,9 @@
                 <a:solidFill>
                   <a:schemeClr val="tx1"/>
                 </a:solidFill>
-                <a:latin typeface="Times New Roman" panose="02020603050405020304" charset="0"/>
-                <a:ea typeface="Times New Roman" panose="02020603050405020304" charset="0"/>
-                <a:cs typeface="Times New Roman" panose="02020603050405020304" charset="0"/>
+                <a:latin typeface="Times New Roman" panose="02020503050405090304" charset="0"/>
+                <a:ea typeface="Times New Roman" panose="02020503050405090304" charset="0"/>
+                <a:cs typeface="Times New Roman" panose="02020503050405090304" charset="0"/>
                 <a:sym typeface="+mn-ea"/>
               </a:rPr>
               <a:t>        w.create_oval(x1, y1, x2, y2, fill = "red")</a:t>
@@ -5190,9 +6616,9 @@
                 <a:solidFill>
                   <a:schemeClr val="tx1"/>
                 </a:solidFill>
-                <a:latin typeface="Times New Roman" panose="02020603050405020304" charset="0"/>
-                <a:ea typeface="Times New Roman" panose="02020603050405020304" charset="0"/>
-                <a:cs typeface="Times New Roman" panose="02020603050405020304" charset="0"/>
+                <a:latin typeface="Times New Roman" panose="02020503050405090304" charset="0"/>
+                <a:ea typeface="Times New Roman" panose="02020503050405090304" charset="0"/>
+                <a:cs typeface="Times New Roman" panose="02020503050405090304" charset="0"/>
                 <a:sym typeface="+mn-ea"/>
               </a:rPr>
               <a:t>w.bind("&lt;B1-Motion&gt;", paint)</a:t>
@@ -5211,9 +6637,9 @@
                 <a:solidFill>
                   <a:schemeClr val="tx1"/>
                 </a:solidFill>
-                <a:latin typeface="Times New Roman" panose="02020603050405020304" charset="0"/>
-                <a:ea typeface="Times New Roman" panose="02020603050405020304" charset="0"/>
-                <a:cs typeface="Times New Roman" panose="02020603050405020304" charset="0"/>
+                <a:latin typeface="Times New Roman" panose="02020503050405090304" charset="0"/>
+                <a:ea typeface="Times New Roman" panose="02020503050405090304" charset="0"/>
+                <a:cs typeface="Times New Roman" panose="02020503050405090304" charset="0"/>
                 <a:sym typeface="+mn-ea"/>
               </a:rPr>
               <a:t>tk.Label(root, text = "Press and hold the left mouse button and move.").pack(side = "bottom")</a:t>
@@ -5232,9 +6658,9 @@
                 <a:solidFill>
                   <a:schemeClr val="tx1"/>
                 </a:solidFill>
-                <a:latin typeface="Times New Roman" panose="02020603050405020304" charset="0"/>
-                <a:ea typeface="Times New Roman" panose="02020603050405020304" charset="0"/>
-                <a:cs typeface="Times New Roman" panose="02020603050405020304" charset="0"/>
+                <a:latin typeface="Times New Roman" panose="02020503050405090304" charset="0"/>
+                <a:ea typeface="Times New Roman" panose="02020503050405090304" charset="0"/>
+                <a:cs typeface="Times New Roman" panose="02020503050405090304" charset="0"/>
                 <a:sym typeface="+mn-ea"/>
               </a:rPr>
               <a:t>root.mainloop()</a:t>
@@ -5347,9 +6773,9 @@
                 <a:solidFill>
                   <a:srgbClr val="2E0158"/>
                 </a:solidFill>
-                <a:latin typeface="Times New Roman" panose="02020603050405020304" charset="0"/>
-                <a:ea typeface="Times New Roman" panose="02020603050405020304" charset="0"/>
-                <a:cs typeface="Times New Roman" panose="02020603050405020304" charset="0"/>
+                <a:latin typeface="Times New Roman" panose="02020503050405090304" charset="0"/>
+                <a:ea typeface="Times New Roman" panose="02020503050405090304" charset="0"/>
+                <a:cs typeface="Times New Roman" panose="02020503050405090304" charset="0"/>
                 <a:sym typeface="+mn-ea"/>
               </a:rPr>
               <a:t>Tkinter Frame</a:t>
@@ -5389,9 +6815,9 @@
                 <a:solidFill>
                   <a:schemeClr val="tx1"/>
                 </a:solidFill>
-                <a:latin typeface="Times New Roman" panose="02020603050405020304" charset="0"/>
-                <a:ea typeface="Times New Roman" panose="02020603050405020304" charset="0"/>
-                <a:cs typeface="Times New Roman" panose="02020603050405020304" charset="0"/>
+                <a:latin typeface="Times New Roman" panose="02020503050405090304" charset="0"/>
+                <a:ea typeface="Times New Roman" panose="02020503050405090304" charset="0"/>
+                <a:cs typeface="Times New Roman" panose="02020503050405090304" charset="0"/>
                 <a:sym typeface="+mn-ea"/>
               </a:rPr>
               <a:t>from tkinter import *</a:t>
@@ -5410,9 +6836,9 @@
                 <a:solidFill>
                   <a:schemeClr val="tx1"/>
                 </a:solidFill>
-                <a:latin typeface="Times New Roman" panose="02020603050405020304" charset="0"/>
-                <a:ea typeface="Times New Roman" panose="02020603050405020304" charset="0"/>
-                <a:cs typeface="Times New Roman" panose="02020603050405020304" charset="0"/>
+                <a:latin typeface="Times New Roman" panose="02020503050405090304" charset="0"/>
+                <a:ea typeface="Times New Roman" panose="02020503050405090304" charset="0"/>
+                <a:cs typeface="Times New Roman" panose="02020503050405090304" charset="0"/>
                 <a:sym typeface="+mn-ea"/>
               </a:rPr>
               <a:t>root=Tk()</a:t>
@@ -5431,9 +6857,9 @@
                 <a:solidFill>
                   <a:schemeClr val="tx1"/>
                 </a:solidFill>
-                <a:latin typeface="Times New Roman" panose="02020603050405020304" charset="0"/>
-                <a:ea typeface="Times New Roman" panose="02020603050405020304" charset="0"/>
-                <a:cs typeface="Times New Roman" panose="02020603050405020304" charset="0"/>
+                <a:latin typeface="Times New Roman" panose="02020503050405090304" charset="0"/>
+                <a:ea typeface="Times New Roman" panose="02020503050405090304" charset="0"/>
+                <a:cs typeface="Times New Roman" panose="02020503050405090304" charset="0"/>
                 <a:sym typeface="+mn-ea"/>
               </a:rPr>
               <a:t>root.geometry('300x150+888+444')</a:t>
@@ -5452,9 +6878,9 @@
                 <a:solidFill>
                   <a:schemeClr val="tx1"/>
                 </a:solidFill>
-                <a:latin typeface="Times New Roman" panose="02020603050405020304" charset="0"/>
-                <a:ea typeface="Times New Roman" panose="02020603050405020304" charset="0"/>
-                <a:cs typeface="Times New Roman" panose="02020603050405020304" charset="0"/>
+                <a:latin typeface="Times New Roman" panose="02020503050405090304" charset="0"/>
+                <a:ea typeface="Times New Roman" panose="02020503050405090304" charset="0"/>
+                <a:cs typeface="Times New Roman" panose="02020503050405090304" charset="0"/>
                 <a:sym typeface="+mn-ea"/>
               </a:rPr>
               <a:t>fr1=Frame(root,relief='groove',bd=1,padx=60,pady=30)</a:t>
@@ -5473,9 +6899,9 @@
                 <a:solidFill>
                   <a:schemeClr val="tx1"/>
                 </a:solidFill>
-                <a:latin typeface="Times New Roman" panose="02020603050405020304" charset="0"/>
-                <a:ea typeface="Times New Roman" panose="02020603050405020304" charset="0"/>
-                <a:cs typeface="Times New Roman" panose="02020603050405020304" charset="0"/>
+                <a:latin typeface="Times New Roman" panose="02020503050405090304" charset="0"/>
+                <a:ea typeface="Times New Roman" panose="02020503050405090304" charset="0"/>
+                <a:cs typeface="Times New Roman" panose="02020503050405090304" charset="0"/>
                 <a:sym typeface="+mn-ea"/>
               </a:rPr>
               <a:t>fr1.pack()</a:t>
@@ -5494,9 +6920,9 @@
                 <a:solidFill>
                   <a:schemeClr val="tx1"/>
                 </a:solidFill>
-                <a:latin typeface="Times New Roman" panose="02020603050405020304" charset="0"/>
-                <a:ea typeface="Times New Roman" panose="02020603050405020304" charset="0"/>
-                <a:cs typeface="Times New Roman" panose="02020603050405020304" charset="0"/>
+                <a:latin typeface="Times New Roman" panose="02020503050405090304" charset="0"/>
+                <a:ea typeface="Times New Roman" panose="02020503050405090304" charset="0"/>
+                <a:cs typeface="Times New Roman" panose="02020503050405090304" charset="0"/>
                 <a:sym typeface="+mn-ea"/>
               </a:rPr>
               <a:t>la1=Label(fr1,text='Hello',bg='yellow') </a:t>
@@ -5515,9 +6941,9 @@
                 <a:solidFill>
                   <a:schemeClr val="tx1"/>
                 </a:solidFill>
-                <a:latin typeface="Times New Roman" panose="02020603050405020304" charset="0"/>
-                <a:ea typeface="Times New Roman" panose="02020603050405020304" charset="0"/>
-                <a:cs typeface="Times New Roman" panose="02020603050405020304" charset="0"/>
+                <a:latin typeface="Times New Roman" panose="02020503050405090304" charset="0"/>
+                <a:ea typeface="Times New Roman" panose="02020503050405090304" charset="0"/>
+                <a:cs typeface="Times New Roman" panose="02020503050405090304" charset="0"/>
                 <a:sym typeface="+mn-ea"/>
               </a:rPr>
               <a:t>la1.pack()</a:t>
@@ -5536,9 +6962,9 @@
                 <a:solidFill>
                   <a:schemeClr val="tx1"/>
                 </a:solidFill>
-                <a:latin typeface="Times New Roman" panose="02020603050405020304" charset="0"/>
-                <a:ea typeface="Times New Roman" panose="02020603050405020304" charset="0"/>
-                <a:cs typeface="Times New Roman" panose="02020603050405020304" charset="0"/>
+                <a:latin typeface="Times New Roman" panose="02020503050405090304" charset="0"/>
+                <a:ea typeface="Times New Roman" panose="02020503050405090304" charset="0"/>
+                <a:cs typeface="Times New Roman" panose="02020503050405090304" charset="0"/>
                 <a:sym typeface="+mn-ea"/>
               </a:rPr>
               <a:t>root.mainloop()</a:t>
@@ -5651,9 +7077,9 @@
                 <a:solidFill>
                   <a:srgbClr val="2E0158"/>
                 </a:solidFill>
-                <a:latin typeface="Times New Roman" panose="02020603050405020304" charset="0"/>
-                <a:ea typeface="Times New Roman" panose="02020603050405020304" charset="0"/>
-                <a:cs typeface="Times New Roman" panose="02020603050405020304" charset="0"/>
+                <a:latin typeface="Times New Roman" panose="02020503050405090304" charset="0"/>
+                <a:ea typeface="Times New Roman" panose="02020503050405090304" charset="0"/>
+                <a:cs typeface="Times New Roman" panose="02020503050405090304" charset="0"/>
                 <a:sym typeface="+mn-ea"/>
               </a:rPr>
               <a:t>Tkinter key_event</a:t>
@@ -5693,9 +7119,9 @@
                 <a:solidFill>
                   <a:schemeClr val="tx1"/>
                 </a:solidFill>
-                <a:latin typeface="Times New Roman" panose="02020603050405020304" charset="0"/>
-                <a:ea typeface="Times New Roman" panose="02020603050405020304" charset="0"/>
-                <a:cs typeface="Times New Roman" panose="02020603050405020304" charset="0"/>
+                <a:latin typeface="Times New Roman" panose="02020503050405090304" charset="0"/>
+                <a:ea typeface="Times New Roman" panose="02020503050405090304" charset="0"/>
+                <a:cs typeface="Times New Roman" panose="02020503050405090304" charset="0"/>
                 <a:sym typeface="+mn-ea"/>
               </a:rPr>
               <a:t>import tkinter</a:t>
@@ -5714,9 +7140,9 @@
                 <a:solidFill>
                   <a:schemeClr val="tx1"/>
                 </a:solidFill>
-                <a:latin typeface="Times New Roman" panose="02020603050405020304" charset="0"/>
-                <a:ea typeface="Times New Roman" panose="02020603050405020304" charset="0"/>
-                <a:cs typeface="Times New Roman" panose="02020603050405020304" charset="0"/>
+                <a:latin typeface="Times New Roman" panose="02020503050405090304" charset="0"/>
+                <a:ea typeface="Times New Roman" panose="02020503050405090304" charset="0"/>
+                <a:cs typeface="Times New Roman" panose="02020503050405090304" charset="0"/>
                 <a:sym typeface="+mn-ea"/>
               </a:rPr>
               <a:t>def xFunc1(event):</a:t>
@@ -5735,9 +7161,9 @@
                 <a:solidFill>
                   <a:schemeClr val="tx1"/>
                 </a:solidFill>
-                <a:latin typeface="Times New Roman" panose="02020603050405020304" charset="0"/>
-                <a:ea typeface="Times New Roman" panose="02020603050405020304" charset="0"/>
-                <a:cs typeface="Times New Roman" panose="02020603050405020304" charset="0"/>
+                <a:latin typeface="Times New Roman" panose="02020503050405090304" charset="0"/>
+                <a:ea typeface="Times New Roman" panose="02020503050405090304" charset="0"/>
+                <a:cs typeface="Times New Roman" panose="02020503050405090304" charset="0"/>
                 <a:sym typeface="+mn-ea"/>
               </a:rPr>
               <a:t>    print(f"special input:{event.char},corresponding ASCII code:{event.keycode}")</a:t>
@@ -5756,9 +7182,9 @@
                 <a:solidFill>
                   <a:schemeClr val="tx1"/>
                 </a:solidFill>
-                <a:latin typeface="Times New Roman" panose="02020603050405020304" charset="0"/>
-                <a:ea typeface="Times New Roman" panose="02020603050405020304" charset="0"/>
-                <a:cs typeface="Times New Roman" panose="02020603050405020304" charset="0"/>
+                <a:latin typeface="Times New Roman" panose="02020503050405090304" charset="0"/>
+                <a:ea typeface="Times New Roman" panose="02020503050405090304" charset="0"/>
+                <a:cs typeface="Times New Roman" panose="02020503050405090304" charset="0"/>
                 <a:sym typeface="+mn-ea"/>
               </a:rPr>
               <a:t>win = tkinter.Tk()</a:t>
@@ -5777,9 +7203,9 @@
                 <a:solidFill>
                   <a:schemeClr val="tx1"/>
                 </a:solidFill>
-                <a:latin typeface="Times New Roman" panose="02020603050405020304" charset="0"/>
-                <a:ea typeface="Times New Roman" panose="02020603050405020304" charset="0"/>
-                <a:cs typeface="Times New Roman" panose="02020603050405020304" charset="0"/>
+                <a:latin typeface="Times New Roman" panose="02020503050405090304" charset="0"/>
+                <a:ea typeface="Times New Roman" panose="02020503050405090304" charset="0"/>
+                <a:cs typeface="Times New Roman" panose="02020503050405090304" charset="0"/>
                 <a:sym typeface="+mn-ea"/>
               </a:rPr>
               <a:t>win.title("Kahn Software v1")</a:t>
@@ -5798,9 +7224,9 @@
                 <a:solidFill>
                   <a:schemeClr val="tx1"/>
                 </a:solidFill>
-                <a:latin typeface="Times New Roman" panose="02020603050405020304" charset="0"/>
-                <a:ea typeface="Times New Roman" panose="02020603050405020304" charset="0"/>
-                <a:cs typeface="Times New Roman" panose="02020603050405020304" charset="0"/>
+                <a:latin typeface="Times New Roman" panose="02020503050405090304" charset="0"/>
+                <a:ea typeface="Times New Roman" panose="02020503050405090304" charset="0"/>
+                <a:cs typeface="Times New Roman" panose="02020503050405090304" charset="0"/>
                 <a:sym typeface="+mn-ea"/>
               </a:rPr>
               <a:t>win.geometry("600x500+200+20")</a:t>
@@ -5819,9 +7245,9 @@
                 <a:solidFill>
                   <a:schemeClr val="tx1"/>
                 </a:solidFill>
-                <a:latin typeface="Times New Roman" panose="02020603050405020304" charset="0"/>
-                <a:ea typeface="Times New Roman" panose="02020603050405020304" charset="0"/>
-                <a:cs typeface="Times New Roman" panose="02020603050405020304" charset="0"/>
+                <a:latin typeface="Times New Roman" panose="02020503050405090304" charset="0"/>
+                <a:ea typeface="Times New Roman" panose="02020503050405090304" charset="0"/>
+                <a:cs typeface="Times New Roman" panose="02020503050405090304" charset="0"/>
                 <a:sym typeface="+mn-ea"/>
               </a:rPr>
               <a:t>win.bind("a", xFunc1)</a:t>
@@ -5840,9 +7266,9 @@
                 <a:solidFill>
                   <a:schemeClr val="tx1"/>
                 </a:solidFill>
-                <a:latin typeface="Times New Roman" panose="02020603050405020304" charset="0"/>
-                <a:ea typeface="Times New Roman" panose="02020603050405020304" charset="0"/>
-                <a:cs typeface="Times New Roman" panose="02020603050405020304" charset="0"/>
+                <a:latin typeface="Times New Roman" panose="02020503050405090304" charset="0"/>
+                <a:ea typeface="Times New Roman" panose="02020503050405090304" charset="0"/>
+                <a:cs typeface="Times New Roman" panose="02020503050405090304" charset="0"/>
                 <a:sym typeface="+mn-ea"/>
               </a:rPr>
               <a:t> </a:t>
@@ -5861,9 +7287,9 @@
                 <a:solidFill>
                   <a:schemeClr val="tx1"/>
                 </a:solidFill>
-                <a:latin typeface="Times New Roman" panose="02020603050405020304" charset="0"/>
-                <a:ea typeface="Times New Roman" panose="02020603050405020304" charset="0"/>
-                <a:cs typeface="Times New Roman" panose="02020603050405020304" charset="0"/>
+                <a:latin typeface="Times New Roman" panose="02020503050405090304" charset="0"/>
+                <a:ea typeface="Times New Roman" panose="02020503050405090304" charset="0"/>
+                <a:cs typeface="Times New Roman" panose="02020503050405090304" charset="0"/>
                 <a:sym typeface="+mn-ea"/>
               </a:rPr>
               <a:t>win.mainloop()</a:t>
@@ -5976,9 +7402,9 @@
                 <a:solidFill>
                   <a:srgbClr val="2E0158"/>
                 </a:solidFill>
-                <a:latin typeface="Times New Roman" panose="02020603050405020304" charset="0"/>
-                <a:ea typeface="Times New Roman" panose="02020603050405020304" charset="0"/>
-                <a:cs typeface="Times New Roman" panose="02020603050405020304" charset="0"/>
+                <a:latin typeface="Times New Roman" panose="02020503050405090304" charset="0"/>
+                <a:ea typeface="Times New Roman" panose="02020503050405090304" charset="0"/>
+                <a:cs typeface="Times New Roman" panose="02020503050405090304" charset="0"/>
                 <a:sym typeface="+mn-ea"/>
               </a:rPr>
               <a:t>Python Class (1)</a:t>
@@ -6018,9 +7444,9 @@
                 <a:solidFill>
                   <a:schemeClr val="tx1"/>
                 </a:solidFill>
-                <a:latin typeface="Times New Roman" panose="02020603050405020304" charset="0"/>
-                <a:ea typeface="Times New Roman" panose="02020603050405020304" charset="0"/>
-                <a:cs typeface="Times New Roman" panose="02020603050405020304" charset="0"/>
+                <a:latin typeface="Times New Roman" panose="02020503050405090304" charset="0"/>
+                <a:ea typeface="Times New Roman" panose="02020503050405090304" charset="0"/>
+                <a:cs typeface="Times New Roman" panose="02020503050405090304" charset="0"/>
                 <a:sym typeface="+mn-ea"/>
               </a:rPr>
               <a:t>class people:</a:t>
@@ -6039,9 +7465,9 @@
                 <a:solidFill>
                   <a:schemeClr val="tx1"/>
                 </a:solidFill>
-                <a:latin typeface="Times New Roman" panose="02020603050405020304" charset="0"/>
-                <a:ea typeface="Times New Roman" panose="02020603050405020304" charset="0"/>
-                <a:cs typeface="Times New Roman" panose="02020603050405020304" charset="0"/>
+                <a:latin typeface="Times New Roman" panose="02020503050405090304" charset="0"/>
+                <a:ea typeface="Times New Roman" panose="02020503050405090304" charset="0"/>
+                <a:cs typeface="Times New Roman" panose="02020503050405090304" charset="0"/>
                 <a:sym typeface="+mn-ea"/>
               </a:rPr>
               <a:t>    #define basic(public) attribute</a:t>
@@ -6060,9 +7486,9 @@
                 <a:solidFill>
                   <a:schemeClr val="tx1"/>
                 </a:solidFill>
-                <a:latin typeface="Times New Roman" panose="02020603050405020304" charset="0"/>
-                <a:ea typeface="Times New Roman" panose="02020603050405020304" charset="0"/>
-                <a:cs typeface="Times New Roman" panose="02020603050405020304" charset="0"/>
+                <a:latin typeface="Times New Roman" panose="02020503050405090304" charset="0"/>
+                <a:ea typeface="Times New Roman" panose="02020503050405090304" charset="0"/>
+                <a:cs typeface="Times New Roman" panose="02020503050405090304" charset="0"/>
                 <a:sym typeface="+mn-ea"/>
               </a:rPr>
               <a:t>    name = ''</a:t>
@@ -6081,9 +7507,9 @@
                 <a:solidFill>
                   <a:schemeClr val="tx1"/>
                 </a:solidFill>
-                <a:latin typeface="Times New Roman" panose="02020603050405020304" charset="0"/>
-                <a:ea typeface="Times New Roman" panose="02020603050405020304" charset="0"/>
-                <a:cs typeface="Times New Roman" panose="02020603050405020304" charset="0"/>
+                <a:latin typeface="Times New Roman" panose="02020503050405090304" charset="0"/>
+                <a:ea typeface="Times New Roman" panose="02020503050405090304" charset="0"/>
+                <a:cs typeface="Times New Roman" panose="02020503050405090304" charset="0"/>
                 <a:sym typeface="+mn-ea"/>
               </a:rPr>
               <a:t>    age = 0</a:t>
@@ -6102,9 +7528,9 @@
                 <a:solidFill>
                   <a:schemeClr val="tx1"/>
                 </a:solidFill>
-                <a:latin typeface="Times New Roman" panose="02020603050405020304" charset="0"/>
-                <a:ea typeface="Times New Roman" panose="02020603050405020304" charset="0"/>
-                <a:cs typeface="Times New Roman" panose="02020603050405020304" charset="0"/>
+                <a:latin typeface="Times New Roman" panose="02020503050405090304" charset="0"/>
+                <a:ea typeface="Times New Roman" panose="02020503050405090304" charset="0"/>
+                <a:cs typeface="Times New Roman" panose="02020503050405090304" charset="0"/>
                 <a:sym typeface="+mn-ea"/>
               </a:rPr>
               <a:t>    #define private attribute</a:t>
@@ -6123,9 +7549,9 @@
                 <a:solidFill>
                   <a:schemeClr val="tx1"/>
                 </a:solidFill>
-                <a:latin typeface="Times New Roman" panose="02020603050405020304" charset="0"/>
-                <a:ea typeface="Times New Roman" panose="02020603050405020304" charset="0"/>
-                <a:cs typeface="Times New Roman" panose="02020603050405020304" charset="0"/>
+                <a:latin typeface="Times New Roman" panose="02020503050405090304" charset="0"/>
+                <a:ea typeface="Times New Roman" panose="02020503050405090304" charset="0"/>
+                <a:cs typeface="Times New Roman" panose="02020503050405090304" charset="0"/>
                 <a:sym typeface="+mn-ea"/>
               </a:rPr>
               <a:t>    __weight = 0</a:t>
@@ -6144,9 +7570,9 @@
                 <a:solidFill>
                   <a:schemeClr val="tx1"/>
                 </a:solidFill>
-                <a:latin typeface="Times New Roman" panose="02020603050405020304" charset="0"/>
-                <a:ea typeface="Times New Roman" panose="02020603050405020304" charset="0"/>
-                <a:cs typeface="Times New Roman" panose="02020603050405020304" charset="0"/>
+                <a:latin typeface="Times New Roman" panose="02020503050405090304" charset="0"/>
+                <a:ea typeface="Times New Roman" panose="02020503050405090304" charset="0"/>
+                <a:cs typeface="Times New Roman" panose="02020503050405090304" charset="0"/>
                 <a:sym typeface="+mn-ea"/>
               </a:rPr>
               <a:t>    #initialization</a:t>
@@ -6165,9 +7591,9 @@
                 <a:solidFill>
                   <a:schemeClr val="tx1"/>
                 </a:solidFill>
-                <a:latin typeface="Times New Roman" panose="02020603050405020304" charset="0"/>
-                <a:ea typeface="Times New Roman" panose="02020603050405020304" charset="0"/>
-                <a:cs typeface="Times New Roman" panose="02020603050405020304" charset="0"/>
+                <a:latin typeface="Times New Roman" panose="02020503050405090304" charset="0"/>
+                <a:ea typeface="Times New Roman" panose="02020503050405090304" charset="0"/>
+                <a:cs typeface="Times New Roman" panose="02020503050405090304" charset="0"/>
                 <a:sym typeface="+mn-ea"/>
               </a:rPr>
               <a:t>    def __init__(self,n,a,w):</a:t>
@@ -6186,9 +7612,9 @@
                 <a:solidFill>
                   <a:schemeClr val="tx1"/>
                 </a:solidFill>
-                <a:latin typeface="Times New Roman" panose="02020603050405020304" charset="0"/>
-                <a:ea typeface="Times New Roman" panose="02020603050405020304" charset="0"/>
-                <a:cs typeface="Times New Roman" panose="02020603050405020304" charset="0"/>
+                <a:latin typeface="Times New Roman" panose="02020503050405090304" charset="0"/>
+                <a:ea typeface="Times New Roman" panose="02020503050405090304" charset="0"/>
+                <a:cs typeface="Times New Roman" panose="02020503050405090304" charset="0"/>
                 <a:sym typeface="+mn-ea"/>
               </a:rPr>
               <a:t>        self.name = n</a:t>
@@ -6207,9 +7633,9 @@
                 <a:solidFill>
                   <a:schemeClr val="tx1"/>
                 </a:solidFill>
-                <a:latin typeface="Times New Roman" panose="02020603050405020304" charset="0"/>
-                <a:ea typeface="Times New Roman" panose="02020603050405020304" charset="0"/>
-                <a:cs typeface="Times New Roman" panose="02020603050405020304" charset="0"/>
+                <a:latin typeface="Times New Roman" panose="02020503050405090304" charset="0"/>
+                <a:ea typeface="Times New Roman" panose="02020503050405090304" charset="0"/>
+                <a:cs typeface="Times New Roman" panose="02020503050405090304" charset="0"/>
                 <a:sym typeface="+mn-ea"/>
               </a:rPr>
               <a:t>        self.age = a</a:t>
@@ -6228,9 +7654,9 @@
                 <a:solidFill>
                   <a:schemeClr val="tx1"/>
                 </a:solidFill>
-                <a:latin typeface="Times New Roman" panose="02020603050405020304" charset="0"/>
-                <a:ea typeface="Times New Roman" panose="02020603050405020304" charset="0"/>
-                <a:cs typeface="Times New Roman" panose="02020603050405020304" charset="0"/>
+                <a:latin typeface="Times New Roman" panose="02020503050405090304" charset="0"/>
+                <a:ea typeface="Times New Roman" panose="02020503050405090304" charset="0"/>
+                <a:cs typeface="Times New Roman" panose="02020503050405090304" charset="0"/>
                 <a:sym typeface="+mn-ea"/>
               </a:rPr>
               <a:t>        self.__weight = w</a:t>
@@ -6249,9 +7675,9 @@
                 <a:solidFill>
                   <a:schemeClr val="tx1"/>
                 </a:solidFill>
-                <a:latin typeface="Times New Roman" panose="02020603050405020304" charset="0"/>
-                <a:ea typeface="Times New Roman" panose="02020603050405020304" charset="0"/>
-                <a:cs typeface="Times New Roman" panose="02020603050405020304" charset="0"/>
+                <a:latin typeface="Times New Roman" panose="02020503050405090304" charset="0"/>
+                <a:ea typeface="Times New Roman" panose="02020503050405090304" charset="0"/>
+                <a:cs typeface="Times New Roman" panose="02020503050405090304" charset="0"/>
                 <a:sym typeface="+mn-ea"/>
               </a:rPr>
               <a:t>    def speak(self):</a:t>
@@ -6270,9 +7696,9 @@
                 <a:solidFill>
                   <a:schemeClr val="tx1"/>
                 </a:solidFill>
-                <a:latin typeface="Times New Roman" panose="02020603050405020304" charset="0"/>
-                <a:ea typeface="Times New Roman" panose="02020603050405020304" charset="0"/>
-                <a:cs typeface="Times New Roman" panose="02020603050405020304" charset="0"/>
+                <a:latin typeface="Times New Roman" panose="02020503050405090304" charset="0"/>
+                <a:ea typeface="Times New Roman" panose="02020503050405090304" charset="0"/>
+                <a:cs typeface="Times New Roman" panose="02020503050405090304" charset="0"/>
                 <a:sym typeface="+mn-ea"/>
               </a:rPr>
               <a:t>        print("%s say: I %d years old。" %(self.name,self.age))</a:t>
@@ -6291,9 +7717,9 @@
                 <a:solidFill>
                   <a:schemeClr val="tx1"/>
                 </a:solidFill>
-                <a:latin typeface="Times New Roman" panose="02020603050405020304" charset="0"/>
-                <a:ea typeface="Times New Roman" panose="02020603050405020304" charset="0"/>
-                <a:cs typeface="Times New Roman" panose="02020603050405020304" charset="0"/>
+                <a:latin typeface="Times New Roman" panose="02020503050405090304" charset="0"/>
+                <a:ea typeface="Times New Roman" panose="02020503050405090304" charset="0"/>
+                <a:cs typeface="Times New Roman" panose="02020503050405090304" charset="0"/>
                 <a:sym typeface="+mn-ea"/>
               </a:rPr>
               <a:t># Instantiate a class</a:t>
@@ -6312,9 +7738,9 @@
                 <a:solidFill>
                   <a:schemeClr val="tx1"/>
                 </a:solidFill>
-                <a:latin typeface="Times New Roman" panose="02020603050405020304" charset="0"/>
-                <a:ea typeface="Times New Roman" panose="02020603050405020304" charset="0"/>
-                <a:cs typeface="Times New Roman" panose="02020603050405020304" charset="0"/>
+                <a:latin typeface="Times New Roman" panose="02020503050405090304" charset="0"/>
+                <a:ea typeface="Times New Roman" panose="02020503050405090304" charset="0"/>
+                <a:cs typeface="Times New Roman" panose="02020503050405090304" charset="0"/>
                 <a:sym typeface="+mn-ea"/>
               </a:rPr>
               <a:t>p = people('runoob',10,30)</a:t>
@@ -6333,9 +7759,9 @@
                 <a:solidFill>
                   <a:schemeClr val="tx1"/>
                 </a:solidFill>
-                <a:latin typeface="Times New Roman" panose="02020603050405020304" charset="0"/>
-                <a:ea typeface="Times New Roman" panose="02020603050405020304" charset="0"/>
-                <a:cs typeface="Times New Roman" panose="02020603050405020304" charset="0"/>
+                <a:latin typeface="Times New Roman" panose="02020503050405090304" charset="0"/>
+                <a:ea typeface="Times New Roman" panose="02020503050405090304" charset="0"/>
+                <a:cs typeface="Times New Roman" panose="02020503050405090304" charset="0"/>
                 <a:sym typeface="+mn-ea"/>
               </a:rPr>
               <a:t>p.speak()</a:t>
@@ -6424,9 +7850,9 @@
                 <a:solidFill>
                   <a:srgbClr val="2E0158"/>
                 </a:solidFill>
-                <a:latin typeface="Times New Roman" panose="02020603050405020304" charset="0"/>
-                <a:ea typeface="Times New Roman" panose="02020603050405020304" charset="0"/>
-                <a:cs typeface="Times New Roman" panose="02020603050405020304" charset="0"/>
+                <a:latin typeface="Times New Roman" panose="02020503050405090304" charset="0"/>
+                <a:ea typeface="Times New Roman" panose="02020503050405090304" charset="0"/>
+                <a:cs typeface="Times New Roman" panose="02020503050405090304" charset="0"/>
                 <a:sym typeface="+mn-ea"/>
               </a:rPr>
               <a:t>Python Class (2) Inheritance</a:t>
@@ -6466,9 +7892,9 @@
                 <a:solidFill>
                   <a:schemeClr val="tx1"/>
                 </a:solidFill>
-                <a:latin typeface="Times New Roman" panose="02020603050405020304" charset="0"/>
-                <a:ea typeface="Times New Roman" panose="02020603050405020304" charset="0"/>
-                <a:cs typeface="Times New Roman" panose="02020603050405020304" charset="0"/>
+                <a:latin typeface="Times New Roman" panose="02020503050405090304" charset="0"/>
+                <a:ea typeface="Times New Roman" panose="02020503050405090304" charset="0"/>
+                <a:cs typeface="Times New Roman" panose="02020503050405090304" charset="0"/>
                 <a:sym typeface="+mn-ea"/>
               </a:rPr>
               <a:t>class people:</a:t>
@@ -6487,9 +7913,9 @@
                 <a:solidFill>
                   <a:schemeClr val="tx1"/>
                 </a:solidFill>
-                <a:latin typeface="Times New Roman" panose="02020603050405020304" charset="0"/>
-                <a:ea typeface="Times New Roman" panose="02020603050405020304" charset="0"/>
-                <a:cs typeface="Times New Roman" panose="02020603050405020304" charset="0"/>
+                <a:latin typeface="Times New Roman" panose="02020503050405090304" charset="0"/>
+                <a:ea typeface="Times New Roman" panose="02020503050405090304" charset="0"/>
+                <a:cs typeface="Times New Roman" panose="02020503050405090304" charset="0"/>
                 <a:sym typeface="+mn-ea"/>
               </a:rPr>
               <a:t>    name = ''</a:t>
@@ -6508,9 +7934,9 @@
                 <a:solidFill>
                   <a:schemeClr val="tx1"/>
                 </a:solidFill>
-                <a:latin typeface="Times New Roman" panose="02020603050405020304" charset="0"/>
-                <a:ea typeface="Times New Roman" panose="02020603050405020304" charset="0"/>
-                <a:cs typeface="Times New Roman" panose="02020603050405020304" charset="0"/>
+                <a:latin typeface="Times New Roman" panose="02020503050405090304" charset="0"/>
+                <a:ea typeface="Times New Roman" panose="02020503050405090304" charset="0"/>
+                <a:cs typeface="Times New Roman" panose="02020503050405090304" charset="0"/>
                 <a:sym typeface="+mn-ea"/>
               </a:rPr>
               <a:t>    age = 0</a:t>
@@ -6529,9 +7955,9 @@
                 <a:solidFill>
                   <a:schemeClr val="tx1"/>
                 </a:solidFill>
-                <a:latin typeface="Times New Roman" panose="02020603050405020304" charset="0"/>
-                <a:ea typeface="Times New Roman" panose="02020603050405020304" charset="0"/>
-                <a:cs typeface="Times New Roman" panose="02020603050405020304" charset="0"/>
+                <a:latin typeface="Times New Roman" panose="02020503050405090304" charset="0"/>
+                <a:ea typeface="Times New Roman" panose="02020503050405090304" charset="0"/>
+                <a:cs typeface="Times New Roman" panose="02020503050405090304" charset="0"/>
                 <a:sym typeface="+mn-ea"/>
               </a:rPr>
               <a:t>    __weight = 0</a:t>
@@ -6550,9 +7976,9 @@
                 <a:solidFill>
                   <a:schemeClr val="tx1"/>
                 </a:solidFill>
-                <a:latin typeface="Times New Roman" panose="02020603050405020304" charset="0"/>
-                <a:ea typeface="Times New Roman" panose="02020603050405020304" charset="0"/>
-                <a:cs typeface="Times New Roman" panose="02020603050405020304" charset="0"/>
+                <a:latin typeface="Times New Roman" panose="02020503050405090304" charset="0"/>
+                <a:ea typeface="Times New Roman" panose="02020503050405090304" charset="0"/>
+                <a:cs typeface="Times New Roman" panose="02020503050405090304" charset="0"/>
                 <a:sym typeface="+mn-ea"/>
               </a:rPr>
               <a:t>    def __init__(self,n,a,w):</a:t>
@@ -6571,9 +7997,9 @@
                 <a:solidFill>
                   <a:schemeClr val="tx1"/>
                 </a:solidFill>
-                <a:latin typeface="Times New Roman" panose="02020603050405020304" charset="0"/>
-                <a:ea typeface="Times New Roman" panose="02020603050405020304" charset="0"/>
-                <a:cs typeface="Times New Roman" panose="02020603050405020304" charset="0"/>
+                <a:latin typeface="Times New Roman" panose="02020503050405090304" charset="0"/>
+                <a:ea typeface="Times New Roman" panose="02020503050405090304" charset="0"/>
+                <a:cs typeface="Times New Roman" panose="02020503050405090304" charset="0"/>
                 <a:sym typeface="+mn-ea"/>
               </a:rPr>
               <a:t>        self.name = n</a:t>
@@ -6592,9 +8018,9 @@
                 <a:solidFill>
                   <a:schemeClr val="tx1"/>
                 </a:solidFill>
-                <a:latin typeface="Times New Roman" panose="02020603050405020304" charset="0"/>
-                <a:ea typeface="Times New Roman" panose="02020603050405020304" charset="0"/>
-                <a:cs typeface="Times New Roman" panose="02020603050405020304" charset="0"/>
+                <a:latin typeface="Times New Roman" panose="02020503050405090304" charset="0"/>
+                <a:ea typeface="Times New Roman" panose="02020503050405090304" charset="0"/>
+                <a:cs typeface="Times New Roman" panose="02020503050405090304" charset="0"/>
                 <a:sym typeface="+mn-ea"/>
               </a:rPr>
               <a:t>        self.age = a</a:t>
@@ -6613,9 +8039,9 @@
                 <a:solidFill>
                   <a:schemeClr val="tx1"/>
                 </a:solidFill>
-                <a:latin typeface="Times New Roman" panose="02020603050405020304" charset="0"/>
-                <a:ea typeface="Times New Roman" panose="02020603050405020304" charset="0"/>
-                <a:cs typeface="Times New Roman" panose="02020603050405020304" charset="0"/>
+                <a:latin typeface="Times New Roman" panose="02020503050405090304" charset="0"/>
+                <a:ea typeface="Times New Roman" panose="02020503050405090304" charset="0"/>
+                <a:cs typeface="Times New Roman" panose="02020503050405090304" charset="0"/>
                 <a:sym typeface="+mn-ea"/>
               </a:rPr>
               <a:t>        self.__weight = w</a:t>
@@ -6634,9 +8060,9 @@
                 <a:solidFill>
                   <a:schemeClr val="tx1"/>
                 </a:solidFill>
-                <a:latin typeface="Times New Roman" panose="02020603050405020304" charset="0"/>
-                <a:ea typeface="Times New Roman" panose="02020603050405020304" charset="0"/>
-                <a:cs typeface="Times New Roman" panose="02020603050405020304" charset="0"/>
+                <a:latin typeface="Times New Roman" panose="02020503050405090304" charset="0"/>
+                <a:ea typeface="Times New Roman" panose="02020503050405090304" charset="0"/>
+                <a:cs typeface="Times New Roman" panose="02020503050405090304" charset="0"/>
                 <a:sym typeface="+mn-ea"/>
               </a:rPr>
               <a:t>    def speak(self):</a:t>
@@ -6655,9 +8081,9 @@
                 <a:solidFill>
                   <a:schemeClr val="tx1"/>
                 </a:solidFill>
-                <a:latin typeface="Times New Roman" panose="02020603050405020304" charset="0"/>
-                <a:ea typeface="Times New Roman" panose="02020603050405020304" charset="0"/>
-                <a:cs typeface="Times New Roman" panose="02020603050405020304" charset="0"/>
+                <a:latin typeface="Times New Roman" panose="02020503050405090304" charset="0"/>
+                <a:ea typeface="Times New Roman" panose="02020503050405090304" charset="0"/>
+                <a:cs typeface="Times New Roman" panose="02020503050405090304" charset="0"/>
                 <a:sym typeface="+mn-ea"/>
               </a:rPr>
               <a:t>        print("%s 说: 我 %d 岁。" %(self.name,self.age))</a:t>
@@ -6675,9 +8101,9 @@
               <a:solidFill>
                 <a:schemeClr val="tx1"/>
               </a:solidFill>
-              <a:latin typeface="Times New Roman" panose="02020603050405020304" charset="0"/>
-              <a:ea typeface="Times New Roman" panose="02020603050405020304" charset="0"/>
-              <a:cs typeface="Times New Roman" panose="02020603050405020304" charset="0"/>
+              <a:latin typeface="Times New Roman" panose="02020503050405090304" charset="0"/>
+              <a:ea typeface="Times New Roman" panose="02020503050405090304" charset="0"/>
+              <a:cs typeface="Times New Roman" panose="02020503050405090304" charset="0"/>
               <a:sym typeface="+mn-ea"/>
             </a:endParaRPr>
           </a:p>
@@ -6694,9 +8120,9 @@
                 <a:solidFill>
                   <a:schemeClr val="tx1"/>
                 </a:solidFill>
-                <a:latin typeface="Times New Roman" panose="02020603050405020304" charset="0"/>
-                <a:ea typeface="Times New Roman" panose="02020603050405020304" charset="0"/>
-                <a:cs typeface="Times New Roman" panose="02020603050405020304" charset="0"/>
+                <a:latin typeface="Times New Roman" panose="02020503050405090304" charset="0"/>
+                <a:ea typeface="Times New Roman" panose="02020503050405090304" charset="0"/>
+                <a:cs typeface="Times New Roman" panose="02020503050405090304" charset="0"/>
                 <a:sym typeface="+mn-ea"/>
               </a:rPr>
               <a:t>class student(people):</a:t>
@@ -6715,9 +8141,9 @@
                 <a:solidFill>
                   <a:schemeClr val="tx1"/>
                 </a:solidFill>
-                <a:latin typeface="Times New Roman" panose="02020603050405020304" charset="0"/>
-                <a:ea typeface="Times New Roman" panose="02020603050405020304" charset="0"/>
-                <a:cs typeface="Times New Roman" panose="02020603050405020304" charset="0"/>
+                <a:latin typeface="Times New Roman" panose="02020503050405090304" charset="0"/>
+                <a:ea typeface="Times New Roman" panose="02020503050405090304" charset="0"/>
+                <a:cs typeface="Times New Roman" panose="02020503050405090304" charset="0"/>
                 <a:sym typeface="+mn-ea"/>
               </a:rPr>
               <a:t>    grade = ''</a:t>
@@ -6736,9 +8162,9 @@
                 <a:solidFill>
                   <a:schemeClr val="tx1"/>
                 </a:solidFill>
-                <a:latin typeface="Times New Roman" panose="02020603050405020304" charset="0"/>
-                <a:ea typeface="Times New Roman" panose="02020603050405020304" charset="0"/>
-                <a:cs typeface="Times New Roman" panose="02020603050405020304" charset="0"/>
+                <a:latin typeface="Times New Roman" panose="02020503050405090304" charset="0"/>
+                <a:ea typeface="Times New Roman" panose="02020503050405090304" charset="0"/>
+                <a:cs typeface="Times New Roman" panose="02020503050405090304" charset="0"/>
                 <a:sym typeface="+mn-ea"/>
               </a:rPr>
               <a:t>    def __init__(self,n,a,w,g):</a:t>
@@ -6757,9 +8183,9 @@
                 <a:solidFill>
                   <a:schemeClr val="tx1"/>
                 </a:solidFill>
-                <a:latin typeface="Times New Roman" panose="02020603050405020304" charset="0"/>
-                <a:ea typeface="Times New Roman" panose="02020603050405020304" charset="0"/>
-                <a:cs typeface="Times New Roman" panose="02020603050405020304" charset="0"/>
+                <a:latin typeface="Times New Roman" panose="02020503050405090304" charset="0"/>
+                <a:ea typeface="Times New Roman" panose="02020503050405090304" charset="0"/>
+                <a:cs typeface="Times New Roman" panose="02020503050405090304" charset="0"/>
                 <a:sym typeface="+mn-ea"/>
               </a:rPr>
               <a:t>        people.__init__(self,n,a,w)</a:t>
@@ -6778,9 +8204,9 @@
                 <a:solidFill>
                   <a:schemeClr val="tx1"/>
                 </a:solidFill>
-                <a:latin typeface="Times New Roman" panose="02020603050405020304" charset="0"/>
-                <a:ea typeface="Times New Roman" panose="02020603050405020304" charset="0"/>
-                <a:cs typeface="Times New Roman" panose="02020603050405020304" charset="0"/>
+                <a:latin typeface="Times New Roman" panose="02020503050405090304" charset="0"/>
+                <a:ea typeface="Times New Roman" panose="02020503050405090304" charset="0"/>
+                <a:cs typeface="Times New Roman" panose="02020503050405090304" charset="0"/>
                 <a:sym typeface="+mn-ea"/>
               </a:rPr>
               <a:t>        self.grade = g</a:t>
@@ -6799,9 +8225,9 @@
                 <a:solidFill>
                   <a:schemeClr val="tx1"/>
                 </a:solidFill>
-                <a:latin typeface="Times New Roman" panose="02020603050405020304" charset="0"/>
-                <a:ea typeface="Times New Roman" panose="02020603050405020304" charset="0"/>
-                <a:cs typeface="Times New Roman" panose="02020603050405020304" charset="0"/>
+                <a:latin typeface="Times New Roman" panose="02020503050405090304" charset="0"/>
+                <a:ea typeface="Times New Roman" panose="02020503050405090304" charset="0"/>
+                <a:cs typeface="Times New Roman" panose="02020503050405090304" charset="0"/>
                 <a:sym typeface="+mn-ea"/>
               </a:rPr>
               <a:t>    def speak(self):</a:t>
@@ -6820,9 +8246,9 @@
                 <a:solidFill>
                   <a:schemeClr val="tx1"/>
                 </a:solidFill>
-                <a:latin typeface="Times New Roman" panose="02020603050405020304" charset="0"/>
-                <a:ea typeface="Times New Roman" panose="02020603050405020304" charset="0"/>
-                <a:cs typeface="Times New Roman" panose="02020603050405020304" charset="0"/>
+                <a:latin typeface="Times New Roman" panose="02020503050405090304" charset="0"/>
+                <a:ea typeface="Times New Roman" panose="02020503050405090304" charset="0"/>
+                <a:cs typeface="Times New Roman" panose="02020503050405090304" charset="0"/>
                 <a:sym typeface="+mn-ea"/>
               </a:rPr>
               <a:t>        print("%s say: I’m %d years old，and my grade is  %d"%(self.name,self.age,self.grade))</a:t>
@@ -6831,9 +8257,9 @@
               <a:solidFill>
                 <a:schemeClr val="tx1"/>
               </a:solidFill>
-              <a:latin typeface="Times New Roman" panose="02020603050405020304" charset="0"/>
-              <a:ea typeface="Times New Roman" panose="02020603050405020304" charset="0"/>
-              <a:cs typeface="Times New Roman" panose="02020603050405020304" charset="0"/>
+              <a:latin typeface="Times New Roman" panose="02020503050405090304" charset="0"/>
+              <a:ea typeface="Times New Roman" panose="02020503050405090304" charset="0"/>
+              <a:cs typeface="Times New Roman" panose="02020503050405090304" charset="0"/>
               <a:sym typeface="+mn-ea"/>
             </a:endParaRPr>
           </a:p>
@@ -6850,9 +8276,9 @@
                 <a:solidFill>
                   <a:schemeClr val="tx1"/>
                 </a:solidFill>
-                <a:latin typeface="Times New Roman" panose="02020603050405020304" charset="0"/>
-                <a:ea typeface="Times New Roman" panose="02020603050405020304" charset="0"/>
-                <a:cs typeface="Times New Roman" panose="02020603050405020304" charset="0"/>
+                <a:latin typeface="Times New Roman" panose="02020503050405090304" charset="0"/>
+                <a:ea typeface="Times New Roman" panose="02020503050405090304" charset="0"/>
+                <a:cs typeface="Times New Roman" panose="02020503050405090304" charset="0"/>
                 <a:sym typeface="+mn-ea"/>
               </a:rPr>
               <a:t>s = student('ken',10,60,3)</a:t>
@@ -6871,9 +8297,9 @@
                 <a:solidFill>
                   <a:schemeClr val="tx1"/>
                 </a:solidFill>
-                <a:latin typeface="Times New Roman" panose="02020603050405020304" charset="0"/>
-                <a:ea typeface="Times New Roman" panose="02020603050405020304" charset="0"/>
-                <a:cs typeface="Times New Roman" panose="02020603050405020304" charset="0"/>
+                <a:latin typeface="Times New Roman" panose="02020503050405090304" charset="0"/>
+                <a:ea typeface="Times New Roman" panose="02020503050405090304" charset="0"/>
+                <a:cs typeface="Times New Roman" panose="02020503050405090304" charset="0"/>
                 <a:sym typeface="+mn-ea"/>
               </a:rPr>
               <a:t>s.speak()</a:t>
@@ -6942,6 +8368,346 @@
         </p:nvSpPr>
         <p:spPr>
           <a:xfrm>
+            <a:off x="762000" y="825818"/>
+            <a:ext cx="8135303" cy="552450"/>
+          </a:xfrm>
+          <a:prstGeom prst="rect">
+            <a:avLst/>
+          </a:prstGeom>
+          <a:noFill/>
+        </p:spPr>
+        <p:txBody>
+          <a:bodyPr wrap="square" rtlCol="0" anchor="ctr"/>
+          <a:lstStyle/>
+          <a:p>
+            <a:pPr marL="0" indent="0">
+              <a:buNone/>
+            </a:pPr>
+            <a:r>
+              <a:rPr lang="en-US" sz="2400" b="1" dirty="0">
+                <a:latin typeface="Times New Roman" panose="02020503050405090304" charset="0"/>
+                <a:cs typeface="Times New Roman" panose="02020503050405090304" charset="0"/>
+              </a:rPr>
+              <a:t>Search the web to learn</a:t>
+            </a:r>
+          </a:p>
+        </p:txBody>
+      </p:sp>
+      <p:sp>
+        <p:nvSpPr>
+          <p:cNvPr id="3" name="Text 1"/>
+          <p:cNvSpPr/>
+          <p:nvPr/>
+        </p:nvSpPr>
+        <p:spPr>
+          <a:xfrm>
+            <a:off x="762000" y="1320800"/>
+            <a:ext cx="7937500" cy="3395980"/>
+          </a:xfrm>
+          <a:prstGeom prst="rect">
+            <a:avLst/>
+          </a:prstGeom>
+          <a:noFill/>
+        </p:spPr>
+        <p:txBody>
+          <a:bodyPr wrap="square" rtlCol="0" anchor="t"/>
+          <a:lstStyle/>
+          <a:p>
+            <a:pPr marL="342900" indent="-342900" algn="l">
+              <a:lnSpc>
+                <a:spcPct val="150000"/>
+              </a:lnSpc>
+              <a:buSzPct val="100000"/>
+              <a:buChar char="•"/>
+            </a:pPr>
+            <a:r>
+              <a:rPr lang="en-US" altLang="zh-CN" sz="1200" dirty="0"/>
+              <a:t>Use a browser to search your questions on Internet</a:t>
+            </a:r>
+          </a:p>
+          <a:p>
+            <a:pPr marL="342900" lvl="0" indent="-342900" algn="l">
+              <a:lnSpc>
+                <a:spcPct val="150000"/>
+              </a:lnSpc>
+              <a:buSzPct val="100000"/>
+              <a:buChar char="•"/>
+            </a:pPr>
+            <a:r>
+              <a:rPr lang="en-US" altLang="zh-CN" sz="1200" dirty="0"/>
+              <a:t>Browser: Chrome/Edge/Safari/Firefox</a:t>
+            </a:r>
+          </a:p>
+          <a:p>
+            <a:pPr marL="342900" lvl="0" indent="-342900" algn="l">
+              <a:lnSpc>
+                <a:spcPct val="150000"/>
+              </a:lnSpc>
+              <a:buSzPct val="100000"/>
+              <a:buChar char="•"/>
+            </a:pPr>
+            <a:r>
+              <a:rPr lang="en-US" altLang="zh-CN" sz="1200" dirty="0"/>
+              <a:t>Website: bing.com/google.com</a:t>
+            </a:r>
+          </a:p>
+        </p:txBody>
+      </p:sp>
+      <p:pic>
+        <p:nvPicPr>
+          <p:cNvPr id="7" name="图片 6" descr="zh-hans_logo"/>
+          <p:cNvPicPr>
+            <a:picLocks noChangeAspect="1"/>
+          </p:cNvPicPr>
+          <p:nvPr>
+            <p:custDataLst>
+              <p:tags r:id="rId1"/>
+            </p:custDataLst>
+          </p:nvPr>
+        </p:nvPicPr>
+        <p:blipFill>
+          <a:blip r:embed="rId4"/>
+          <a:stretch>
+            <a:fillRect/>
+          </a:stretch>
+        </p:blipFill>
+        <p:spPr>
+          <a:xfrm>
+            <a:off x="0" y="85090"/>
+            <a:ext cx="4361180" cy="625475"/>
+          </a:xfrm>
+          <a:prstGeom prst="rect">
+            <a:avLst/>
+          </a:prstGeom>
+        </p:spPr>
+      </p:pic>
+      <p:pic>
+        <p:nvPicPr>
+          <p:cNvPr id="6" name="图片 5"/>
+          <p:cNvPicPr>
+            <a:picLocks noChangeAspect="1"/>
+          </p:cNvPicPr>
+          <p:nvPr/>
+        </p:nvPicPr>
+        <p:blipFill>
+          <a:blip r:embed="rId5"/>
+          <a:stretch>
+            <a:fillRect/>
+          </a:stretch>
+        </p:blipFill>
+        <p:spPr>
+          <a:xfrm>
+            <a:off x="2276475" y="2322830"/>
+            <a:ext cx="4908550" cy="2393950"/>
+          </a:xfrm>
+          <a:prstGeom prst="rect">
+            <a:avLst/>
+          </a:prstGeom>
+        </p:spPr>
+      </p:pic>
+    </p:spTree>
+  </p:cSld>
+  <p:clrMapOvr>
+    <a:masterClrMapping/>
+  </p:clrMapOvr>
+</p:sld>
+</file>
+
+<file path=ppt/slides/slide18.xml><?xml version="1.0" encoding="utf-8"?>
+<p:sld xmlns:a="http://schemas.openxmlformats.org/drawingml/2006/main" xmlns:r="http://schemas.openxmlformats.org/officeDocument/2006/relationships" xmlns:p="http://schemas.openxmlformats.org/presentationml/2006/main">
+  <p:cSld>
+    <p:spTree>
+      <p:nvGrpSpPr>
+        <p:cNvPr id="1" name=""/>
+        <p:cNvGrpSpPr/>
+        <p:nvPr/>
+      </p:nvGrpSpPr>
+      <p:grpSpPr>
+        <a:xfrm>
+          <a:off x="0" y="0"/>
+          <a:ext cx="0" cy="0"/>
+          <a:chOff x="0" y="0"/>
+          <a:chExt cx="0" cy="0"/>
+        </a:xfrm>
+      </p:grpSpPr>
+      <p:sp>
+        <p:nvSpPr>
+          <p:cNvPr id="2" name="Text 0"/>
+          <p:cNvSpPr/>
+          <p:nvPr/>
+        </p:nvSpPr>
+        <p:spPr>
+          <a:xfrm>
+            <a:off x="762000" y="825818"/>
+            <a:ext cx="8135303" cy="552450"/>
+          </a:xfrm>
+          <a:prstGeom prst="rect">
+            <a:avLst/>
+          </a:prstGeom>
+          <a:noFill/>
+        </p:spPr>
+        <p:txBody>
+          <a:bodyPr wrap="square" rtlCol="0" anchor="ctr"/>
+          <a:lstStyle/>
+          <a:p>
+            <a:pPr marL="0" indent="0">
+              <a:buNone/>
+            </a:pPr>
+            <a:r>
+              <a:rPr lang="en-US" sz="2400" b="1" dirty="0">
+                <a:latin typeface="Times New Roman" panose="02020503050405090304" charset="0"/>
+                <a:cs typeface="Times New Roman" panose="02020503050405090304" charset="0"/>
+              </a:rPr>
+              <a:t>Use AI tools to help you learn coding</a:t>
+            </a:r>
+          </a:p>
+        </p:txBody>
+      </p:sp>
+      <p:sp>
+        <p:nvSpPr>
+          <p:cNvPr id="3" name="Text 1"/>
+          <p:cNvSpPr/>
+          <p:nvPr/>
+        </p:nvSpPr>
+        <p:spPr>
+          <a:xfrm>
+            <a:off x="762000" y="1320800"/>
+            <a:ext cx="7937500" cy="3395980"/>
+          </a:xfrm>
+          <a:prstGeom prst="rect">
+            <a:avLst/>
+          </a:prstGeom>
+          <a:noFill/>
+        </p:spPr>
+        <p:txBody>
+          <a:bodyPr wrap="square" rtlCol="0" anchor="t"/>
+          <a:lstStyle/>
+          <a:p>
+            <a:pPr marL="342900" indent="-342900" algn="l">
+              <a:lnSpc>
+                <a:spcPct val="150000"/>
+              </a:lnSpc>
+              <a:buSzPct val="100000"/>
+              <a:buChar char="•"/>
+            </a:pPr>
+            <a:r>
+              <a:rPr lang="en-US" altLang="zh-CN" sz="1200" dirty="0"/>
+              <a:t>ChatGPT/Claude/Gemini/Grok</a:t>
+            </a:r>
+          </a:p>
+          <a:p>
+            <a:pPr marL="342900" indent="-342900" algn="l">
+              <a:lnSpc>
+                <a:spcPct val="150000"/>
+              </a:lnSpc>
+              <a:buSzPct val="100000"/>
+              <a:buChar char="•"/>
+            </a:pPr>
+            <a:r>
+              <a:rPr lang="en-US" altLang="zh-CN" sz="1200" dirty="0"/>
+              <a:t>DeepSeek/Douao/Qwen/Kiwi</a:t>
+            </a:r>
+          </a:p>
+          <a:p>
+            <a:pPr marL="342900" indent="-342900" algn="l">
+              <a:lnSpc>
+                <a:spcPct val="150000"/>
+              </a:lnSpc>
+              <a:buSzPct val="100000"/>
+              <a:buChar char="•"/>
+            </a:pPr>
+            <a:r>
+              <a:rPr lang="en-US" altLang="zh-CN" sz="1200" dirty="0"/>
+              <a:t>Our school has also provided: https://ai.cuhk.edu.cn/chat/</a:t>
+            </a:r>
+          </a:p>
+        </p:txBody>
+      </p:sp>
+      <p:pic>
+        <p:nvPicPr>
+          <p:cNvPr id="7" name="图片 6" descr="zh-hans_logo"/>
+          <p:cNvPicPr>
+            <a:picLocks noChangeAspect="1"/>
+          </p:cNvPicPr>
+          <p:nvPr>
+            <p:custDataLst>
+              <p:tags r:id="rId1"/>
+            </p:custDataLst>
+          </p:nvPr>
+        </p:nvPicPr>
+        <p:blipFill>
+          <a:blip r:embed="rId4"/>
+          <a:stretch>
+            <a:fillRect/>
+          </a:stretch>
+        </p:blipFill>
+        <p:spPr>
+          <a:xfrm>
+            <a:off x="0" y="85090"/>
+            <a:ext cx="4361180" cy="625475"/>
+          </a:xfrm>
+          <a:prstGeom prst="rect">
+            <a:avLst/>
+          </a:prstGeom>
+        </p:spPr>
+      </p:pic>
+      <p:pic>
+        <p:nvPicPr>
+          <p:cNvPr id="5" name="图片 4"/>
+          <p:cNvPicPr>
+            <a:picLocks noChangeAspect="1"/>
+          </p:cNvPicPr>
+          <p:nvPr/>
+        </p:nvPicPr>
+        <p:blipFill>
+          <a:blip r:embed="rId5"/>
+          <a:stretch>
+            <a:fillRect/>
+          </a:stretch>
+        </p:blipFill>
+        <p:spPr>
+          <a:xfrm>
+            <a:off x="2770505" y="2298700"/>
+            <a:ext cx="3761740" cy="2426970"/>
+          </a:xfrm>
+          <a:prstGeom prst="rect">
+            <a:avLst/>
+          </a:prstGeom>
+        </p:spPr>
+      </p:pic>
+    </p:spTree>
+  </p:cSld>
+  <p:clrMapOvr>
+    <a:masterClrMapping/>
+  </p:clrMapOvr>
+</p:sld>
+</file>
+
+<file path=ppt/slides/slide19.xml><?xml version="1.0" encoding="utf-8"?>
+<p:sld xmlns:a="http://schemas.openxmlformats.org/drawingml/2006/main" xmlns:r="http://schemas.openxmlformats.org/officeDocument/2006/relationships" xmlns:p="http://schemas.openxmlformats.org/presentationml/2006/main">
+  <p:cSld>
+    <p:spTree>
+      <p:nvGrpSpPr>
+        <p:cNvPr id="1" name=""/>
+        <p:cNvGrpSpPr/>
+        <p:nvPr/>
+      </p:nvGrpSpPr>
+      <p:grpSpPr>
+        <a:xfrm>
+          <a:off x="0" y="0"/>
+          <a:ext cx="0" cy="0"/>
+          <a:chOff x="0" y="0"/>
+          <a:chExt cx="0" cy="0"/>
+        </a:xfrm>
+      </p:grpSpPr>
+      <p:sp>
+        <p:nvSpPr>
+          <p:cNvPr id="2" name="Text 0"/>
+          <p:cNvSpPr/>
+          <p:nvPr/>
+        </p:nvSpPr>
+        <p:spPr>
+          <a:xfrm>
             <a:off x="2871788" y="1709738"/>
             <a:ext cx="3395663" cy="552450"/>
           </a:xfrm>
@@ -6962,9 +8728,9 @@
                 <a:solidFill>
                   <a:srgbClr val="646464"/>
                 </a:solidFill>
-                <a:latin typeface="Times New Roman" panose="02020603050405020304" charset="0"/>
-                <a:ea typeface="Times New Roman" panose="02020603050405020304" charset="0"/>
-                <a:cs typeface="Times New Roman" panose="02020603050405020304" charset="0"/>
+                <a:latin typeface="Times New Roman" panose="02020503050405090304" charset="0"/>
+                <a:ea typeface="Times New Roman" panose="02020503050405090304" charset="0"/>
+                <a:cs typeface="Times New Roman" panose="02020503050405090304" charset="0"/>
               </a:rPr>
               <a:t>THE END</a:t>
             </a:r>
@@ -7000,9 +8766,9 @@
                 <a:solidFill>
                   <a:srgbClr val="2E0158"/>
                 </a:solidFill>
-                <a:latin typeface="Times New Roman" panose="02020603050405020304" charset="0"/>
-                <a:ea typeface="Times New Roman" panose="02020603050405020304" charset="0"/>
-                <a:cs typeface="Times New Roman" panose="02020603050405020304" charset="0"/>
+                <a:latin typeface="Times New Roman" panose="02020503050405090304" charset="0"/>
+                <a:ea typeface="Times New Roman" panose="02020503050405090304" charset="0"/>
+                <a:cs typeface="Times New Roman" panose="02020503050405090304" charset="0"/>
               </a:rPr>
               <a:t>THANKS</a:t>
             </a:r>
@@ -7088,8 +8854,8 @@
             </a:pPr>
             <a:r>
               <a:rPr lang="en-US" sz="2400" b="1" dirty="0">
-                <a:latin typeface="Times New Roman" panose="02020603050405020304" charset="0"/>
-                <a:cs typeface="Times New Roman" panose="02020603050405020304" charset="0"/>
+                <a:latin typeface="Times New Roman" panose="02020503050405090304" charset="0"/>
+                <a:cs typeface="Times New Roman" panose="02020503050405090304" charset="0"/>
               </a:rPr>
               <a:t>Basic Function</a:t>
             </a:r>
@@ -7104,8 +8870,8 @@
         </p:nvSpPr>
         <p:spPr>
           <a:xfrm>
-            <a:off x="762000" y="1436370"/>
-            <a:ext cx="7715250" cy="3395663"/>
+            <a:off x="762000" y="1320800"/>
+            <a:ext cx="7937500" cy="3395980"/>
           </a:xfrm>
           <a:prstGeom prst="rect">
             <a:avLst/>
@@ -7124,8 +8890,28 @@
               <a:buChar char="•"/>
             </a:pPr>
             <a:r>
-              <a:rPr lang="en-US" sz="1470" dirty="0"/>
-              <a:t>The player's goal is to control a snake to eat as much food as possible, causing the snake to grow longer.</a:t>
+              <a:rPr lang="en-US" sz="1200" dirty="0"/>
+              <a:t>The player's goal is to control a snake to </a:t>
+            </a:r>
+            <a:r>
+              <a:rPr lang="en-US" sz="1200" dirty="0">
+                <a:highlight>
+                  <a:srgbClr val="FFFF00"/>
+                </a:highlight>
+              </a:rPr>
+              <a:t>eat as much food as possible</a:t>
+            </a:r>
+            <a:r>
+              <a:rPr lang="en-US" sz="1200" dirty="0"/>
+              <a:t>, causing the snake to grow longer </a:t>
+            </a:r>
+            <a:r>
+              <a:rPr lang="en-US" altLang="zh-CN" sz="1200" dirty="0"/>
+              <a:t>and learning a higher score</a:t>
+            </a:r>
+            <a:r>
+              <a:rPr lang="en-US" sz="1200" dirty="0"/>
+              <a:t>.</a:t>
             </a:r>
           </a:p>
           <a:p>
@@ -7137,8 +8923,16 @@
               <a:buChar char="•"/>
             </a:pPr>
             <a:r>
-              <a:rPr lang="en-US" sz="1470" dirty="0"/>
-              <a:t>Control its direction to find food at a fixed speed with Keyboard.</a:t>
+              <a:rPr lang="en-US" altLang="zh-CN" sz="1200" dirty="0"/>
+              <a:t>The snake continuously moves forward, and the player can </a:t>
+            </a:r>
+            <a:r>
+              <a:rPr lang="en-US" altLang="zh-CN" sz="1200" i="1" u="sng" dirty="0"/>
+              <a:t>control its direction</a:t>
+            </a:r>
+            <a:r>
+              <a:rPr lang="en-US" altLang="zh-CN" sz="1200" dirty="0"/>
+              <a:t> to find food at a fixed speed.</a:t>
             </a:r>
           </a:p>
           <a:p>
@@ -7150,8 +8944,12 @@
               <a:buChar char="•"/>
             </a:pPr>
             <a:r>
-              <a:rPr lang="en-US" sz="1470" dirty="0"/>
-              <a:t>Food items randomly appear on the game board.</a:t>
+              <a:rPr lang="en-US" altLang="zh-CN" sz="1200" i="1" u="sng" dirty="0"/>
+              <a:t>Food items randomly appear on the game board</a:t>
+            </a:r>
+            <a:r>
+              <a:rPr lang="en-US" altLang="zh-CN" sz="1200" dirty="0"/>
+              <a:t>, typically represented as small dots or icons. The snake must consume these food items to increase its length and score. Once the snake eats the food, new food appears at another location on the map.</a:t>
             </a:r>
           </a:p>
           <a:p>
@@ -7163,8 +8961,16 @@
               <a:buChar char="•"/>
             </a:pPr>
             <a:r>
-              <a:rPr lang="en-US" sz="1470" dirty="0"/>
-              <a:t>The game ends under the following conditions: The snake collides with the boundaries of the game area. The snake collides with its own body, essentially running into itself.</a:t>
+              <a:rPr lang="en-US" altLang="zh-CN" sz="1200" dirty="0"/>
+              <a:t>There should be </a:t>
+            </a:r>
+            <a:r>
+              <a:rPr lang="en-US" altLang="zh-CN" sz="1200" i="1" u="sng" dirty="0"/>
+              <a:t>two types of foods</a:t>
+            </a:r>
+            <a:r>
+              <a:rPr lang="en-US" altLang="zh-CN" sz="1200" dirty="0"/>
+              <a:t>. Each food corresponds to a different increasing of the snake's length. Every time the snake consumes food, its length increases either one or two units.</a:t>
             </a:r>
           </a:p>
           <a:p>
@@ -7176,19 +8982,17 @@
               <a:buChar char="•"/>
             </a:pPr>
             <a:r>
-              <a:rPr lang="en-US" sz="1470" dirty="0"/>
-              <a:t>Utilizes the tkinter library to create a graphical user interface.</a:t>
-            </a:r>
-          </a:p>
-          <a:p>
-            <a:pPr marL="342900" indent="-342900" algn="l">
-              <a:lnSpc>
-                <a:spcPct val="150000"/>
-              </a:lnSpc>
-              <a:buSzPct val="100000"/>
-              <a:buChar char="•"/>
-            </a:pPr>
-            <a:endParaRPr lang="en-US" sz="1470" dirty="0"/>
+              <a:rPr lang="en-US" altLang="zh-CN" sz="1200" dirty="0"/>
+              <a:t>The game </a:t>
+            </a:r>
+            <a:r>
+              <a:rPr lang="en-US" altLang="zh-CN" sz="1200" i="1" u="sng" dirty="0"/>
+              <a:t>ends</a:t>
+            </a:r>
+            <a:r>
+              <a:rPr lang="en-US" altLang="zh-CN" sz="1200" dirty="0"/>
+              <a:t> under the following conditions: 1) The snake collides with the boundaries of the game area. 2) The snake collides with its own body, essentially running into itself. 3) The snake reaches its maximum length (8 units).</a:t>
+            </a:r>
           </a:p>
         </p:txBody>
       </p:sp>
@@ -7273,9 +9077,9 @@
                 <a:solidFill>
                   <a:srgbClr val="2E0158"/>
                 </a:solidFill>
-                <a:latin typeface="Times New Roman" panose="02020603050405020304" charset="0"/>
-                <a:ea typeface="Times New Roman" panose="02020603050405020304" charset="0"/>
-                <a:cs typeface="Times New Roman" panose="02020603050405020304" charset="0"/>
+                <a:latin typeface="Times New Roman" panose="02020503050405090304" charset="0"/>
+                <a:ea typeface="Times New Roman" panose="02020503050405090304" charset="0"/>
+                <a:cs typeface="Times New Roman" panose="02020503050405090304" charset="0"/>
               </a:rPr>
               <a:t>Advanced Function</a:t>
             </a:r>
@@ -7312,7 +9116,7 @@
             </a:pPr>
             <a:r>
               <a:rPr lang="en-US" sz="1470" dirty="0"/>
-              <a:t>Different Effects of Food (10%)</a:t>
+              <a:t>Different Effects of Food</a:t>
             </a:r>
           </a:p>
           <a:p>
@@ -7325,7 +9129,7 @@
             </a:pPr>
             <a:r>
               <a:rPr lang="en-US" sz="1470" dirty="0"/>
-              <a:t>Adding Obstacles (5%)</a:t>
+              <a:t>Adding Obstacles</a:t>
             </a:r>
           </a:p>
           <a:p>
@@ -7338,14 +9142,11 @@
             </a:pPr>
             <a:r>
               <a:rPr lang="en-US" sz="1470" dirty="0"/>
-              <a:t>Adding score function </a:t>
-            </a:r>
-            <a:r>
-              <a:rPr lang="en-US" sz="1470" dirty="0">
-                <a:sym typeface="+mn-ea"/>
-              </a:rPr>
-              <a:t>(5%)</a:t>
-            </a:r>
+              <a:t>Adding score function</a:t>
+            </a:r>
+            <a:endParaRPr lang="en-US" sz="1470" dirty="0">
+              <a:sym typeface="+mn-ea"/>
+            </a:endParaRPr>
           </a:p>
           <a:p>
             <a:pPr marL="342900" indent="-342900" algn="l">
@@ -7357,7 +9158,7 @@
             </a:pPr>
             <a:r>
               <a:rPr lang="en-US" sz="1470" dirty="0"/>
-              <a:t>Multi-Level Challenges (15%)</a:t>
+              <a:t>Multi-Level Challenges</a:t>
             </a:r>
           </a:p>
           <a:p>
@@ -7370,7 +9171,7 @@
             </a:pPr>
             <a:r>
               <a:rPr lang="en-US" sz="1470" dirty="0"/>
-              <a:t>Dynamic velocity (10%)</a:t>
+              <a:t>Dynamic velocity</a:t>
             </a:r>
           </a:p>
           <a:p>
@@ -7383,7 +9184,7 @@
             </a:pPr>
             <a:r>
               <a:rPr lang="en-US" sz="1470" dirty="0"/>
-              <a:t>Adding start menu (5%)</a:t>
+              <a:t>Adding start menu</a:t>
             </a:r>
           </a:p>
           <a:p>
@@ -7522,8 +9323,8 @@
         </p:nvSpPr>
         <p:spPr>
           <a:xfrm>
-            <a:off x="762000" y="1207453"/>
-            <a:ext cx="8135303" cy="552450"/>
+            <a:off x="468630" y="836295"/>
+            <a:ext cx="2964180" cy="552450"/>
           </a:xfrm>
           <a:prstGeom prst="rect">
             <a:avLst/>
@@ -7542,43 +9343,11 @@
                 <a:solidFill>
                   <a:srgbClr val="2E0158"/>
                 </a:solidFill>
-                <a:latin typeface="Times New Roman" panose="02020603050405020304" charset="0"/>
-                <a:ea typeface="Times New Roman" panose="02020603050405020304" charset="0"/>
-                <a:cs typeface="Times New Roman" panose="02020603050405020304" charset="0"/>
+                <a:latin typeface="Times New Roman" panose="02020503050405090304" charset="0"/>
+                <a:ea typeface="Times New Roman" panose="02020503050405090304" charset="0"/>
+                <a:cs typeface="Times New Roman" panose="02020503050405090304" charset="0"/>
               </a:rPr>
-              <a:t>project </a:t>
-            </a:r>
-          </a:p>
-          <a:p>
-            <a:pPr marL="0" indent="0">
-              <a:buNone/>
-            </a:pPr>
-            <a:r>
-              <a:rPr lang="en-US" sz="2400" b="1" dirty="0">
-                <a:solidFill>
-                  <a:srgbClr val="2E0158"/>
-                </a:solidFill>
-                <a:latin typeface="Times New Roman" panose="02020603050405020304" charset="0"/>
-                <a:ea typeface="Times New Roman" panose="02020603050405020304" charset="0"/>
-                <a:cs typeface="Times New Roman" panose="02020603050405020304" charset="0"/>
-              </a:rPr>
-              <a:t>logic </a:t>
-            </a:r>
-          </a:p>
-          <a:p>
-            <a:pPr marL="0" indent="0">
-              <a:buNone/>
-            </a:pPr>
-            <a:r>
-              <a:rPr lang="en-US" sz="2400" b="1" dirty="0">
-                <a:solidFill>
-                  <a:srgbClr val="2E0158"/>
-                </a:solidFill>
-                <a:latin typeface="Times New Roman" panose="02020603050405020304" charset="0"/>
-                <a:ea typeface="Times New Roman" panose="02020603050405020304" charset="0"/>
-                <a:cs typeface="Times New Roman" panose="02020603050405020304" charset="0"/>
-              </a:rPr>
-              <a:t>chain</a:t>
+              <a:t>Project Logic Chain</a:t>
             </a:r>
             <a:endParaRPr lang="en-US" sz="2400" dirty="0"/>
           </a:p>
@@ -7615,9 +9384,9 @@
               <a:solidFill>
                 <a:schemeClr val="tx1"/>
               </a:solidFill>
-              <a:latin typeface="Times New Roman" panose="02020603050405020304" charset="0"/>
-              <a:ea typeface="Times New Roman" panose="02020603050405020304" charset="0"/>
-              <a:cs typeface="Times New Roman" panose="02020603050405020304" charset="0"/>
+              <a:latin typeface="Times New Roman" panose="02020503050405090304" charset="0"/>
+              <a:ea typeface="Times New Roman" panose="02020503050405090304" charset="0"/>
+              <a:cs typeface="Times New Roman" panose="02020503050405090304" charset="0"/>
             </a:endParaRPr>
           </a:p>
         </p:txBody>
@@ -7714,9 +9483,9 @@
                 <a:solidFill>
                   <a:srgbClr val="2E0158"/>
                 </a:solidFill>
-                <a:latin typeface="Times New Roman" panose="02020603050405020304" charset="0"/>
-                <a:ea typeface="Times New Roman" panose="02020603050405020304" charset="0"/>
-                <a:cs typeface="Times New Roman" panose="02020603050405020304" charset="0"/>
+                <a:latin typeface="Times New Roman" panose="02020503050405090304" charset="0"/>
+                <a:ea typeface="Times New Roman" panose="02020503050405090304" charset="0"/>
+                <a:cs typeface="Times New Roman" panose="02020503050405090304" charset="0"/>
               </a:rPr>
               <a:t>project code framework</a:t>
             </a:r>
@@ -7755,9 +9524,9 @@
               <a:solidFill>
                 <a:schemeClr val="tx1"/>
               </a:solidFill>
-              <a:latin typeface="Times New Roman" panose="02020603050405020304" charset="0"/>
-              <a:ea typeface="Times New Roman" panose="02020603050405020304" charset="0"/>
-              <a:cs typeface="Times New Roman" panose="02020603050405020304" charset="0"/>
+              <a:latin typeface="Times New Roman" panose="02020503050405090304" charset="0"/>
+              <a:ea typeface="Times New Roman" panose="02020503050405090304" charset="0"/>
+              <a:cs typeface="Times New Roman" panose="02020503050405090304" charset="0"/>
             </a:endParaRPr>
           </a:p>
         </p:txBody>
@@ -7845,7 +9614,7 @@
         <p:spPr>
           <a:xfrm>
             <a:off x="817245" y="2109470"/>
-            <a:ext cx="1118870" cy="230505"/>
+            <a:ext cx="1296670" cy="230505"/>
           </a:xfrm>
           <a:prstGeom prst="rect">
             <a:avLst/>
@@ -7876,7 +9645,7 @@
         <p:spPr>
           <a:xfrm>
             <a:off x="322580" y="2814320"/>
-            <a:ext cx="2342515" cy="1814830"/>
+            <a:ext cx="2567940" cy="2030095"/>
           </a:xfrm>
           <a:prstGeom prst="rect">
             <a:avLst/>
@@ -7952,8 +9721,8 @@
         </p:nvSpPr>
         <p:spPr>
           <a:xfrm>
-            <a:off x="817245" y="4328795"/>
-            <a:ext cx="1118870" cy="230505"/>
+            <a:off x="817245" y="4559935"/>
+            <a:ext cx="1296670" cy="230505"/>
           </a:xfrm>
           <a:prstGeom prst="rect">
             <a:avLst/>
@@ -7986,8 +9755,8 @@
         </p:nvCxnSpPr>
         <p:spPr>
           <a:xfrm flipH="1">
-            <a:off x="1494155" y="2225040"/>
-            <a:ext cx="441960" cy="589280"/>
+            <a:off x="1606550" y="2225040"/>
+            <a:ext cx="507365" cy="589280"/>
           </a:xfrm>
           <a:prstGeom prst="straightConnector1">
             <a:avLst/>
@@ -8095,7 +9864,7 @@
         <p:spPr>
           <a:xfrm>
             <a:off x="3310890" y="4272280"/>
-            <a:ext cx="1007110" cy="233045"/>
+            <a:ext cx="1111885" cy="233045"/>
           </a:xfrm>
           <a:prstGeom prst="rect">
             <a:avLst/>
@@ -8126,7 +9895,7 @@
         <p:spPr>
           <a:xfrm>
             <a:off x="3267710" y="4530090"/>
-            <a:ext cx="1050290" cy="200660"/>
+            <a:ext cx="1247775" cy="213360"/>
           </a:xfrm>
           <a:prstGeom prst="rect">
             <a:avLst/>
@@ -8159,8 +9928,8 @@
         </p:nvCxnSpPr>
         <p:spPr>
           <a:xfrm flipV="1">
-            <a:off x="1376680" y="3870325"/>
-            <a:ext cx="2567940" cy="688975"/>
+            <a:off x="1465580" y="3870325"/>
+            <a:ext cx="2479040" cy="920115"/>
           </a:xfrm>
           <a:prstGeom prst="straightConnector1">
             <a:avLst/>
@@ -8196,7 +9965,7 @@
         <p:spPr>
           <a:xfrm>
             <a:off x="4963795" y="4255770"/>
-            <a:ext cx="3313430" cy="675640"/>
+            <a:ext cx="3935730" cy="675640"/>
           </a:xfrm>
           <a:prstGeom prst="rect">
             <a:avLst/>
@@ -8253,7 +10022,7 @@
         </p:nvSpPr>
         <p:spPr>
           <a:xfrm>
-            <a:off x="6673850" y="4683125"/>
+            <a:off x="7020560" y="4683125"/>
             <a:ext cx="1465580" cy="233045"/>
           </a:xfrm>
           <a:prstGeom prst="rect">
@@ -8287,8 +10056,8 @@
         </p:nvCxnSpPr>
         <p:spPr>
           <a:xfrm>
-            <a:off x="4318000" y="4389120"/>
-            <a:ext cx="645795" cy="204470"/>
+            <a:off x="4422775" y="4389120"/>
+            <a:ext cx="541020" cy="204470"/>
           </a:xfrm>
           <a:prstGeom prst="straightConnector1">
             <a:avLst/>
@@ -8324,7 +10093,7 @@
         <p:spPr>
           <a:xfrm>
             <a:off x="5337175" y="4497705"/>
-            <a:ext cx="1007110" cy="233045"/>
+            <a:ext cx="1111885" cy="233045"/>
           </a:xfrm>
           <a:prstGeom prst="rect">
             <a:avLst/>
@@ -8354,8 +10123,8 @@
         </p:nvSpPr>
         <p:spPr>
           <a:xfrm>
-            <a:off x="4986655" y="3457575"/>
-            <a:ext cx="2257425" cy="675640"/>
+            <a:off x="4898390" y="3457575"/>
+            <a:ext cx="2496820" cy="675640"/>
           </a:xfrm>
           <a:prstGeom prst="rect">
             <a:avLst/>
@@ -8405,7 +10174,7 @@
         <p:spPr>
           <a:xfrm>
             <a:off x="5293995" y="3708400"/>
-            <a:ext cx="1219200" cy="170180"/>
+            <a:ext cx="1379855" cy="203835"/>
           </a:xfrm>
           <a:prstGeom prst="rect">
             <a:avLst/>
@@ -8438,8 +10207,8 @@
         </p:nvCxnSpPr>
         <p:spPr>
           <a:xfrm flipV="1">
-            <a:off x="4318000" y="3795395"/>
-            <a:ext cx="668655" cy="835025"/>
+            <a:off x="4515485" y="3795395"/>
+            <a:ext cx="382905" cy="841375"/>
           </a:xfrm>
           <a:prstGeom prst="straightConnector1">
             <a:avLst/>
@@ -8475,7 +10244,7 @@
         <p:spPr>
           <a:xfrm>
             <a:off x="3012440" y="1009650"/>
-            <a:ext cx="2860675" cy="2399665"/>
+            <a:ext cx="2666365" cy="2399665"/>
           </a:xfrm>
           <a:prstGeom prst="rect">
             <a:avLst/>
@@ -8710,8 +10479,8 @@
         </p:nvCxnSpPr>
         <p:spPr>
           <a:xfrm flipH="1" flipV="1">
-            <a:off x="4443095" y="3409315"/>
-            <a:ext cx="1460500" cy="299085"/>
+            <a:off x="4345940" y="3409315"/>
+            <a:ext cx="1638300" cy="299085"/>
           </a:xfrm>
           <a:prstGeom prst="straightConnector1">
             <a:avLst/>
@@ -8746,8 +10515,8 @@
         </p:nvSpPr>
         <p:spPr>
           <a:xfrm>
-            <a:off x="6221095" y="323850"/>
-            <a:ext cx="2496820" cy="1476375"/>
+            <a:off x="6025515" y="323850"/>
+            <a:ext cx="2981960" cy="1476375"/>
           </a:xfrm>
           <a:prstGeom prst="rect">
             <a:avLst/>
@@ -8820,7 +10589,7 @@
         <p:spPr>
           <a:xfrm flipV="1">
             <a:off x="4547235" y="1062355"/>
-            <a:ext cx="1673860" cy="874395"/>
+            <a:ext cx="1478280" cy="874395"/>
           </a:xfrm>
           <a:prstGeom prst="straightConnector1">
             <a:avLst/>
@@ -8855,8 +10624,8 @@
         </p:nvSpPr>
         <p:spPr>
           <a:xfrm>
-            <a:off x="5925185" y="1882140"/>
-            <a:ext cx="3201035" cy="706755"/>
+            <a:off x="5747385" y="1882140"/>
+            <a:ext cx="3485515" cy="706755"/>
           </a:xfrm>
           <a:prstGeom prst="rect">
             <a:avLst/>
@@ -8905,7 +10674,7 @@
         <p:spPr>
           <a:xfrm flipV="1">
             <a:off x="4466590" y="2235835"/>
-            <a:ext cx="1458595" cy="736600"/>
+            <a:ext cx="1280795" cy="736600"/>
           </a:xfrm>
           <a:prstGeom prst="straightConnector1">
             <a:avLst/>
@@ -8940,8 +10709,8 @@
         </p:nvSpPr>
         <p:spPr>
           <a:xfrm>
-            <a:off x="6406515" y="2621280"/>
-            <a:ext cx="1876425" cy="706755"/>
+            <a:off x="6096000" y="2621280"/>
+            <a:ext cx="2878455" cy="706755"/>
           </a:xfrm>
           <a:prstGeom prst="rect">
             <a:avLst/>
@@ -9016,7 +10785,7 @@
         <p:spPr>
           <a:xfrm flipV="1">
             <a:off x="4274820" y="2974975"/>
-            <a:ext cx="2131695" cy="274320"/>
+            <a:ext cx="1821180" cy="274320"/>
           </a:xfrm>
           <a:prstGeom prst="straightConnector1">
             <a:avLst/>
@@ -9048,14 +10817,14 @@
           <p:cNvPr id="46" name="直接箭头连接符 45"/>
           <p:cNvCxnSpPr>
             <a:stCxn id="31" idx="3"/>
-            <a:endCxn id="44" idx="2"/>
+            <a:endCxn id="44" idx="1"/>
           </p:cNvCxnSpPr>
           <p:nvPr/>
         </p:nvCxnSpPr>
         <p:spPr>
-          <a:xfrm flipV="1">
-            <a:off x="6344285" y="3328035"/>
-            <a:ext cx="1000760" cy="1286510"/>
+          <a:xfrm flipH="1" flipV="1">
+            <a:off x="6096000" y="2974975"/>
+            <a:ext cx="353060" cy="1639570"/>
           </a:xfrm>
           <a:prstGeom prst="straightConnector1">
             <a:avLst/>
@@ -9091,7 +10860,7 @@
         <p:spPr>
           <a:xfrm>
             <a:off x="7407275" y="3361690"/>
-            <a:ext cx="1633220" cy="860425"/>
+            <a:ext cx="2048510" cy="860425"/>
           </a:xfrm>
           <a:prstGeom prst="rect">
             <a:avLst/>
@@ -9155,8 +10924,8 @@
         </p:nvCxnSpPr>
         <p:spPr>
           <a:xfrm flipV="1">
-            <a:off x="7406640" y="4222115"/>
-            <a:ext cx="817245" cy="461010"/>
+            <a:off x="7753350" y="4222115"/>
+            <a:ext cx="678180" cy="461010"/>
           </a:xfrm>
           <a:prstGeom prst="straightConnector1">
             <a:avLst/>
@@ -9235,9 +11004,9 @@
               <a:solidFill>
                 <a:schemeClr val="tx1"/>
               </a:solidFill>
-              <a:latin typeface="Times New Roman" panose="02020603050405020304" charset="0"/>
-              <a:ea typeface="Times New Roman" panose="02020603050405020304" charset="0"/>
-              <a:cs typeface="Times New Roman" panose="02020603050405020304" charset="0"/>
+              <a:latin typeface="Times New Roman" panose="02020503050405090304" charset="0"/>
+              <a:ea typeface="Times New Roman" panose="02020503050405090304" charset="0"/>
+              <a:cs typeface="Times New Roman" panose="02020503050405090304" charset="0"/>
               <a:sym typeface="+mn-ea"/>
             </a:endParaRPr>
           </a:p>
@@ -9250,8 +11019,8 @@
                 <a:solidFill>
                   <a:schemeClr val="tx1"/>
                 </a:solidFill>
-                <a:latin typeface="Times New Roman" panose="02020603050405020304" charset="0"/>
-                <a:cs typeface="Times New Roman" panose="02020603050405020304" charset="0"/>
+                <a:latin typeface="Times New Roman" panose="02020503050405090304" charset="0"/>
+                <a:cs typeface="Times New Roman" panose="02020503050405090304" charset="0"/>
               </a:rPr>
               <a:t>Tkinter mainloop</a:t>
             </a:r>
@@ -9264,8 +11033,8 @@
               <a:solidFill>
                 <a:schemeClr val="tx1"/>
               </a:solidFill>
-              <a:latin typeface="Times New Roman" panose="02020603050405020304" charset="0"/>
-              <a:cs typeface="Times New Roman" panose="02020603050405020304" charset="0"/>
+              <a:latin typeface="Times New Roman" panose="02020503050405090304" charset="0"/>
+              <a:cs typeface="Times New Roman" panose="02020503050405090304" charset="0"/>
             </a:endParaRPr>
           </a:p>
         </p:txBody>
@@ -9301,8 +11070,8 @@
               <a:solidFill>
                 <a:schemeClr val="tx1"/>
               </a:solidFill>
-              <a:latin typeface="Times New Roman" panose="02020603050405020304" charset="0"/>
-              <a:cs typeface="Times New Roman" panose="02020603050405020304" charset="0"/>
+              <a:latin typeface="Times New Roman" panose="02020503050405090304" charset="0"/>
+              <a:cs typeface="Times New Roman" panose="02020503050405090304" charset="0"/>
             </a:endParaRPr>
           </a:p>
         </p:txBody>
@@ -9507,9 +11276,9 @@
                 <a:solidFill>
                   <a:srgbClr val="2E0158"/>
                 </a:solidFill>
-                <a:latin typeface="Times New Roman" panose="02020603050405020304" charset="0"/>
-                <a:ea typeface="Times New Roman" panose="02020603050405020304" charset="0"/>
-                <a:cs typeface="Times New Roman" panose="02020603050405020304" charset="0"/>
+                <a:latin typeface="Times New Roman" panose="02020503050405090304" charset="0"/>
+                <a:ea typeface="Times New Roman" panose="02020503050405090304" charset="0"/>
+                <a:cs typeface="Times New Roman" panose="02020503050405090304" charset="0"/>
               </a:rPr>
               <a:t>Tkinter Label (1)</a:t>
             </a:r>
@@ -9517,9 +11286,9 @@
               <a:solidFill>
                 <a:srgbClr val="2E0158"/>
               </a:solidFill>
-              <a:latin typeface="Times New Roman" panose="02020603050405020304" charset="0"/>
-              <a:ea typeface="宋体" panose="02010600030101010101" pitchFamily="2" charset="-122"/>
-              <a:cs typeface="Times New Roman" panose="02020603050405020304" charset="0"/>
+              <a:latin typeface="Times New Roman" panose="02020503050405090304" charset="0"/>
+              <a:ea typeface="宋体" pitchFamily="2" charset="-122"/>
+              <a:cs typeface="Times New Roman" panose="02020503050405090304" charset="0"/>
             </a:endParaRPr>
           </a:p>
         </p:txBody>
@@ -9555,9 +11324,9 @@
               <a:solidFill>
                 <a:srgbClr val="383838"/>
               </a:solidFill>
-              <a:latin typeface="Times New Roman" panose="02020603050405020304" charset="0"/>
-              <a:ea typeface="Times New Roman" panose="02020603050405020304" charset="0"/>
-              <a:cs typeface="Times New Roman" panose="02020603050405020304" charset="0"/>
+              <a:latin typeface="Times New Roman" panose="02020503050405090304" charset="0"/>
+              <a:ea typeface="Times New Roman" panose="02020503050405090304" charset="0"/>
+              <a:cs typeface="Times New Roman" panose="02020503050405090304" charset="0"/>
             </a:endParaRPr>
           </a:p>
         </p:txBody>
@@ -9792,9 +11561,9 @@
                 <a:solidFill>
                   <a:srgbClr val="2E0158"/>
                 </a:solidFill>
-                <a:latin typeface="Times New Roman" panose="02020603050405020304" charset="0"/>
-                <a:ea typeface="Times New Roman" panose="02020603050405020304" charset="0"/>
-                <a:cs typeface="Times New Roman" panose="02020603050405020304" charset="0"/>
+                <a:latin typeface="Times New Roman" panose="02020503050405090304" charset="0"/>
+                <a:ea typeface="Times New Roman" panose="02020503050405090304" charset="0"/>
+                <a:cs typeface="Times New Roman" panose="02020503050405090304" charset="0"/>
                 <a:sym typeface="+mn-ea"/>
               </a:rPr>
               <a:t>Tkinter Label (2)</a:t>
@@ -9834,9 +11603,9 @@
               <a:solidFill>
                 <a:srgbClr val="383838"/>
               </a:solidFill>
-              <a:latin typeface="Times New Roman" panose="02020603050405020304" charset="0"/>
-              <a:ea typeface="Times New Roman" panose="02020603050405020304" charset="0"/>
-              <a:cs typeface="Times New Roman" panose="02020603050405020304" charset="0"/>
+              <a:latin typeface="Times New Roman" panose="02020503050405090304" charset="0"/>
+              <a:ea typeface="Times New Roman" panose="02020503050405090304" charset="0"/>
+              <a:cs typeface="Times New Roman" panose="02020503050405090304" charset="0"/>
               <a:sym typeface="+mn-ea"/>
             </a:endParaRPr>
           </a:p>
@@ -10052,9 +11821,9 @@
                 <a:solidFill>
                   <a:srgbClr val="2E0158"/>
                 </a:solidFill>
-                <a:latin typeface="Times New Roman" panose="02020603050405020304" charset="0"/>
-                <a:ea typeface="Times New Roman" panose="02020603050405020304" charset="0"/>
-                <a:cs typeface="Times New Roman" panose="02020603050405020304" charset="0"/>
+                <a:latin typeface="Times New Roman" panose="02020503050405090304" charset="0"/>
+                <a:ea typeface="Times New Roman" panose="02020503050405090304" charset="0"/>
+                <a:cs typeface="Times New Roman" panose="02020503050405090304" charset="0"/>
                 <a:sym typeface="+mn-ea"/>
               </a:rPr>
               <a:t>Tkinter Button</a:t>
@@ -10095,9 +11864,9 @@
                 <a:solidFill>
                   <a:schemeClr val="tx1"/>
                 </a:solidFill>
-                <a:latin typeface="Times New Roman" panose="02020603050405020304" charset="0"/>
-                <a:ea typeface="Times New Roman" panose="02020603050405020304" charset="0"/>
-                <a:cs typeface="Times New Roman" panose="02020603050405020304" charset="0"/>
+                <a:latin typeface="Times New Roman" panose="02020503050405090304" charset="0"/>
+                <a:ea typeface="Times New Roman" panose="02020503050405090304" charset="0"/>
+                <a:cs typeface="Times New Roman" panose="02020503050405090304" charset="0"/>
                 <a:sym typeface="+mn-ea"/>
               </a:rPr>
               <a:t>import tkinter as tk</a:t>
@@ -10116,9 +11885,9 @@
                 <a:solidFill>
                   <a:schemeClr val="tx1"/>
                 </a:solidFill>
-                <a:latin typeface="Times New Roman" panose="02020603050405020304" charset="0"/>
-                <a:ea typeface="Times New Roman" panose="02020603050405020304" charset="0"/>
-                <a:cs typeface="Times New Roman" panose="02020603050405020304" charset="0"/>
+                <a:latin typeface="Times New Roman" panose="02020503050405090304" charset="0"/>
+                <a:ea typeface="Times New Roman" panose="02020503050405090304" charset="0"/>
+                <a:cs typeface="Times New Roman" panose="02020503050405090304" charset="0"/>
                 <a:sym typeface="+mn-ea"/>
               </a:rPr>
               <a:t>window=tk.Tk()</a:t>
@@ -10137,9 +11906,9 @@
                 <a:solidFill>
                   <a:schemeClr val="tx1"/>
                 </a:solidFill>
-                <a:latin typeface="Times New Roman" panose="02020603050405020304" charset="0"/>
-                <a:ea typeface="Times New Roman" panose="02020603050405020304" charset="0"/>
-                <a:cs typeface="Times New Roman" panose="02020603050405020304" charset="0"/>
+                <a:latin typeface="Times New Roman" panose="02020503050405090304" charset="0"/>
+                <a:ea typeface="Times New Roman" panose="02020503050405090304" charset="0"/>
+                <a:cs typeface="Times New Roman" panose="02020503050405090304" charset="0"/>
                 <a:sym typeface="+mn-ea"/>
               </a:rPr>
               <a:t>window.title('Mywindow')</a:t>
@@ -10158,9 +11927,9 @@
                 <a:solidFill>
                   <a:schemeClr val="tx1"/>
                 </a:solidFill>
-                <a:latin typeface="Times New Roman" panose="02020603050405020304" charset="0"/>
-                <a:ea typeface="Times New Roman" panose="02020603050405020304" charset="0"/>
-                <a:cs typeface="Times New Roman" panose="02020603050405020304" charset="0"/>
+                <a:latin typeface="Times New Roman" panose="02020503050405090304" charset="0"/>
+                <a:ea typeface="Times New Roman" panose="02020503050405090304" charset="0"/>
+                <a:cs typeface="Times New Roman" panose="02020503050405090304" charset="0"/>
                 <a:sym typeface="+mn-ea"/>
               </a:rPr>
               <a:t>window.geometry('200x100')</a:t>
@@ -10179,9 +11948,9 @@
                 <a:solidFill>
                   <a:schemeClr val="tx1"/>
                 </a:solidFill>
-                <a:latin typeface="Times New Roman" panose="02020603050405020304" charset="0"/>
-                <a:ea typeface="Times New Roman" panose="02020603050405020304" charset="0"/>
-                <a:cs typeface="Times New Roman" panose="02020603050405020304" charset="0"/>
+                <a:latin typeface="Times New Roman" panose="02020503050405090304" charset="0"/>
+                <a:ea typeface="Times New Roman" panose="02020503050405090304" charset="0"/>
+                <a:cs typeface="Times New Roman" panose="02020503050405090304" charset="0"/>
                 <a:sym typeface="+mn-ea"/>
               </a:rPr>
               <a:t>on_hit=False</a:t>
@@ -10200,9 +11969,9 @@
                 <a:solidFill>
                   <a:schemeClr val="tx1"/>
                 </a:solidFill>
-                <a:latin typeface="Times New Roman" panose="02020603050405020304" charset="0"/>
-                <a:ea typeface="Times New Roman" panose="02020603050405020304" charset="0"/>
-                <a:cs typeface="Times New Roman" panose="02020603050405020304" charset="0"/>
+                <a:latin typeface="Times New Roman" panose="02020503050405090304" charset="0"/>
+                <a:ea typeface="Times New Roman" panose="02020503050405090304" charset="0"/>
+                <a:cs typeface="Times New Roman" panose="02020503050405090304" charset="0"/>
                 <a:sym typeface="+mn-ea"/>
               </a:rPr>
               <a:t>var = tk.StringVar()</a:t>
@@ -10221,9 +11990,9 @@
                 <a:solidFill>
                   <a:schemeClr val="tx1"/>
                 </a:solidFill>
-                <a:latin typeface="Times New Roman" panose="02020603050405020304" charset="0"/>
-                <a:ea typeface="Times New Roman" panose="02020603050405020304" charset="0"/>
-                <a:cs typeface="Times New Roman" panose="02020603050405020304" charset="0"/>
+                <a:latin typeface="Times New Roman" panose="02020503050405090304" charset="0"/>
+                <a:ea typeface="Times New Roman" panose="02020503050405090304" charset="0"/>
+                <a:cs typeface="Times New Roman" panose="02020503050405090304" charset="0"/>
                 <a:sym typeface="+mn-ea"/>
               </a:rPr>
               <a:t>def hit_me():</a:t>
@@ -10242,9 +12011,9 @@
                 <a:solidFill>
                   <a:schemeClr val="tx1"/>
                 </a:solidFill>
-                <a:latin typeface="Times New Roman" panose="02020603050405020304" charset="0"/>
-                <a:ea typeface="Times New Roman" panose="02020603050405020304" charset="0"/>
-                <a:cs typeface="Times New Roman" panose="02020603050405020304" charset="0"/>
+                <a:latin typeface="Times New Roman" panose="02020503050405090304" charset="0"/>
+                <a:ea typeface="Times New Roman" panose="02020503050405090304" charset="0"/>
+                <a:cs typeface="Times New Roman" panose="02020503050405090304" charset="0"/>
                 <a:sym typeface="+mn-ea"/>
               </a:rPr>
               <a:t>    global on_hit</a:t>
@@ -10263,9 +12032,9 @@
                 <a:solidFill>
                   <a:schemeClr val="tx1"/>
                 </a:solidFill>
-                <a:latin typeface="Times New Roman" panose="02020603050405020304" charset="0"/>
-                <a:ea typeface="Times New Roman" panose="02020603050405020304" charset="0"/>
-                <a:cs typeface="Times New Roman" panose="02020603050405020304" charset="0"/>
+                <a:latin typeface="Times New Roman" panose="02020503050405090304" charset="0"/>
+                <a:ea typeface="Times New Roman" panose="02020503050405090304" charset="0"/>
+                <a:cs typeface="Times New Roman" panose="02020503050405090304" charset="0"/>
                 <a:sym typeface="+mn-ea"/>
               </a:rPr>
               <a:t>    if on_hit==False:</a:t>
@@ -10284,9 +12053,9 @@
                 <a:solidFill>
                   <a:schemeClr val="tx1"/>
                 </a:solidFill>
-                <a:latin typeface="Times New Roman" panose="02020603050405020304" charset="0"/>
-                <a:ea typeface="Times New Roman" panose="02020603050405020304" charset="0"/>
-                <a:cs typeface="Times New Roman" panose="02020603050405020304" charset="0"/>
+                <a:latin typeface="Times New Roman" panose="02020503050405090304" charset="0"/>
+                <a:ea typeface="Times New Roman" panose="02020503050405090304" charset="0"/>
+                <a:cs typeface="Times New Roman" panose="02020503050405090304" charset="0"/>
                 <a:sym typeface="+mn-ea"/>
               </a:rPr>
               <a:t>        on_hit=True</a:t>
@@ -10305,9 +12074,9 @@
                 <a:solidFill>
                   <a:schemeClr val="tx1"/>
                 </a:solidFill>
-                <a:latin typeface="Times New Roman" panose="02020603050405020304" charset="0"/>
-                <a:ea typeface="Times New Roman" panose="02020603050405020304" charset="0"/>
-                <a:cs typeface="Times New Roman" panose="02020603050405020304" charset="0"/>
+                <a:latin typeface="Times New Roman" panose="02020503050405090304" charset="0"/>
+                <a:ea typeface="Times New Roman" panose="02020503050405090304" charset="0"/>
+                <a:cs typeface="Times New Roman" panose="02020503050405090304" charset="0"/>
                 <a:sym typeface="+mn-ea"/>
               </a:rPr>
               <a:t>        var.set('You hit me!')</a:t>
@@ -10326,9 +12095,9 @@
                 <a:solidFill>
                   <a:schemeClr val="tx1"/>
                 </a:solidFill>
-                <a:latin typeface="Times New Roman" panose="02020603050405020304" charset="0"/>
-                <a:ea typeface="Times New Roman" panose="02020603050405020304" charset="0"/>
-                <a:cs typeface="Times New Roman" panose="02020603050405020304" charset="0"/>
+                <a:latin typeface="Times New Roman" panose="02020503050405090304" charset="0"/>
+                <a:ea typeface="Times New Roman" panose="02020503050405090304" charset="0"/>
+                <a:cs typeface="Times New Roman" panose="02020503050405090304" charset="0"/>
                 <a:sym typeface="+mn-ea"/>
               </a:rPr>
               <a:t>    else:</a:t>
@@ -10347,9 +12116,9 @@
                 <a:solidFill>
                   <a:schemeClr val="tx1"/>
                 </a:solidFill>
-                <a:latin typeface="Times New Roman" panose="02020603050405020304" charset="0"/>
-                <a:ea typeface="Times New Roman" panose="02020603050405020304" charset="0"/>
-                <a:cs typeface="Times New Roman" panose="02020603050405020304" charset="0"/>
+                <a:latin typeface="Times New Roman" panose="02020503050405090304" charset="0"/>
+                <a:ea typeface="Times New Roman" panose="02020503050405090304" charset="0"/>
+                <a:cs typeface="Times New Roman" panose="02020503050405090304" charset="0"/>
                 <a:sym typeface="+mn-ea"/>
               </a:rPr>
               <a:t>        on_hit=False</a:t>
@@ -10368,9 +12137,9 @@
                 <a:solidFill>
                   <a:schemeClr val="tx1"/>
                 </a:solidFill>
-                <a:latin typeface="Times New Roman" panose="02020603050405020304" charset="0"/>
-                <a:ea typeface="Times New Roman" panose="02020603050405020304" charset="0"/>
-                <a:cs typeface="Times New Roman" panose="02020603050405020304" charset="0"/>
+                <a:latin typeface="Times New Roman" panose="02020503050405090304" charset="0"/>
+                <a:ea typeface="Times New Roman" panose="02020503050405090304" charset="0"/>
+                <a:cs typeface="Times New Roman" panose="02020503050405090304" charset="0"/>
                 <a:sym typeface="+mn-ea"/>
               </a:rPr>
               <a:t>        var.set('')</a:t>
@@ -10389,9 +12158,9 @@
                 <a:solidFill>
                   <a:schemeClr val="tx1"/>
                 </a:solidFill>
-                <a:latin typeface="Times New Roman" panose="02020603050405020304" charset="0"/>
-                <a:ea typeface="Times New Roman" panose="02020603050405020304" charset="0"/>
-                <a:cs typeface="Times New Roman" panose="02020603050405020304" charset="0"/>
+                <a:latin typeface="Times New Roman" panose="02020503050405090304" charset="0"/>
+                <a:ea typeface="Times New Roman" panose="02020503050405090304" charset="0"/>
+                <a:cs typeface="Times New Roman" panose="02020503050405090304" charset="0"/>
                 <a:sym typeface="+mn-ea"/>
               </a:rPr>
               <a:t>b=tk.Button(window,text='hello',width=15,height=2,command=hit_me)</a:t>
@@ -10410,9 +12179,9 @@
                 <a:solidFill>
                   <a:schemeClr val="tx1"/>
                 </a:solidFill>
-                <a:latin typeface="Times New Roman" panose="02020603050405020304" charset="0"/>
-                <a:ea typeface="Times New Roman" panose="02020603050405020304" charset="0"/>
-                <a:cs typeface="Times New Roman" panose="02020603050405020304" charset="0"/>
+                <a:latin typeface="Times New Roman" panose="02020503050405090304" charset="0"/>
+                <a:ea typeface="Times New Roman" panose="02020503050405090304" charset="0"/>
+                <a:cs typeface="Times New Roman" panose="02020503050405090304" charset="0"/>
                 <a:sym typeface="+mn-ea"/>
               </a:rPr>
               <a:t>b.pack()</a:t>
@@ -10431,9 +12200,9 @@
                 <a:solidFill>
                   <a:schemeClr val="tx1"/>
                 </a:solidFill>
-                <a:latin typeface="Times New Roman" panose="02020603050405020304" charset="0"/>
-                <a:ea typeface="Times New Roman" panose="02020603050405020304" charset="0"/>
-                <a:cs typeface="Times New Roman" panose="02020603050405020304" charset="0"/>
+                <a:latin typeface="Times New Roman" panose="02020503050405090304" charset="0"/>
+                <a:ea typeface="Times New Roman" panose="02020503050405090304" charset="0"/>
+                <a:cs typeface="Times New Roman" panose="02020503050405090304" charset="0"/>
                 <a:sym typeface="+mn-ea"/>
               </a:rPr>
               <a:t>label = tk.Label(window, textvariable=var)</a:t>
@@ -10452,9 +12221,9 @@
                 <a:solidFill>
                   <a:schemeClr val="tx1"/>
                 </a:solidFill>
-                <a:latin typeface="Times New Roman" panose="02020603050405020304" charset="0"/>
-                <a:ea typeface="Times New Roman" panose="02020603050405020304" charset="0"/>
-                <a:cs typeface="Times New Roman" panose="02020603050405020304" charset="0"/>
+                <a:latin typeface="Times New Roman" panose="02020503050405090304" charset="0"/>
+                <a:ea typeface="Times New Roman" panose="02020503050405090304" charset="0"/>
+                <a:cs typeface="Times New Roman" panose="02020503050405090304" charset="0"/>
                 <a:sym typeface="+mn-ea"/>
               </a:rPr>
               <a:t>label.pack()</a:t>
@@ -10473,9 +12242,9 @@
                 <a:solidFill>
                   <a:schemeClr val="tx1"/>
                 </a:solidFill>
-                <a:latin typeface="Times New Roman" panose="02020603050405020304" charset="0"/>
-                <a:ea typeface="Times New Roman" panose="02020603050405020304" charset="0"/>
-                <a:cs typeface="Times New Roman" panose="02020603050405020304" charset="0"/>
+                <a:latin typeface="Times New Roman" panose="02020503050405090304" charset="0"/>
+                <a:ea typeface="Times New Roman" panose="02020503050405090304" charset="0"/>
+                <a:cs typeface="Times New Roman" panose="02020503050405090304" charset="0"/>
                 <a:sym typeface="+mn-ea"/>
               </a:rPr>
               <a:t>window.mainloop()</a:t>
@@ -10616,6 +12385,18 @@
 </file>
 
 <file path=ppt/tags/tag17.xml><?xml version="1.0" encoding="utf-8"?>
+<p:tagLst xmlns:a="http://schemas.openxmlformats.org/drawingml/2006/main" xmlns:r="http://schemas.openxmlformats.org/officeDocument/2006/relationships" xmlns:p="http://schemas.openxmlformats.org/presentationml/2006/main">
+  <p:tag name="KSO_WM_BEAUTIFY_FLAG" val=""/>
+</p:tagLst>
+</file>
+
+<file path=ppt/tags/tag18.xml><?xml version="1.0" encoding="utf-8"?>
+<p:tagLst xmlns:a="http://schemas.openxmlformats.org/drawingml/2006/main" xmlns:r="http://schemas.openxmlformats.org/officeDocument/2006/relationships" xmlns:p="http://schemas.openxmlformats.org/presentationml/2006/main">
+  <p:tag name="KSO_WM_BEAUTIFY_FLAG" val=""/>
+</p:tagLst>
+</file>
+
+<file path=ppt/tags/tag19.xml><?xml version="1.0" encoding="utf-8"?>
 <p:tagLst xmlns:a="http://schemas.openxmlformats.org/drawingml/2006/main" xmlns:r="http://schemas.openxmlformats.org/officeDocument/2006/relationships" xmlns:p="http://schemas.openxmlformats.org/presentationml/2006/main">
   <p:tag name="KSO_WM_BEAUTIFY_FLAG" val=""/>
 </p:tagLst>
@@ -11453,6 +13234,528 @@
 </file>
 
 <file path=ppt/theme/theme4.xml><?xml version="1.0" encoding="utf-8"?>
+<a:theme xmlns:a="http://schemas.openxmlformats.org/drawingml/2006/main" name="1_Office Theme">
+  <a:themeElements>
+    <a:clrScheme name="Office">
+      <a:dk1>
+        <a:sysClr val="windowText" lastClr="000000"/>
+      </a:dk1>
+      <a:lt1>
+        <a:sysClr val="window" lastClr="FFFFFF"/>
+      </a:lt1>
+      <a:dk2>
+        <a:srgbClr val="44546A"/>
+      </a:dk2>
+      <a:lt2>
+        <a:srgbClr val="E7E6E6"/>
+      </a:lt2>
+      <a:accent1>
+        <a:srgbClr val="4472C4"/>
+      </a:accent1>
+      <a:accent2>
+        <a:srgbClr val="ED7D31"/>
+      </a:accent2>
+      <a:accent3>
+        <a:srgbClr val="A5A5A5"/>
+      </a:accent3>
+      <a:accent4>
+        <a:srgbClr val="FFC000"/>
+      </a:accent4>
+      <a:accent5>
+        <a:srgbClr val="5B9BD5"/>
+      </a:accent5>
+      <a:accent6>
+        <a:srgbClr val="70AD47"/>
+      </a:accent6>
+      <a:hlink>
+        <a:srgbClr val="0563C1"/>
+      </a:hlink>
+      <a:folHlink>
+        <a:srgbClr val="954F72"/>
+      </a:folHlink>
+    </a:clrScheme>
+    <a:fontScheme name="Office">
+      <a:majorFont>
+        <a:latin typeface="Calibri Light"/>
+        <a:ea typeface=""/>
+        <a:cs typeface=""/>
+        <a:font script="Jpan" typeface="游ゴシック Light"/>
+        <a:font script="Hang" typeface="맑은 고딕"/>
+        <a:font script="Hans" typeface="等线 Light"/>
+        <a:font script="Hant" typeface="新細明體"/>
+        <a:font script="Arab" typeface="Times New Roman"/>
+        <a:font script="Hebr" typeface="Times New Roman"/>
+        <a:font script="Thai" typeface="Angsana New"/>
+        <a:font script="Ethi" typeface="Nyala"/>
+        <a:font script="Beng" typeface="Vrinda"/>
+        <a:font script="Gujr" typeface="Shruti"/>
+        <a:font script="Khmr" typeface="MoolBoran"/>
+        <a:font script="Knda" typeface="Tunga"/>
+        <a:font script="Guru" typeface="Raavi"/>
+        <a:font script="Cans" typeface="Euphemia"/>
+        <a:font script="Cher" typeface="Plantagenet Cherokee"/>
+        <a:font script="Yiii" typeface="Microsoft Yi Baiti"/>
+        <a:font script="Tibt" typeface="Microsoft Himalaya"/>
+        <a:font script="Thaa" typeface="MV Boli"/>
+        <a:font script="Deva" typeface="Mangal"/>
+        <a:font script="Telu" typeface="Gautami"/>
+        <a:font script="Taml" typeface="Latha"/>
+        <a:font script="Syrc" typeface="Estrangelo Edessa"/>
+        <a:font script="Orya" typeface="Kalinga"/>
+        <a:font script="Mlym" typeface="Kartika"/>
+        <a:font script="Laoo" typeface="DokChampa"/>
+        <a:font script="Sinh" typeface="Iskoola Pota"/>
+        <a:font script="Mong" typeface="Mongolian Baiti"/>
+        <a:font script="Viet" typeface="Times New Roman"/>
+        <a:font script="Uigh" typeface="Microsoft Uighur"/>
+        <a:font script="Geor" typeface="Sylfaen"/>
+      </a:majorFont>
+      <a:minorFont>
+        <a:latin typeface="Calibri"/>
+        <a:ea typeface=""/>
+        <a:cs typeface=""/>
+        <a:font script="Jpan" typeface="游ゴシック"/>
+        <a:font script="Hang" typeface="맑은 고딕"/>
+        <a:font script="Hans" typeface="等线"/>
+        <a:font script="Hant" typeface="新細明體"/>
+        <a:font script="Arab" typeface="Arial"/>
+        <a:font script="Hebr" typeface="Arial"/>
+        <a:font script="Thai" typeface="Cordia New"/>
+        <a:font script="Ethi" typeface="Nyala"/>
+        <a:font script="Beng" typeface="Vrinda"/>
+        <a:font script="Gujr" typeface="Shruti"/>
+        <a:font script="Khmr" typeface="DaunPenh"/>
+        <a:font script="Knda" typeface="Tunga"/>
+        <a:font script="Guru" typeface="Raavi"/>
+        <a:font script="Cans" typeface="Euphemia"/>
+        <a:font script="Cher" typeface="Plantagenet Cherokee"/>
+        <a:font script="Yiii" typeface="Microsoft Yi Baiti"/>
+        <a:font script="Tibt" typeface="Microsoft Himalaya"/>
+        <a:font script="Thaa" typeface="MV Boli"/>
+        <a:font script="Deva" typeface="Mangal"/>
+        <a:font script="Telu" typeface="Gautami"/>
+        <a:font script="Taml" typeface="Latha"/>
+        <a:font script="Syrc" typeface="Estrangelo Edessa"/>
+        <a:font script="Orya" typeface="Kalinga"/>
+        <a:font script="Mlym" typeface="Kartika"/>
+        <a:font script="Laoo" typeface="DokChampa"/>
+        <a:font script="Sinh" typeface="Iskoola Pota"/>
+        <a:font script="Mong" typeface="Mongolian Baiti"/>
+        <a:font script="Viet" typeface="Arial"/>
+        <a:font script="Uigh" typeface="Microsoft Uighur"/>
+        <a:font script="Geor" typeface="Sylfaen"/>
+      </a:minorFont>
+    </a:fontScheme>
+    <a:fmtScheme name="Office">
+      <a:fillStyleLst>
+        <a:solidFill>
+          <a:schemeClr val="phClr"/>
+        </a:solidFill>
+        <a:gradFill rotWithShape="1">
+          <a:gsLst>
+            <a:gs pos="0">
+              <a:schemeClr val="phClr">
+                <a:lumMod val="110000"/>
+                <a:satMod val="105000"/>
+                <a:tint val="67000"/>
+              </a:schemeClr>
+            </a:gs>
+            <a:gs pos="50000">
+              <a:schemeClr val="phClr">
+                <a:lumMod val="105000"/>
+                <a:satMod val="103000"/>
+                <a:tint val="73000"/>
+              </a:schemeClr>
+            </a:gs>
+            <a:gs pos="100000">
+              <a:schemeClr val="phClr">
+                <a:lumMod val="105000"/>
+                <a:satMod val="109000"/>
+                <a:tint val="81000"/>
+              </a:schemeClr>
+            </a:gs>
+          </a:gsLst>
+          <a:lin ang="5400000" scaled="0"/>
+        </a:gradFill>
+        <a:gradFill rotWithShape="1">
+          <a:gsLst>
+            <a:gs pos="0">
+              <a:schemeClr val="phClr">
+                <a:satMod val="103000"/>
+                <a:lumMod val="102000"/>
+                <a:tint val="94000"/>
+              </a:schemeClr>
+            </a:gs>
+            <a:gs pos="50000">
+              <a:schemeClr val="phClr">
+                <a:satMod val="110000"/>
+                <a:lumMod val="100000"/>
+                <a:shade val="100000"/>
+              </a:schemeClr>
+            </a:gs>
+            <a:gs pos="100000">
+              <a:schemeClr val="phClr">
+                <a:lumMod val="99000"/>
+                <a:satMod val="120000"/>
+                <a:shade val="78000"/>
+              </a:schemeClr>
+            </a:gs>
+          </a:gsLst>
+          <a:lin ang="5400000" scaled="0"/>
+        </a:gradFill>
+      </a:fillStyleLst>
+      <a:lnStyleLst>
+        <a:ln w="6350" cap="flat" cmpd="sng" algn="ctr">
+          <a:solidFill>
+            <a:schemeClr val="phClr"/>
+          </a:solidFill>
+          <a:prstDash val="solid"/>
+          <a:miter lim="800000"/>
+        </a:ln>
+        <a:ln w="12700" cap="flat" cmpd="sng" algn="ctr">
+          <a:solidFill>
+            <a:schemeClr val="phClr"/>
+          </a:solidFill>
+          <a:prstDash val="solid"/>
+          <a:miter lim="800000"/>
+        </a:ln>
+        <a:ln w="19050" cap="flat" cmpd="sng" algn="ctr">
+          <a:solidFill>
+            <a:schemeClr val="phClr"/>
+          </a:solidFill>
+          <a:prstDash val="solid"/>
+          <a:miter lim="800000"/>
+        </a:ln>
+      </a:lnStyleLst>
+      <a:effectStyleLst>
+        <a:effectStyle>
+          <a:effectLst/>
+        </a:effectStyle>
+        <a:effectStyle>
+          <a:effectLst/>
+        </a:effectStyle>
+        <a:effectStyle>
+          <a:effectLst>
+            <a:outerShdw blurRad="57150" dist="19050" dir="5400000" algn="ctr" rotWithShape="0">
+              <a:srgbClr val="000000">
+                <a:alpha val="63000"/>
+              </a:srgbClr>
+            </a:outerShdw>
+          </a:effectLst>
+        </a:effectStyle>
+      </a:effectStyleLst>
+      <a:bgFillStyleLst>
+        <a:solidFill>
+          <a:schemeClr val="phClr"/>
+        </a:solidFill>
+        <a:solidFill>
+          <a:schemeClr val="phClr">
+            <a:tint val="95000"/>
+            <a:satMod val="170000"/>
+          </a:schemeClr>
+        </a:solidFill>
+        <a:gradFill rotWithShape="1">
+          <a:gsLst>
+            <a:gs pos="0">
+              <a:schemeClr val="phClr">
+                <a:tint val="93000"/>
+                <a:satMod val="150000"/>
+                <a:shade val="98000"/>
+                <a:lumMod val="102000"/>
+              </a:schemeClr>
+            </a:gs>
+            <a:gs pos="50000">
+              <a:schemeClr val="phClr">
+                <a:tint val="98000"/>
+                <a:satMod val="130000"/>
+                <a:shade val="90000"/>
+                <a:lumMod val="103000"/>
+              </a:schemeClr>
+            </a:gs>
+            <a:gs pos="100000">
+              <a:schemeClr val="phClr">
+                <a:shade val="63000"/>
+                <a:satMod val="120000"/>
+              </a:schemeClr>
+            </a:gs>
+          </a:gsLst>
+          <a:lin ang="5400000" scaled="0"/>
+        </a:gradFill>
+      </a:bgFillStyleLst>
+    </a:fmtScheme>
+  </a:themeElements>
+  <a:objectDefaults/>
+  <a:extraClrSchemeLst/>
+  <a:extLst>
+    <a:ext uri="{05A4C25C-085E-4340-85A3-A5531E510DB2}">
+      <thm15:themeFamily xmlns:thm15="http://schemas.microsoft.com/office/thememl/2012/main" name="Office Theme" id="{62F939B6-93AF-4DB8-9C6B-D6C7DFDC589F}" vid="{4A3C46E8-61CC-4603-A589-7422A47A8E4A}"/>
+    </a:ext>
+  </a:extLst>
+</a:theme>
+</file>
+
+<file path=ppt/theme/theme5.xml><?xml version="1.0" encoding="utf-8"?>
+<a:theme xmlns:a="http://schemas.openxmlformats.org/drawingml/2006/main" name="2_Office Theme">
+  <a:themeElements>
+    <a:clrScheme name="Office">
+      <a:dk1>
+        <a:sysClr val="windowText" lastClr="000000"/>
+      </a:dk1>
+      <a:lt1>
+        <a:sysClr val="window" lastClr="FFFFFF"/>
+      </a:lt1>
+      <a:dk2>
+        <a:srgbClr val="44546A"/>
+      </a:dk2>
+      <a:lt2>
+        <a:srgbClr val="E7E6E6"/>
+      </a:lt2>
+      <a:accent1>
+        <a:srgbClr val="4472C4"/>
+      </a:accent1>
+      <a:accent2>
+        <a:srgbClr val="ED7D31"/>
+      </a:accent2>
+      <a:accent3>
+        <a:srgbClr val="A5A5A5"/>
+      </a:accent3>
+      <a:accent4>
+        <a:srgbClr val="FFC000"/>
+      </a:accent4>
+      <a:accent5>
+        <a:srgbClr val="5B9BD5"/>
+      </a:accent5>
+      <a:accent6>
+        <a:srgbClr val="70AD47"/>
+      </a:accent6>
+      <a:hlink>
+        <a:srgbClr val="0563C1"/>
+      </a:hlink>
+      <a:folHlink>
+        <a:srgbClr val="954F72"/>
+      </a:folHlink>
+    </a:clrScheme>
+    <a:fontScheme name="Office">
+      <a:majorFont>
+        <a:latin typeface="Calibri Light"/>
+        <a:ea typeface=""/>
+        <a:cs typeface=""/>
+        <a:font script="Jpan" typeface="游ゴシック Light"/>
+        <a:font script="Hang" typeface="맑은 고딕"/>
+        <a:font script="Hans" typeface="等线 Light"/>
+        <a:font script="Hant" typeface="新細明體"/>
+        <a:font script="Arab" typeface="Times New Roman"/>
+        <a:font script="Hebr" typeface="Times New Roman"/>
+        <a:font script="Thai" typeface="Angsana New"/>
+        <a:font script="Ethi" typeface="Nyala"/>
+        <a:font script="Beng" typeface="Vrinda"/>
+        <a:font script="Gujr" typeface="Shruti"/>
+        <a:font script="Khmr" typeface="MoolBoran"/>
+        <a:font script="Knda" typeface="Tunga"/>
+        <a:font script="Guru" typeface="Raavi"/>
+        <a:font script="Cans" typeface="Euphemia"/>
+        <a:font script="Cher" typeface="Plantagenet Cherokee"/>
+        <a:font script="Yiii" typeface="Microsoft Yi Baiti"/>
+        <a:font script="Tibt" typeface="Microsoft Himalaya"/>
+        <a:font script="Thaa" typeface="MV Boli"/>
+        <a:font script="Deva" typeface="Mangal"/>
+        <a:font script="Telu" typeface="Gautami"/>
+        <a:font script="Taml" typeface="Latha"/>
+        <a:font script="Syrc" typeface="Estrangelo Edessa"/>
+        <a:font script="Orya" typeface="Kalinga"/>
+        <a:font script="Mlym" typeface="Kartika"/>
+        <a:font script="Laoo" typeface="DokChampa"/>
+        <a:font script="Sinh" typeface="Iskoola Pota"/>
+        <a:font script="Mong" typeface="Mongolian Baiti"/>
+        <a:font script="Viet" typeface="Times New Roman"/>
+        <a:font script="Uigh" typeface="Microsoft Uighur"/>
+        <a:font script="Geor" typeface="Sylfaen"/>
+      </a:majorFont>
+      <a:minorFont>
+        <a:latin typeface="Calibri"/>
+        <a:ea typeface=""/>
+        <a:cs typeface=""/>
+        <a:font script="Jpan" typeface="游ゴシック"/>
+        <a:font script="Hang" typeface="맑은 고딕"/>
+        <a:font script="Hans" typeface="等线"/>
+        <a:font script="Hant" typeface="新細明體"/>
+        <a:font script="Arab" typeface="Arial"/>
+        <a:font script="Hebr" typeface="Arial"/>
+        <a:font script="Thai" typeface="Cordia New"/>
+        <a:font script="Ethi" typeface="Nyala"/>
+        <a:font script="Beng" typeface="Vrinda"/>
+        <a:font script="Gujr" typeface="Shruti"/>
+        <a:font script="Khmr" typeface="DaunPenh"/>
+        <a:font script="Knda" typeface="Tunga"/>
+        <a:font script="Guru" typeface="Raavi"/>
+        <a:font script="Cans" typeface="Euphemia"/>
+        <a:font script="Cher" typeface="Plantagenet Cherokee"/>
+        <a:font script="Yiii" typeface="Microsoft Yi Baiti"/>
+        <a:font script="Tibt" typeface="Microsoft Himalaya"/>
+        <a:font script="Thaa" typeface="MV Boli"/>
+        <a:font script="Deva" typeface="Mangal"/>
+        <a:font script="Telu" typeface="Gautami"/>
+        <a:font script="Taml" typeface="Latha"/>
+        <a:font script="Syrc" typeface="Estrangelo Edessa"/>
+        <a:font script="Orya" typeface="Kalinga"/>
+        <a:font script="Mlym" typeface="Kartika"/>
+        <a:font script="Laoo" typeface="DokChampa"/>
+        <a:font script="Sinh" typeface="Iskoola Pota"/>
+        <a:font script="Mong" typeface="Mongolian Baiti"/>
+        <a:font script="Viet" typeface="Arial"/>
+        <a:font script="Uigh" typeface="Microsoft Uighur"/>
+        <a:font script="Geor" typeface="Sylfaen"/>
+      </a:minorFont>
+    </a:fontScheme>
+    <a:fmtScheme name="Office">
+      <a:fillStyleLst>
+        <a:solidFill>
+          <a:schemeClr val="phClr"/>
+        </a:solidFill>
+        <a:gradFill rotWithShape="1">
+          <a:gsLst>
+            <a:gs pos="0">
+              <a:schemeClr val="phClr">
+                <a:lumMod val="110000"/>
+                <a:satMod val="105000"/>
+                <a:tint val="67000"/>
+              </a:schemeClr>
+            </a:gs>
+            <a:gs pos="50000">
+              <a:schemeClr val="phClr">
+                <a:lumMod val="105000"/>
+                <a:satMod val="103000"/>
+                <a:tint val="73000"/>
+              </a:schemeClr>
+            </a:gs>
+            <a:gs pos="100000">
+              <a:schemeClr val="phClr">
+                <a:lumMod val="105000"/>
+                <a:satMod val="109000"/>
+                <a:tint val="81000"/>
+              </a:schemeClr>
+            </a:gs>
+          </a:gsLst>
+          <a:lin ang="5400000" scaled="0"/>
+        </a:gradFill>
+        <a:gradFill rotWithShape="1">
+          <a:gsLst>
+            <a:gs pos="0">
+              <a:schemeClr val="phClr">
+                <a:satMod val="103000"/>
+                <a:lumMod val="102000"/>
+                <a:tint val="94000"/>
+              </a:schemeClr>
+            </a:gs>
+            <a:gs pos="50000">
+              <a:schemeClr val="phClr">
+                <a:satMod val="110000"/>
+                <a:lumMod val="100000"/>
+                <a:shade val="100000"/>
+              </a:schemeClr>
+            </a:gs>
+            <a:gs pos="100000">
+              <a:schemeClr val="phClr">
+                <a:lumMod val="99000"/>
+                <a:satMod val="120000"/>
+                <a:shade val="78000"/>
+              </a:schemeClr>
+            </a:gs>
+          </a:gsLst>
+          <a:lin ang="5400000" scaled="0"/>
+        </a:gradFill>
+      </a:fillStyleLst>
+      <a:lnStyleLst>
+        <a:ln w="6350" cap="flat" cmpd="sng" algn="ctr">
+          <a:solidFill>
+            <a:schemeClr val="phClr"/>
+          </a:solidFill>
+          <a:prstDash val="solid"/>
+          <a:miter lim="800000"/>
+        </a:ln>
+        <a:ln w="12700" cap="flat" cmpd="sng" algn="ctr">
+          <a:solidFill>
+            <a:schemeClr val="phClr"/>
+          </a:solidFill>
+          <a:prstDash val="solid"/>
+          <a:miter lim="800000"/>
+        </a:ln>
+        <a:ln w="19050" cap="flat" cmpd="sng" algn="ctr">
+          <a:solidFill>
+            <a:schemeClr val="phClr"/>
+          </a:solidFill>
+          <a:prstDash val="solid"/>
+          <a:miter lim="800000"/>
+        </a:ln>
+      </a:lnStyleLst>
+      <a:effectStyleLst>
+        <a:effectStyle>
+          <a:effectLst/>
+        </a:effectStyle>
+        <a:effectStyle>
+          <a:effectLst/>
+        </a:effectStyle>
+        <a:effectStyle>
+          <a:effectLst>
+            <a:outerShdw blurRad="57150" dist="19050" dir="5400000" algn="ctr" rotWithShape="0">
+              <a:srgbClr val="000000">
+                <a:alpha val="63000"/>
+              </a:srgbClr>
+            </a:outerShdw>
+          </a:effectLst>
+        </a:effectStyle>
+      </a:effectStyleLst>
+      <a:bgFillStyleLst>
+        <a:solidFill>
+          <a:schemeClr val="phClr"/>
+        </a:solidFill>
+        <a:solidFill>
+          <a:schemeClr val="phClr">
+            <a:tint val="95000"/>
+            <a:satMod val="170000"/>
+          </a:schemeClr>
+        </a:solidFill>
+        <a:gradFill rotWithShape="1">
+          <a:gsLst>
+            <a:gs pos="0">
+              <a:schemeClr val="phClr">
+                <a:tint val="93000"/>
+                <a:satMod val="150000"/>
+                <a:shade val="98000"/>
+                <a:lumMod val="102000"/>
+              </a:schemeClr>
+            </a:gs>
+            <a:gs pos="50000">
+              <a:schemeClr val="phClr">
+                <a:tint val="98000"/>
+                <a:satMod val="130000"/>
+                <a:shade val="90000"/>
+                <a:lumMod val="103000"/>
+              </a:schemeClr>
+            </a:gs>
+            <a:gs pos="100000">
+              <a:schemeClr val="phClr">
+                <a:shade val="63000"/>
+                <a:satMod val="120000"/>
+              </a:schemeClr>
+            </a:gs>
+          </a:gsLst>
+          <a:lin ang="5400000" scaled="0"/>
+        </a:gradFill>
+      </a:bgFillStyleLst>
+    </a:fmtScheme>
+  </a:themeElements>
+  <a:objectDefaults/>
+  <a:extraClrSchemeLst/>
+  <a:extLst>
+    <a:ext uri="{05A4C25C-085E-4340-85A3-A5531E510DB2}">
+      <thm15:themeFamily xmlns:thm15="http://schemas.microsoft.com/office/thememl/2012/main" name="Office Theme" id="{62F939B6-93AF-4DB8-9C6B-D6C7DFDC589F}" vid="{4A3C46E8-61CC-4603-A589-7422A47A8E4A}"/>
+    </a:ext>
+  </a:extLst>
+</a:theme>
+</file>
+
+<file path=ppt/theme/theme6.xml><?xml version="1.0" encoding="utf-8"?>
 <a:theme xmlns:a="http://schemas.openxmlformats.org/drawingml/2006/main" name="Office Theme">
   <a:themeElements>
     <a:clrScheme name="Office">
@@ -11713,7 +14016,7 @@
 </a:theme>
 </file>
 
-<file path=ppt/theme/theme5.xml><?xml version="1.0" encoding="utf-8"?>
+<file path=ppt/theme/theme7.xml><?xml version="1.0" encoding="utf-8"?>
 <a:theme xmlns:a="http://schemas.openxmlformats.org/drawingml/2006/main" name="Office 主题">
   <a:themeElements>
     <a:clrScheme name="Office">
